--- a/pitch_deck/qlaudia_pitch_deck.pptx
+++ b/pitch_deck/qlaudia_pitch_deck.pptx
@@ -36,6 +36,9 @@
     <p:sldId id="284" r:id="rId36"/>
     <p:sldId id="285" r:id="rId37"/>
     <p:sldId id="286" r:id="rId38"/>
+    <p:sldId id="287" r:id="rId39"/>
+    <p:sldId id="288" r:id="rId40"/>
+    <p:sldId id="289" r:id="rId41"/>
   </p:sldIdLst>
   <p:sldSz cx="12191695" cy="6858000" type="screen4x3"/>
   <p:notesSz cx="6858000" cy="9144000"/>
@@ -717,7 +720,7 @@
           <a:p>
             <a:r>
               <a:rPr sz="1100"/>
-              <a:t>This is the most important unfinished slide after the founder slide, and it's the one that pays off Slide 1. A deck that opens on $7.3T and never names a reachable number reads as unserious. A deck that opens on $7.3T and then says "and here is the $40M segment I can win first, at this price, with these first ten customers" reads as ambitious and grounded.</a:t>
+              <a:t>This is the most important unfinished slide after the founder slide, and it's the one that pays off the Market slide. A deck that opens on $7.3T and never names a reachable number reads as unserious. A deck that opens on $7.3T and then says "and here is the $40M segment I can win first, at this price, with these first ten customers" reads as ambitious and grounded.</a:t>
             </a:r>
           </a:p>
           <a:p>
@@ -729,6 +732,12 @@
           <a:p>
             <a:r>
               <a:rPr sz="1100"/>
+              <a:t>Close the gap the demo just opened — one sentence, unprompted. They watched you build a startup-finance course and are now hearing about homeschool math. Say it before they wonder: "The demo was a proof of generality, not the market I'm entering." Left unsaid, the obvious question is "so which business is this?", and an angel who thinks you are undecided about your market stops listening to the rest.</a:t>
+            </a:r>
+          </a:p>
+          <a:p>
+            <a:r>
+              <a:rPr sz="1100"/>
               <a:t>Why homeschool math/science is the recommended beachhead — the reasoning, for when an angel challenges it:</a:t>
             </a:r>
           </a:p>
@@ -771,7 +780,7 @@
           <a:p>
             <a:r>
               <a:rPr sz="1100"/>
-              <a:t>Honest risks to have answers for: (a) AI-generated content skepticism runs high among homeschool parents, especially religious ones — the figure-verification and separate-QA-model story from Slide 6 is the answer, deployed here as a sales argument rather than a disclaimer; (b) buying is seasonal, concentrated in spring and summer; (c) price sensitivity is real — this is a value-conscious buyer.</a:t>
+              <a:t>Honest risks to have answers for: (a) AI-generated content skepticism runs high among homeschool parents, especially religious ones — the figure-verification and separate-QA-model story from the Pipeline slide is the answer, deployed here as a sales argument rather than a disclaimer; (b) buying is seasonal, concentrated in spring and summer; (c) price sensitivity is real — this is a value-conscious buyer.</a:t>
             </a:r>
           </a:p>
           <a:p>
@@ -872,25 +881,37 @@
           <a:p>
             <a:r>
               <a:rPr sz="1100"/>
-              <a:t>Lead with what's built, and be straight about what isn't. These are production artifacts in Neo4j, not projections — 64 complete courses with verified figures and full prerequisite graphs, generated by one person. That is real execution evidence.</a:t>
+              <a:t>Lead with what's built, then volunteer what isn't. The build numbers are real artifacts in the production graph — verifiable in a single query — produced by one person. That is execution evidence, and it is the strongest thing on the slide.</a:t>
             </a:r>
           </a:p>
           <a:p>
             <a:r>
               <a:rPr sz="1100"/>
-              <a:t>Do not imply user traction you don't have. The database currently holds one real user — Charles. If an angel asks about users, say plainly: pre-launch, no user base yet, and here is the beachhead plan (Slide 9). Angels fund pre-traction constantly; they do not fund founders who appear to be hiding its absence, and a graph query would expose an overstatement in seconds.</a:t>
+              <a:t>The single best data point you have is one person. Five arrhythmia courses, 224 concepts, every one completed, in sequence. That is not browsing — that is someone using Qlaudia as their actual learning path through a hard clinical subject, and analytics show roughly 23 hours of engagement behind it. One user like that is worth more than a thousand visitors, and an angel knows it. Name him, describe what he did, and stop.</a:t>
             </a:r>
           </a:p>
           <a:p>
             <a:r>
               <a:rPr sz="1100"/>
-              <a:t>The reframe that works: the risk that's been retired here is technical, not commercial. The pipeline works end to end, the content is verifiable, the patent is filed. What's unproven is distribution — which is exactly what the round buys.</a:t>
+              <a:t>Say the quiz number before they find it. Nobody in production has answered a single assessment question — competency is 0% across every user. Progress is self-marked "got it," not demonstrated mastery. Volunteer this: it is a product-surfacing problem, it is fixable, and it is exactly the kind of thing that destroys credibility if they discover it after you have described assessments as a differentiator on the Pipeline slide.</a:t>
             </a:r>
           </a:p>
           <a:p>
             <a:r>
               <a:rPr sz="1100"/>
-              <a:t>⚠️ TODO: consider a "domains generated per month" trend line once there are a few months of data — direction is more persuasive than a static count.</a:t>
+              <a:t>Be equally straight about the funnel. 86 visitors produced 15 accounts, and most engaged sessions come from two locations — Charles and the one power user. The honest reading is that the product works on the people who reach it, and almost nobody reaches it. That is a conversion problem, not a proof problem, and it is what the round addresses.</a:t>
+            </a:r>
+          </a:p>
+          <a:p>
+            <a:r>
+              <a:rPr sz="1100"/>
+              <a:t>The reframe that works: the risk retired here is technical. The pipeline works end to end, the content is verifiable, the patent is filed, and real users complete real courses. What is unproven is distribution — which is exactly what this round buys.</a:t>
+            </a:r>
+          </a:p>
+          <a:p>
+            <a:r>
+              <a:rPr sz="1100"/>
+              <a:t>⚠️ TODO: refresh these figures the week of the pitch; they move. scripts/list_user_enrollments.py --prod produces the usage half.</a:t>
             </a:r>
           </a:p>
         </p:txBody>
@@ -961,7 +982,37 @@
           <a:p>
             <a:r>
               <a:rPr sz="1100"/>
-              <a:t>Angels care less about a spend breakdown than about one thing: what is measurably true after this money that isn't true today? Name that milestone explicitly and tie every allocation line to it.</a:t>
+              <a:t>Open with the asymmetry, in these words: "Most people at this stage are asking you to fund a build. I've already built it. This round funds getting it in front of people, and the infrastructure to handle them when they arrive." Most angel deals carry both build risk and market risk; you are asking them to carry one. Say so — it is the single strongest framing available to you and it belongs here, not buried.</a:t>
+            </a:r>
+          </a:p>
+          <a:p>
+            <a:r>
+              <a:rPr sz="1100"/>
+              <a:t>Say "feature-complete, hardening needed for scale," never "complete." The product works, has never met load, and runs on free tiers. The precise version is credible and justifies line item 2; the simple version invites someone to go find the exception — and they will.</a:t>
+            </a:r>
+          </a:p>
+          <a:p>
+            <a:r>
+              <a:rPr sz="1100"/>
+              <a:t>Rate limiting is a financial control, not a performance one. Each generated course costs about $5 in model calls. Exposed without hard limits, that is a direct attack surface on your bank account. Saying this demonstrates you understand your own unit economics as a liability, not only as a selling point.</a:t>
+            </a:r>
+          </a:p>
+          <a:p>
+            <a:r>
+              <a:rPr sz="1100"/>
+              <a:t>Why revenue starts when it starts — the calendar, not drift. Homeschool curriculum is bought February through August; the 2026 cycle has closed. Pre-revenue here is externally imposed and dateable, which is a far better answer than any traffic projection: "this round funds the run-up to a known buying window."</a:t>
+            </a:r>
+          </a:p>
+          <a:p>
+            <a:r>
+              <a:rPr sz="1100"/>
+              <a:t>Angels care about one thing on this slide: what is measurably true afterwards that isn't true today. Name that milestone, then tie all three buckets to it.</a:t>
+            </a:r>
+          </a:p>
+          <a:p>
+            <a:r>
+              <a:rPr sz="1100"/>
+              <a:t>⚠️ TODO: the numbers. Bucket sizes, months of runway, and the milestone — these drive the raise size on the Ask slide, so settle them first.</a:t>
             </a:r>
           </a:p>
         </p:txBody>
@@ -1127,7 +1178,13 @@
           <a:p>
             <a:r>
               <a:rPr sz="1100"/>
-              <a:t>Note the publishers are simultaneously the Slide 1 competition and the most motivated acquirers. That's a strength; say so.</a:t>
+              <a:t>Note the publishers are simultaneously the competition named on the Market slide and the most motivated acquirers. That's a strength; say so.</a:t>
+            </a:r>
+          </a:p>
+          <a:p>
+            <a:r>
+              <a:rPr sz="1100"/>
+              <a:t>Closing beat, after the last slide. End on the demo rather than on the ask — hand them the link to the course they watched being built, and make the offer: "Name any subject and I'll send you that course tomorrow." It leaves them with something of their own rather than a request, and it gives you a reason to be back in their inbox within 24 hours without chasing.</a:t>
             </a:r>
           </a:p>
           <a:p>
@@ -1151,7 +1208,7 @@
           <a:p>
             <a:r>
               <a:rPr sz="1100"/>
-              <a:t>3. They already have the gap. Every frontier lab is pushing into education and every one of them ships a fluent tutor with no curriculum, no mastery model, and no prerequisite structure — precisely the deficiency on Slide 2. We are the missing layer, already built.</a:t>
+              <a:t>3. They already have the gap. Every frontier lab is pushing into education and every one of them ships a fluent tutor with no curriculum, no mastery model, and no prerequisite structure — precisely the deficiency on the Problem slide. We are the missing layer, already built.</a:t>
             </a:r>
           </a:p>
           <a:p>
@@ -1187,7 +1244,7 @@
           <a:p>
             <a:r>
               <a:rPr sz="1100"/>
-              <a:t>This makes Slide 8 load-bearing. If the exit story leans on frontier labs, the patent stops being a nice-to-have and becomes the thing standing between you and being built around. Expect follow-up questions on claim scope.</a:t>
+              <a:t>This makes the Defensibility slide load-bearing. If the exit story leans on frontier labs, the patent stops being a nice-to-have and becomes the thing standing between you and being built around. Expect follow-up questions on claim scope.</a:t>
             </a:r>
           </a:p>
         </p:txBody>
@@ -1270,7 +1327,7 @@
           <a:p>
             <a:r>
               <a:rPr sz="1100"/>
-              <a:t>Then immediately promise the follow-through: "Slide 9 shows the specific slice I'm going after first, and what it's worth." An angel who hears a $7.3T number and never hears a reachable number assumes you can't tell the difference. Don't leave that gap open across eight slides.</a:t>
+              <a:t>Then immediately promise the follow-through: "the Business Model slide shows the specific slice I'm going after first, and what it's worth." An angel who hears a $7.3T number and never hears a reachable number assumes you can't tell the difference. Don't leave that gap open across eight slides.</a:t>
             </a:r>
           </a:p>
           <a:p>
@@ -1365,7 +1422,7 @@
           <a:p>
             <a:r>
               <a:rPr sz="1100"/>
-              <a:t>Split off Slide 1 deliberately — these three numbers are the argument, and they were getting buried under two tables. Delivered on their own slide they land as a sequence: enormous, analog, unserved. Pause after each.</a:t>
+              <a:t>Split off the Market slide deliberately — these three numbers are the argument, and they were getting buried under two tables. Delivered on their own slide they land as a sequence: enormous, analog, unserved. Pause after each.</a:t>
             </a:r>
           </a:p>
           <a:p>
@@ -1377,7 +1434,7 @@
           <a:p>
             <a:r>
               <a:rPr sz="1100"/>
-              <a:t>If you are running short on time, this is the slide to linger on and Slide 1 is the one to move through quickly — the tables are reference material, this is the thesis.</a:t>
+              <a:t>If you are running short on time, this is the slide to linger on and the Market slide is the one to move through quickly — the tables are reference material, this is the thesis.</a:t>
             </a:r>
           </a:p>
         </p:txBody>
@@ -1454,7 +1511,7 @@
           <a:p>
             <a:r>
               <a:rPr sz="1100"/>
-              <a:t>Optional setup for Slide 4. If you want the founder slide to detonate, plant the fuse here: "the hand-authoring bottleneck isn't new — it's the reason this whole approach stayed impractical for forty years." Then let Slide 4 reveal that you were one of the people who hit that wall and wrote it down.</a:t>
+              <a:t>Optional setup for the Founder slide. If you want the founder slide to detonate, plant the fuse here: "the hand-authoring bottleneck isn't new — it's the reason this whole approach stayed impractical for forty years." Then let the Founder slide reveal that you were one of the people who hit that wall and wrote it down.</a:t>
             </a:r>
           </a:p>
         </p:txBody>
@@ -1528,6 +1585,12 @@
               <a:t>Mention that (1) and (2) are separately licensable — a publisher may want only the generation engine; a university may want only the delivery framework. That optionality is deliberate in the patent structure, and for an angel it means more than one way the asset pays off.</a:t>
             </a:r>
           </a:p>
+          <a:p>
+            <a:r>
+              <a:rPr sz="1100"/>
+              <a:t>Set up the demo here. "Any subject" is the strongest claim on this slide and the hardest to believe. Promise the evidence rather than arguing for it: "In two slides I'll show you it building a course on raising an angel round." Then stop — let them sit with the claim knowing proof is coming.</a:t>
+            </a:r>
+          </a:p>
         </p:txBody>
       </p:sp>
       <p:sp>
@@ -1674,7 +1737,13 @@
           <a:p>
             <a:r>
               <a:rPr sz="1100"/>
-              <a:t>⚠️ TODO: advisors, collaborators, or committed early hires — still the one real gap. A solo founder with a named technical advisor reads materially safer to an angel than a solo founder alone.</a:t>
+              <a:t>⚠️ TODO: advisors, collaborators, or committed early hires — still the one real gap. A solo founder with a named advisor reads materially safer to an angel than a solo founder alone.</a:t>
+            </a:r>
+          </a:p>
+          <a:p>
+            <a:r>
+              <a:rPr sz="1100"/>
+              <a:t>The efficient way to close it: a recognised homeschool community figure — a co-op director, a curriculum reviewer, a well-followed practitioner — taken on as an advisor with a small vesting equity grant. That fills the credibility gap on this slide and creates a committed distribution partner (Appendix A11) with the same person. One conversation solves two of the deck's open problems.</a:t>
             </a:r>
           </a:p>
         </p:txBody>
@@ -1745,19 +1814,67 @@
           <a:p>
             <a:r>
               <a:rPr sz="1100"/>
-              <a:t>For angels this is the highest-conviction slide in the deck, because it converts "interesting idea" into "this exists." Generating a domain live on stage is worth more than any slide you could put here.</a:t>
+              <a:t>Say it is a recording, in the first sentence. "This is recorded — I'm not going to make you watch eighteen minutes." If they suspect staging you lose more than the demo gains, and the honesty costs nothing. A live run is not worth the risk: eighteen minutes of runtime, a network dependency, and a known truncation bug are three ways to fail in front of the people you are asking for money.</a:t>
             </a:r>
           </a:p>
           <a:p>
             <a:r>
               <a:rPr sz="1100"/>
-              <a:t>⚠️ TODO: time a full generation run. If it's longer than ~90 seconds, pre-record it and play the recording — a live run that stalls in front of angels does more damage than a video.</a:t>
+              <a:t>Why this subject, said out loud: "I picked the one subject everyone in this room already knows cold, so you can judge the output instead of taking my word for it." That is the whole point — on any other topic they would have to trust you.</a:t>
             </a:r>
           </a:p>
           <a:p>
             <a:r>
               <a:rPr sz="1100"/>
-              <a:t>⚠️ TODO: screenshots needed regardless, as fallback and for the send-after version of the deck.</a:t>
+              <a:t>Start the recording at the input screen, not at the pipeline. The opening seconds carry the argument: what goes in is a paragraph a person could write in two minutes. Everything after that is machine. If you start mid-pipeline, the audience never learns how little was required, and the effort asymmetry is the point of the whole slide.</a:t>
+            </a:r>
+          </a:p>
+          <a:p>
+            <a:r>
+              <a:rPr sz="1100"/>
+              <a:t>Name the two human checkpoints — they are features, not overhead. The advisor interrogating the description shows the system pushes back on a vague ask rather than generating regardless. The syllabus review shows the author approves the concept list before any content is produced. For an angel whose instinctive worry is "AI slop," the visible answer is that a person signs off on the outline and the machine does the labour. Do not let these read as loading screens; say what each one is as it appears.</a:t>
+            </a:r>
+          </a:p>
+          <a:p>
+            <a:r>
+              <a:rPr sz="1100"/>
+              <a:t>The callback to the Founder slide, if you want it. CKS also worked by interrogating a human — but it interrogated them for the knowledge, one concept at a time, which is what made it impractical. Qlaudia's advisor interrogates you for your intent, which takes two minutes, and the model supplies the knowledge. The dialogue survived; what it asks for is what changed. This is a good line and easy to overplay — use it once, in one sentence, and move on.</a:t>
+            </a:r>
+          </a:p>
+          <a:p>
+            <a:r>
+              <a:rPr sz="1100"/>
+              <a:t>The offer that replaces the live demo — make it before you leave. A recording can be cherry-picked and sophisticated investors know it, so recover the proof afterward: "Name any subject. I'll send you the course tomorrow." Zero risk, more impressive than a live run, and it turns the demo into a reason to talk again — which is exactly what you want from an angel who has not committed.</a:t>
+            </a:r>
+          </a:p>
+          <a:p>
+            <a:r>
+              <a:rPr sz="1100"/>
+              <a:t>⚠️ TODO — read the course before you record it. Pre-generating exists precisely so you can inspect before they do; skipping that step throws away the main advantage of not going live. You do not need to review everything: read the 5–8 concepts that appear on camera, plus anything touching deal terms, dilution, or valuation caps. Roughly twenty minutes. Fix or cut what is wrong — you control the edit.</a:t>
+            </a:r>
+          </a:p>
+          <a:p>
+            <a:r>
+              <a:rPr sz="1100"/>
+              <a:t>Two reasons this matters more here than it would on any other topic: an angel needs one glance at one paragraph to catch an error about angel investing, and a visible mistake does not read as a typo — it contradicts the Pipeline slide's claim of a verified pipeline. A clean demo gains you a little; a caught error costs you a lot.</a:t>
+            </a:r>
+          </a:p>
+          <a:p>
+            <a:r>
+              <a:rPr sz="1100"/>
+              <a:t>Remember they will look again later. The plan is to hand them the course link. In the room nobody inspects. Alone that evening, with time, they will.</a:t>
+            </a:r>
+          </a:p>
+          <a:p>
+            <a:r>
+              <a:rPr sz="1100"/>
+              <a:t>⚠️ TODO: record end to end — from typing the description, through the advisor exchange and the syllabus review, to browsing the finished course. Time-lapse the long stretches; keep the input and the review at real speed, since those are the parts that carry meaning. Keep the raw capture too — the unedited pipeline log is good diligence material.</a:t>
+            </a:r>
+          </a:p>
+          <a:p>
+            <a:r>
+              <a:rPr sz="1100"/>
+              <a:t>⚠️ TODO: still screenshots as a fallback for a room with no video, and for the send-after version of the deck.</a:t>
             </a:r>
           </a:p>
         </p:txBody>
@@ -1828,7 +1945,7 @@
           <a:p>
             <a:r>
               <a:rPr sz="1100"/>
-              <a:t>The job of this slide is to answer "isn't this just a wrapper?" before anyone asks it. By this point they've seen the claim (Slide 3) and the product (Slide 5). The live question is not whether the content is trustworthy — it's whether there is anything here a competent engineer couldn't rebuild in a weekend with a good prompt. Answer that by showing the machinery. Trust is the conclusion they draw on their own; do not ask for it, and do not frame this slide as a defense of quality.</a:t>
+              <a:t>The job of this slide is to answer "isn't this just a wrapper?" before anyone asks it. By this point they've seen the claim (the Solution slide) and the product (the Demo slide). The live question is not whether the content is trustworthy — it's whether there is anything here a competent engineer couldn't rebuild in a weekend with a good prompt. Answer that by showing the machinery. Trust is the conclusion they draw on their own; do not ask for it, and do not frame this slide as a defense of quality.</a:t>
             </a:r>
           </a:p>
           <a:p>
@@ -1846,7 +1963,13 @@
           <a:p>
             <a:r>
               <a:rPr sz="1100"/>
-              <a:t>Where content quality does belong: as a commercial advantage, not a disclaimer. Homeschool parents (the Slide 9 beachhead) are genuinely skeptical of AI-generated material, and verified figures are how you win that objection in the market. Deploy it there — in a sales conversation, or when an angel raises it — rather than pre-empting a doubt half the room didn't have.</a:t>
+              <a:t>Point back at the demo — they just watched this list happen. Every bullet here was visible on the previous slide: the pipeline stages, the figure repair loop retrying, the QA model running separately. This slide is the narration for footage they have already seen, which is far stronger than describing machinery in the abstract. If you cut anything for time, cut the words, not the video.</a:t>
+            </a:r>
+          </a:p>
+          <a:p>
+            <a:r>
+              <a:rPr sz="1100"/>
+              <a:t>Where content quality does belong: as a commercial advantage, not a disclaimer. Homeschool parents (the beachhead on the Business Model slide) are genuinely skeptical of AI-generated material, and verified figures are how you win that objection in the market. Deploy it there — in a sales conversation, or when an angel raises it — rather than pre-empting a doubt half the room didn't have.</a:t>
             </a:r>
           </a:p>
           <a:p>
@@ -1959,7 +2082,13 @@
           <a:p>
             <a:r>
               <a:rPr sz="1100"/>
-              <a:t>Call straight back to Slide 4. This slide is far more persuasive as "I named the blocking constraint in 1985 and it was lifted in 2023" than as three generic market curves. The 1985 system had rigorous structure and no affordable acquisition. Today's chatbots have fluent acquisition and no structure. Qlaudia is the first moment both halves exist at once — and you can prove you've been holding one of them for forty years.</a:t>
+              <a:t>Call straight back to the Founder slide. This slide is far more persuasive as "I named the blocking constraint in 1985 and it was lifted in 2023" than as three generic market curves. The 1985 system had rigorous structure and no affordable acquisition. Today's chatbots have fluent acquisition and no structure. Qlaudia is the first moment both halves exist at once — and you can prove you've been holding one of them for forty years.</a:t>
+            </a:r>
+          </a:p>
+          <a:p>
+            <a:r>
+              <a:rPr sz="1100"/>
+              <a:t>Attach the number to the course they just watched. Not an abstract unit cost — that course, the one about raising an angel round: "That cost about five dollars to produce." A figure tied to an artifact in front of them is far harder to wave off than a figure on a slide.</a:t>
             </a:r>
           </a:p>
           <a:p>
@@ -5164,7 +5293,7 @@
                 </a:solidFill>
                 <a:latin typeface="Segoe UI"/>
               </a:rPr>
-              <a:t>SLIDE 8   </a:t>
+              <a:t>SLIDE 10   </a:t>
             </a:r>
             <a:r>
               <a:rPr sz="2500" b="1">
@@ -5659,7 +5788,7 @@
                 </a:solidFill>
                 <a:latin typeface="Segoe UI"/>
               </a:rPr>
-              <a:t>SLIDE 9   </a:t>
+              <a:t>SLIDE 11   </a:t>
             </a:r>
             <a:r>
               <a:rPr sz="2500" b="1">
@@ -5760,7 +5889,7 @@
         <p:spPr>
           <a:xfrm>
             <a:off x="566928" y="1711452"/>
-            <a:ext cx="11057839" cy="342442"/>
+            <a:ext cx="5336895" cy="342442"/>
           </a:xfrm>
           <a:prstGeom prst="rect">
             <a:avLst/>
@@ -5794,7 +5923,7 @@
         <p:spPr>
           <a:xfrm>
             <a:off x="566928" y="2081326"/>
-            <a:ext cx="50292" cy="243738"/>
+            <a:ext cx="50292" cy="432612"/>
           </a:xfrm>
           <a:prstGeom prst="rect">
             <a:avLst/>
@@ -5838,7 +5967,7 @@
         <p:spPr>
           <a:xfrm>
             <a:off x="877824" y="2053894"/>
-            <a:ext cx="10746943" cy="335178"/>
+            <a:ext cx="5025999" cy="524052"/>
           </a:xfrm>
           <a:prstGeom prst="rect">
             <a:avLst/>
@@ -5880,8 +6009,8 @@
         </p:nvSpPr>
         <p:spPr>
           <a:xfrm>
-            <a:off x="566928" y="2389073"/>
-            <a:ext cx="11057839" cy="332841"/>
+            <a:off x="566928" y="2577947"/>
+            <a:ext cx="5336895" cy="332841"/>
           </a:xfrm>
           <a:prstGeom prst="rect">
             <a:avLst/>
@@ -5914,7 +6043,7 @@
         </p:nvSpPr>
         <p:spPr>
           <a:xfrm>
-            <a:off x="566928" y="2749346"/>
+            <a:off x="566928" y="2938221"/>
             <a:ext cx="50292" cy="243738"/>
           </a:xfrm>
           <a:prstGeom prst="rect">
@@ -5958,8 +6087,8 @@
         </p:nvSpPr>
         <p:spPr>
           <a:xfrm>
-            <a:off x="877824" y="2721914"/>
-            <a:ext cx="10746943" cy="335178"/>
+            <a:off x="877824" y="2910789"/>
+            <a:ext cx="5025999" cy="335178"/>
           </a:xfrm>
           <a:prstGeom prst="rect">
             <a:avLst/>
@@ -5992,8 +6121,8 @@
         </p:nvSpPr>
         <p:spPr>
           <a:xfrm>
-            <a:off x="566928" y="3057093"/>
-            <a:ext cx="11057839" cy="332841"/>
+            <a:off x="566928" y="3245967"/>
+            <a:ext cx="5336895" cy="332841"/>
           </a:xfrm>
           <a:prstGeom prst="rect">
             <a:avLst/>
@@ -6026,7 +6155,7 @@
         </p:nvSpPr>
         <p:spPr>
           <a:xfrm>
-            <a:off x="585216" y="3459337"/>
+            <a:off x="585216" y="3648212"/>
             <a:ext cx="65836" cy="65836"/>
           </a:xfrm>
           <a:prstGeom prst="ellipse">
@@ -6070,8 +6199,8 @@
         </p:nvSpPr>
         <p:spPr>
           <a:xfrm>
-            <a:off x="804672" y="3389934"/>
-            <a:ext cx="10820095" cy="296722"/>
+            <a:off x="804672" y="3578809"/>
+            <a:ext cx="5099151" cy="492861"/>
           </a:xfrm>
           <a:prstGeom prst="rect">
             <a:avLst/>
@@ -6113,7 +6242,7 @@
         </p:nvSpPr>
         <p:spPr>
           <a:xfrm>
-            <a:off x="585216" y="3756060"/>
+            <a:off x="585216" y="4141073"/>
             <a:ext cx="65836" cy="65836"/>
           </a:xfrm>
           <a:prstGeom prst="ellipse">
@@ -6157,8 +6286,8 @@
         </p:nvSpPr>
         <p:spPr>
           <a:xfrm>
-            <a:off x="804672" y="3686657"/>
-            <a:ext cx="10820095" cy="492861"/>
+            <a:off x="804672" y="4071670"/>
+            <a:ext cx="5099151" cy="689000"/>
           </a:xfrm>
           <a:prstGeom prst="rect">
             <a:avLst/>
@@ -6200,7 +6329,7 @@
         </p:nvSpPr>
         <p:spPr>
           <a:xfrm>
-            <a:off x="585216" y="4248922"/>
+            <a:off x="585216" y="4830074"/>
             <a:ext cx="65836" cy="65836"/>
           </a:xfrm>
           <a:prstGeom prst="ellipse">
@@ -6244,8 +6373,8 @@
         </p:nvSpPr>
         <p:spPr>
           <a:xfrm>
-            <a:off x="804672" y="4179519"/>
-            <a:ext cx="10820095" cy="492861"/>
+            <a:off x="804672" y="4760671"/>
+            <a:ext cx="5099151" cy="689000"/>
           </a:xfrm>
           <a:prstGeom prst="rect">
             <a:avLst/>
@@ -6305,7 +6434,7 @@
         </p:nvSpPr>
         <p:spPr>
           <a:xfrm>
-            <a:off x="585216" y="4741783"/>
+            <a:off x="585216" y="5519074"/>
             <a:ext cx="65836" cy="65836"/>
           </a:xfrm>
           <a:prstGeom prst="ellipse">
@@ -6349,8 +6478,8 @@
         </p:nvSpPr>
         <p:spPr>
           <a:xfrm>
-            <a:off x="804672" y="4672380"/>
-            <a:ext cx="10820095" cy="492861"/>
+            <a:off x="804672" y="5449671"/>
+            <a:ext cx="5099151" cy="689000"/>
           </a:xfrm>
           <a:prstGeom prst="rect">
             <a:avLst/>
@@ -6392,8 +6521,8 @@
         </p:nvSpPr>
         <p:spPr>
           <a:xfrm>
-            <a:off x="566928" y="5165242"/>
-            <a:ext cx="11057839" cy="332841"/>
+            <a:off x="6287871" y="1711452"/>
+            <a:ext cx="5336895" cy="332841"/>
           </a:xfrm>
           <a:prstGeom prst="rect">
             <a:avLst/>
@@ -6413,21 +6542,65 @@
                 </a:solidFill>
                 <a:latin typeface="Segoe UI"/>
               </a:rPr>
-              <a:t>EXPANSION PATH</a:t>
-            </a:r>
-          </a:p>
-        </p:txBody>
-      </p:sp>
-      <p:sp>
-        <p:nvSpPr>
-          <p:cNvPr id="21" name="TextBox 20"/>
+              <a:t>HOW WE REACH THEM — CREATORS, NOT ADS</a:t>
+            </a:r>
+          </a:p>
+        </p:txBody>
+      </p:sp>
+      <p:sp>
+        <p:nvSpPr>
+          <p:cNvPr id="21" name="Oval 20"/>
+          <p:cNvSpPr/>
+          <p:nvPr/>
+        </p:nvSpPr>
+        <p:spPr>
+          <a:xfrm>
+            <a:off x="6306159" y="2113696"/>
+            <a:ext cx="65836" cy="65836"/>
+          </a:xfrm>
+          <a:prstGeom prst="ellipse">
+            <a:avLst/>
+          </a:prstGeom>
+          <a:solidFill>
+            <a:srgbClr val="4A3AFF"/>
+          </a:solidFill>
+          <a:ln>
+            <a:noFill/>
+          </a:ln>
+          <a:effectLst/>
+        </p:spPr>
+        <p:style>
+          <a:lnRef idx="1">
+            <a:schemeClr val="accent1"/>
+          </a:lnRef>
+          <a:fillRef idx="3">
+            <a:schemeClr val="accent1"/>
+          </a:fillRef>
+          <a:effectRef idx="2">
+            <a:schemeClr val="accent1"/>
+          </a:effectRef>
+          <a:fontRef idx="minor">
+            <a:schemeClr val="lt1"/>
+          </a:fontRef>
+        </p:style>
+        <p:txBody>
+          <a:bodyPr rtlCol="0" anchor="ctr"/>
+          <a:lstStyle/>
+          <a:p>
+            <a:pPr algn="ctr"/>
+          </a:p>
+        </p:txBody>
+      </p:sp>
+      <p:sp>
+        <p:nvSpPr>
+          <p:cNvPr id="22" name="TextBox 21"/>
           <p:cNvSpPr txBox="1"/>
           <p:nvPr/>
         </p:nvSpPr>
         <p:spPr>
           <a:xfrm>
-            <a:off x="566928" y="5498083"/>
-            <a:ext cx="11057839" cy="538581"/>
+            <a:off x="6525615" y="2044293"/>
+            <a:ext cx="5099151" cy="689000"/>
           </a:xfrm>
           <a:prstGeom prst="rect">
             <a:avLst/>
@@ -6441,27 +6614,98 @@
           <a:lstStyle/>
           <a:p>
             <a:r>
+              <a:rPr sz="1188" b="1" i="0">
+                <a:solidFill>
+                  <a:srgbClr val="15192B"/>
+                </a:solidFill>
+                <a:latin typeface="Segoe UI"/>
+              </a:rPr>
+              <a:t>Homeschool creators publish their own schools.</a:t>
+            </a:r>
+            <a:r>
               <a:rPr sz="1188" b="0" i="0">
                 <a:solidFill>
                   <a:srgbClr val="5A6072"/>
                 </a:solidFill>
                 <a:latin typeface="Segoe UI"/>
               </a:rPr>
-              <a:t>Co-ops and microschools as buying groups → broader subject coverage → domain experts publishing their own schools → institutional.</a:t>
-            </a:r>
-          </a:p>
-        </p:txBody>
-      </p:sp>
-      <p:sp>
-        <p:nvSpPr>
-          <p:cNvPr id="22" name="TextBox 21"/>
+              <a:t> A curriculum reviewer with 40,000 subscribers gets </a:t>
+            </a:r>
+            <a:r>
+              <a:rPr sz="1188" b="0" i="1">
+                <a:solidFill>
+                  <a:srgbClr val="5A6072"/>
+                </a:solidFill>
+                <a:latin typeface="Segoe UI"/>
+              </a:rPr>
+              <a:t>"Mrs. Anderson's Chemistry"</a:t>
+            </a:r>
+            <a:r>
+              <a:rPr sz="1188" b="0" i="0">
+                <a:solidFill>
+                  <a:srgbClr val="5A6072"/>
+                </a:solidFill>
+                <a:latin typeface="Segoe UI"/>
+              </a:rPr>
+              <a:t> under her own name, for her audience</a:t>
+            </a:r>
+          </a:p>
+        </p:txBody>
+      </p:sp>
+      <p:sp>
+        <p:nvSpPr>
+          <p:cNvPr id="23" name="Oval 22"/>
+          <p:cNvSpPr/>
+          <p:nvPr/>
+        </p:nvSpPr>
+        <p:spPr>
+          <a:xfrm>
+            <a:off x="6306159" y="2802696"/>
+            <a:ext cx="65836" cy="65836"/>
+          </a:xfrm>
+          <a:prstGeom prst="ellipse">
+            <a:avLst/>
+          </a:prstGeom>
+          <a:solidFill>
+            <a:srgbClr val="4A3AFF"/>
+          </a:solidFill>
+          <a:ln>
+            <a:noFill/>
+          </a:ln>
+          <a:effectLst/>
+        </p:spPr>
+        <p:style>
+          <a:lnRef idx="1">
+            <a:schemeClr val="accent1"/>
+          </a:lnRef>
+          <a:fillRef idx="3">
+            <a:schemeClr val="accent1"/>
+          </a:fillRef>
+          <a:effectRef idx="2">
+            <a:schemeClr val="accent1"/>
+          </a:effectRef>
+          <a:fontRef idx="minor">
+            <a:schemeClr val="lt1"/>
+          </a:fontRef>
+        </p:style>
+        <p:txBody>
+          <a:bodyPr rtlCol="0" anchor="ctr"/>
+          <a:lstStyle/>
+          <a:p>
+            <a:pPr algn="ctr"/>
+          </a:p>
+        </p:txBody>
+      </p:sp>
+      <p:sp>
+        <p:nvSpPr>
+          <p:cNvPr id="24" name="TextBox 23"/>
           <p:cNvSpPr txBox="1"/>
           <p:nvPr/>
         </p:nvSpPr>
         <p:spPr>
           <a:xfrm>
-            <a:off x="566928" y="6036665"/>
-            <a:ext cx="11057839" cy="342442"/>
+            <a:off x="6525615" y="2733294"/>
+            <a:ext cx="5099151" cy="492861"/>
           </a:xfrm>
           <a:prstGeom prst="rect">
             <a:avLst/>
@@ -6481,6 +6725,145 @@
                 </a:solidFill>
                 <a:latin typeface="Segoe UI"/>
               </a:rPr>
+              <a:t>Paid on revenue share</a:t>
+            </a:r>
+            <a:r>
+              <a:rPr sz="1188" b="0" i="0">
+                <a:solidFill>
+                  <a:srgbClr val="5A6072"/>
+                </a:solidFill>
+                <a:latin typeface="Segoe UI"/>
+              </a:rPr>
+              <a:t>, not sponsorship — the channel costs nothing until it converts</a:t>
+            </a:r>
+          </a:p>
+        </p:txBody>
+      </p:sp>
+      <p:sp>
+        <p:nvSpPr>
+          <p:cNvPr id="25" name="Oval 24"/>
+          <p:cNvSpPr/>
+          <p:nvPr/>
+        </p:nvSpPr>
+        <p:spPr>
+          <a:xfrm>
+            <a:off x="6306159" y="3295558"/>
+            <a:ext cx="65836" cy="65836"/>
+          </a:xfrm>
+          <a:prstGeom prst="ellipse">
+            <a:avLst/>
+          </a:prstGeom>
+          <a:solidFill>
+            <a:srgbClr val="4A3AFF"/>
+          </a:solidFill>
+          <a:ln>
+            <a:noFill/>
+          </a:ln>
+          <a:effectLst/>
+        </p:spPr>
+        <p:style>
+          <a:lnRef idx="1">
+            <a:schemeClr val="accent1"/>
+          </a:lnRef>
+          <a:fillRef idx="3">
+            <a:schemeClr val="accent1"/>
+          </a:fillRef>
+          <a:effectRef idx="2">
+            <a:schemeClr val="accent1"/>
+          </a:effectRef>
+          <a:fontRef idx="minor">
+            <a:schemeClr val="lt1"/>
+          </a:fontRef>
+        </p:style>
+        <p:txBody>
+          <a:bodyPr rtlCol="0" anchor="ctr"/>
+          <a:lstStyle/>
+          <a:p>
+            <a:pPr algn="ctr"/>
+          </a:p>
+        </p:txBody>
+      </p:sp>
+      <p:sp>
+        <p:nvSpPr>
+          <p:cNvPr id="26" name="TextBox 25"/>
+          <p:cNvSpPr txBox="1"/>
+          <p:nvPr/>
+        </p:nvSpPr>
+        <p:spPr>
+          <a:xfrm>
+            <a:off x="6525615" y="3226155"/>
+            <a:ext cx="5099151" cy="492861"/>
+          </a:xfrm>
+          <a:prstGeom prst="rect">
+            <a:avLst/>
+          </a:prstGeom>
+          <a:noFill/>
+        </p:spPr>
+        <p:txBody>
+          <a:bodyPr wrap="square" lIns="0" rIns="0" tIns="0" bIns="0">
+            <a:spAutoFit/>
+          </a:bodyPr>
+          <a:lstStyle/>
+          <a:p>
+            <a:r>
+              <a:rPr sz="1188" b="0" i="0">
+                <a:solidFill>
+                  <a:srgbClr val="5A6072"/>
+                </a:solidFill>
+                <a:latin typeface="Segoe UI"/>
+              </a:rPr>
+              <a:t>Then </a:t>
+            </a:r>
+            <a:r>
+              <a:rPr sz="1188" b="1" i="0">
+                <a:solidFill>
+                  <a:srgbClr val="15192B"/>
+                </a:solidFill>
+                <a:latin typeface="Segoe UI"/>
+              </a:rPr>
+              <a:t>co-ops and associations</a:t>
+            </a:r>
+            <a:r>
+              <a:rPr sz="1188" b="0" i="0">
+                <a:solidFill>
+                  <a:srgbClr val="5A6072"/>
+                </a:solidFill>
+                <a:latin typeface="Segoe UI"/>
+              </a:rPr>
+              <a:t> as buying groups, and institutional last</a:t>
+            </a:r>
+          </a:p>
+        </p:txBody>
+      </p:sp>
+      <p:sp>
+        <p:nvSpPr>
+          <p:cNvPr id="27" name="TextBox 26"/>
+          <p:cNvSpPr txBox="1"/>
+          <p:nvPr/>
+        </p:nvSpPr>
+        <p:spPr>
+          <a:xfrm>
+            <a:off x="6287871" y="3719017"/>
+            <a:ext cx="5336895" cy="538581"/>
+          </a:xfrm>
+          <a:prstGeom prst="rect">
+            <a:avLst/>
+          </a:prstGeom>
+          <a:noFill/>
+        </p:spPr>
+        <p:txBody>
+          <a:bodyPr wrap="square" lIns="0" rIns="0" tIns="0" bIns="0">
+            <a:spAutoFit/>
+          </a:bodyPr>
+          <a:lstStyle/>
+          <a:p>
+            <a:r>
+              <a:rPr sz="1188" b="1" i="0">
+                <a:solidFill>
+                  <a:srgbClr val="15192B"/>
+                </a:solidFill>
+                <a:latin typeface="Segoe UI"/>
+              </a:rPr>
               <a:t>Pricing motion:</a:t>
             </a:r>
             <a:r>
@@ -6499,7 +6882,7 @@
                 </a:solidFill>
                 <a:latin typeface="Segoe UI"/>
               </a:rPr>
-              <a:t>(Full segment inventory and the alternatives considered: Appendix A9.)</a:t>
+              <a:t>(Full segment inventory: Appendix A9. Channel plan: Appendix A11.)</a:t>
             </a:r>
           </a:p>
         </p:txBody>
@@ -6559,7 +6942,7 @@
                 </a:solidFill>
                 <a:latin typeface="Segoe UI"/>
               </a:rPr>
-              <a:t>SLIDE 10   </a:t>
+              <a:t>SLIDE 12   </a:t>
             </a:r>
             <a:r>
               <a:rPr sz="2500" b="1">
@@ -6646,22 +7029,74 @@
                 </a:solidFill>
                 <a:latin typeface="Segoe UI"/>
               </a:rPr>
-              <a:t>Built, not planned — 64 courses already generated, solo.</a:t>
+              <a:t>Live in production — 63 courses, and the first users are finishing them.</a:t>
+            </a:r>
+          </a:p>
+        </p:txBody>
+      </p:sp>
+      <p:sp>
+        <p:nvSpPr>
+          <p:cNvPr id="5" name="TextBox 4"/>
+          <p:cNvSpPr txBox="1"/>
+          <p:nvPr/>
+        </p:nvSpPr>
+        <p:spPr>
+          <a:xfrm>
+            <a:off x="566928" y="1711452"/>
+            <a:ext cx="11057839" cy="369189"/>
+          </a:xfrm>
+          <a:prstGeom prst="rect">
+            <a:avLst/>
+          </a:prstGeom>
+          <a:noFill/>
+        </p:spPr>
+        <p:txBody>
+          <a:bodyPr wrap="square" lIns="0" rIns="0" tIns="0" bIns="0">
+            <a:spAutoFit/>
+          </a:bodyPr>
+          <a:lstStyle/>
+          <a:p>
+            <a:r>
+              <a:rPr sz="1350" b="1" i="0">
+                <a:solidFill>
+                  <a:srgbClr val="15192B"/>
+                </a:solidFill>
+                <a:latin typeface="Segoe UI"/>
+              </a:rPr>
+              <a:t>Built</a:t>
+            </a:r>
+            <a:r>
+              <a:rPr sz="1350" b="0" i="0">
+                <a:solidFill>
+                  <a:srgbClr val="5A6072"/>
+                </a:solidFill>
+                <a:latin typeface="Segoe UI"/>
+              </a:rPr>
+              <a:t> </a:t>
+            </a:r>
+            <a:r>
+              <a:rPr sz="1350" b="0" i="1">
+                <a:solidFill>
+                  <a:srgbClr val="5A6072"/>
+                </a:solidFill>
+                <a:latin typeface="Segoe UI"/>
+              </a:rPr>
+              <a:t>(production graph, not projections)</a:t>
             </a:r>
           </a:p>
         </p:txBody>
       </p:sp>
       <p:graphicFrame>
         <p:nvGraphicFramePr>
-          <p:cNvPr id="5" name="Table 4"/>
+          <p:cNvPr id="6" name="Table 5"/>
           <p:cNvGraphicFramePr>
             <a:graphicFrameLocks noGrp="1"/>
           </p:cNvGraphicFramePr>
           <p:nvPr/>
         </p:nvGraphicFramePr>
         <p:xfrm>
-          <a:off x="566928" y="1711452"/>
-          <a:ext cx="11057839" cy="2327148"/>
+          <a:off x="566928" y="2080641"/>
+          <a:ext cx="11057839" cy="2039112"/>
         </p:xfrm>
         <a:graphic>
           <a:graphicData uri="http://schemas.openxmlformats.org/drawingml/2006/table">
@@ -6732,7 +7167,7 @@
                           </a:solidFill>
                           <a:latin typeface="Segoe UI"/>
                         </a:rPr>
-                        <a:t>Courses generated</a:t>
+                        <a:t>Courses live</a:t>
                       </a:r>
                     </a:p>
                   </a:txBody>
@@ -6754,7 +7189,16 @@
                           </a:solidFill>
                           <a:latin typeface="Segoe UI"/>
                         </a:rPr>
-                        <a:t>64</a:t>
+                        <a:t>63</a:t>
+                      </a:r>
+                      <a:r>
+                        <a:rPr sz="1100" b="0" i="0">
+                          <a:solidFill>
+                            <a:srgbClr val="5A6072"/>
+                          </a:solidFill>
+                          <a:latin typeface="Segoe UI"/>
+                        </a:rPr>
+                        <a:t> across 7 schools</a:t>
                       </a:r>
                     </a:p>
                   </a:txBody>
@@ -6800,7 +7244,7 @@
                           </a:solidFill>
                           <a:latin typeface="Segoe UI"/>
                         </a:rPr>
-                        <a:t>2,202</a:t>
+                        <a:t>2,106</a:t>
                       </a:r>
                     </a:p>
                   </a:txBody>
@@ -6846,7 +7290,7 @@
                           </a:solidFill>
                           <a:latin typeface="Segoe UI"/>
                         </a:rPr>
-                        <a:t>6,844</a:t>
+                        <a:t>6,755</a:t>
                       </a:r>
                     </a:p>
                   </a:txBody>
@@ -6892,7 +7336,7 @@
                           </a:solidFill>
                           <a:latin typeface="Segoe UI"/>
                         </a:rPr>
-                        <a:t>9,420</a:t>
+                        <a:t>8,837</a:t>
                       </a:r>
                     </a:p>
                   </a:txBody>
@@ -6916,7 +7360,7 @@
                           </a:solidFill>
                           <a:latin typeface="Segoe UI"/>
                         </a:rPr>
-                        <a:t>Typed concept relationships</a:t>
+                        <a:t>Typed relationships</a:t>
                       </a:r>
                     </a:p>
                   </a:txBody>
@@ -6938,7 +7382,7 @@
                           </a:solidFill>
                           <a:latin typeface="Segoe UI"/>
                         </a:rPr>
-                        <a:t>14,580</a:t>
+                        <a:t>13,523</a:t>
                       </a:r>
                     </a:p>
                   </a:txBody>
@@ -6984,53 +7428,7 @@
                           </a:solidFill>
                           <a:latin typeface="Segoe UI"/>
                         </a:rPr>
-                        <a:t>~4.1M tokens</a:t>
-                      </a:r>
-                    </a:p>
-                  </a:txBody>
-                  <a:tcPr marL="82296" marR="64008" marT="32004" marB="32004" anchor="ctr">
-                    <a:solidFill>
-                      <a:srgbClr val="FFFFFF"/>
-                    </a:solidFill>
-                  </a:tcPr>
-                </a:tc>
-              </a:tr>
-              <a:tr h="288036">
-                <a:tc>
-                  <a:txBody>
-                    <a:bodyPr wrap="square"/>
-                    <a:lstStyle/>
-                    <a:p>
-                      <a:r>
-                        <a:rPr sz="1100" b="0" i="0">
-                          <a:solidFill>
-                            <a:srgbClr val="5A6072"/>
-                          </a:solidFill>
-                          <a:latin typeface="Segoe UI"/>
-                        </a:rPr>
-                        <a:t>Branded schools</a:t>
-                      </a:r>
-                    </a:p>
-                  </a:txBody>
-                  <a:tcPr marL="82296" marR="64008" marT="32004" marB="32004" anchor="ctr">
-                    <a:solidFill>
-                      <a:srgbClr val="FFFFFF"/>
-                    </a:solidFill>
-                  </a:tcPr>
-                </a:tc>
-                <a:tc>
-                  <a:txBody>
-                    <a:bodyPr wrap="square"/>
-                    <a:lstStyle/>
-                    <a:p>
-                      <a:r>
-                        <a:rPr sz="1100" b="1" i="0">
-                          <a:solidFill>
-                            <a:srgbClr val="15192B"/>
-                          </a:solidFill>
-                          <a:latin typeface="Segoe UI"/>
-                        </a:rPr>
-                        <a:t>6</a:t>
+                        <a:t>~3.9M tokens</a:t>
                       </a:r>
                     </a:p>
                   </a:txBody>
@@ -7047,13 +7445,65 @@
       </p:graphicFrame>
       <p:sp>
         <p:nvSpPr>
-          <p:cNvPr id="6" name="Oval 5"/>
+          <p:cNvPr id="7" name="TextBox 6"/>
+          <p:cNvSpPr txBox="1"/>
+          <p:nvPr/>
+        </p:nvSpPr>
+        <p:spPr>
+          <a:xfrm>
+            <a:off x="566928" y="4302633"/>
+            <a:ext cx="11057839" cy="369189"/>
+          </a:xfrm>
+          <a:prstGeom prst="rect">
+            <a:avLst/>
+          </a:prstGeom>
+          <a:noFill/>
+        </p:spPr>
+        <p:txBody>
+          <a:bodyPr wrap="square" lIns="0" rIns="0" tIns="0" bIns="0">
+            <a:spAutoFit/>
+          </a:bodyPr>
+          <a:lstStyle/>
+          <a:p>
+            <a:r>
+              <a:rPr sz="1350" b="1" i="0">
+                <a:solidFill>
+                  <a:srgbClr val="15192B"/>
+                </a:solidFill>
+                <a:latin typeface="Segoe UI"/>
+              </a:rPr>
+              <a:t>Used</a:t>
+            </a:r>
+            <a:r>
+              <a:rPr sz="1350" b="0" i="0">
+                <a:solidFill>
+                  <a:srgbClr val="5A6072"/>
+                </a:solidFill>
+                <a:latin typeface="Segoe UI"/>
+              </a:rPr>
+              <a:t> </a:t>
+            </a:r>
+            <a:r>
+              <a:rPr sz="1350" b="0" i="1">
+                <a:solidFill>
+                  <a:srgbClr val="5A6072"/>
+                </a:solidFill>
+                <a:latin typeface="Segoe UI"/>
+              </a:rPr>
+              <a:t>(early, and honest about it)</a:t>
+            </a:r>
+          </a:p>
+        </p:txBody>
+      </p:sp>
+      <p:sp>
+        <p:nvSpPr>
+          <p:cNvPr id="8" name="Oval 7"/>
           <p:cNvSpPr/>
           <p:nvPr/>
         </p:nvSpPr>
         <p:spPr>
           <a:xfrm>
-            <a:off x="585216" y="4300347"/>
+            <a:off x="585216" y="4750689"/>
             <a:ext cx="65836" cy="65836"/>
           </a:xfrm>
           <a:prstGeom prst="ellipse">
@@ -7091,13 +7541,13 @@
       </p:sp>
       <p:sp>
         <p:nvSpPr>
-          <p:cNvPr id="7" name="TextBox 6"/>
+          <p:cNvPr id="9" name="TextBox 8"/>
           <p:cNvSpPr txBox="1"/>
           <p:nvPr/>
         </p:nvSpPr>
         <p:spPr>
           <a:xfrm>
-            <a:off x="804672" y="4221480"/>
+            <a:off x="804672" y="4671822"/>
             <a:ext cx="10820095" cy="323469"/>
           </a:xfrm>
           <a:prstGeom prst="rect">
@@ -7118,7 +7568,7 @@
                 </a:solidFill>
                 <a:latin typeface="Segoe UI"/>
               </a:rPr>
-              <a:t>~$5 and ~15 minutes</a:t>
+              <a:t>One user completed five courses end to end</a:t>
             </a:r>
             <a:r>
               <a:rPr sz="1350" b="0" i="0">
@@ -7127,20 +7577,20 @@
                 </a:solidFill>
                 <a:latin typeface="Segoe UI"/>
               </a:rPr>
-              <a:t> per course — the efficiency metric that matters</a:t>
-            </a:r>
-          </a:p>
-        </p:txBody>
-      </p:sp>
-      <p:sp>
-        <p:nvSpPr>
-          <p:cNvPr id="8" name="Oval 7"/>
+              <a:t> — 224 concepts, every one finished</a:t>
+            </a:r>
+          </a:p>
+        </p:txBody>
+      </p:sp>
+      <p:sp>
+        <p:nvSpPr>
+          <p:cNvPr id="10" name="Oval 9"/>
           <p:cNvSpPr/>
           <p:nvPr/>
         </p:nvSpPr>
         <p:spPr>
           <a:xfrm>
-            <a:off x="585216" y="4623816"/>
+            <a:off x="585216" y="5074158"/>
             <a:ext cx="65836" cy="65836"/>
           </a:xfrm>
           <a:prstGeom prst="ellipse">
@@ -7178,13 +7628,169 @@
       </p:sp>
       <p:sp>
         <p:nvSpPr>
-          <p:cNvPr id="9" name="TextBox 8"/>
+          <p:cNvPr id="11" name="TextBox 10"/>
           <p:cNvSpPr txBox="1"/>
           <p:nvPr/>
         </p:nvSpPr>
         <p:spPr>
           <a:xfrm>
-            <a:off x="804672" y="4544949"/>
+            <a:off x="804672" y="4995291"/>
+            <a:ext cx="10820095" cy="323469"/>
+          </a:xfrm>
+          <a:prstGeom prst="rect">
+            <a:avLst/>
+          </a:prstGeom>
+          <a:noFill/>
+        </p:spPr>
+        <p:txBody>
+          <a:bodyPr wrap="square" lIns="0" rIns="0" tIns="0" bIns="0">
+            <a:spAutoFit/>
+          </a:bodyPr>
+          <a:lstStyle/>
+          <a:p>
+            <a:r>
+              <a:rPr sz="1350" b="1" i="0">
+                <a:solidFill>
+                  <a:srgbClr val="15192B"/>
+                </a:solidFill>
+                <a:latin typeface="Segoe UI"/>
+              </a:rPr>
+              <a:t>Two more worked a course to 92%</a:t>
+            </a:r>
+          </a:p>
+        </p:txBody>
+      </p:sp>
+      <p:sp>
+        <p:nvSpPr>
+          <p:cNvPr id="12" name="Oval 11"/>
+          <p:cNvSpPr/>
+          <p:nvPr/>
+        </p:nvSpPr>
+        <p:spPr>
+          <a:xfrm>
+            <a:off x="585216" y="5397626"/>
+            <a:ext cx="65836" cy="65836"/>
+          </a:xfrm>
+          <a:prstGeom prst="ellipse">
+            <a:avLst/>
+          </a:prstGeom>
+          <a:solidFill>
+            <a:srgbClr val="4A3AFF"/>
+          </a:solidFill>
+          <a:ln>
+            <a:noFill/>
+          </a:ln>
+          <a:effectLst/>
+        </p:spPr>
+        <p:style>
+          <a:lnRef idx="1">
+            <a:schemeClr val="accent1"/>
+          </a:lnRef>
+          <a:fillRef idx="3">
+            <a:schemeClr val="accent1"/>
+          </a:fillRef>
+          <a:effectRef idx="2">
+            <a:schemeClr val="accent1"/>
+          </a:effectRef>
+          <a:fontRef idx="minor">
+            <a:schemeClr val="lt1"/>
+          </a:fontRef>
+        </p:style>
+        <p:txBody>
+          <a:bodyPr rtlCol="0" anchor="ctr"/>
+          <a:lstStyle/>
+          <a:p>
+            <a:pPr algn="ctr"/>
+          </a:p>
+        </p:txBody>
+      </p:sp>
+      <p:sp>
+        <p:nvSpPr>
+          <p:cNvPr id="13" name="TextBox 12"/>
+          <p:cNvSpPr txBox="1"/>
+          <p:nvPr/>
+        </p:nvSpPr>
+        <p:spPr>
+          <a:xfrm>
+            <a:off x="804672" y="5318760"/>
+            <a:ext cx="10820095" cy="323469"/>
+          </a:xfrm>
+          <a:prstGeom prst="rect">
+            <a:avLst/>
+          </a:prstGeom>
+          <a:noFill/>
+        </p:spPr>
+        <p:txBody>
+          <a:bodyPr wrap="square" lIns="0" rIns="0" tIns="0" bIns="0">
+            <a:spAutoFit/>
+          </a:bodyPr>
+          <a:lstStyle/>
+          <a:p>
+            <a:r>
+              <a:rPr sz="1350" b="0" i="0">
+                <a:solidFill>
+                  <a:srgbClr val="5A6072"/>
+                </a:solidFill>
+                <a:latin typeface="Segoe UI"/>
+              </a:rPr>
+              <a:t>86 site visitors over the last four months; 15 accounts, 25 enrolments</a:t>
+            </a:r>
+          </a:p>
+        </p:txBody>
+      </p:sp>
+      <p:sp>
+        <p:nvSpPr>
+          <p:cNvPr id="14" name="Oval 13"/>
+          <p:cNvSpPr/>
+          <p:nvPr/>
+        </p:nvSpPr>
+        <p:spPr>
+          <a:xfrm>
+            <a:off x="585216" y="5721095"/>
+            <a:ext cx="65836" cy="65836"/>
+          </a:xfrm>
+          <a:prstGeom prst="ellipse">
+            <a:avLst/>
+          </a:prstGeom>
+          <a:solidFill>
+            <a:srgbClr val="4A3AFF"/>
+          </a:solidFill>
+          <a:ln>
+            <a:noFill/>
+          </a:ln>
+          <a:effectLst/>
+        </p:spPr>
+        <p:style>
+          <a:lnRef idx="1">
+            <a:schemeClr val="accent1"/>
+          </a:lnRef>
+          <a:fillRef idx="3">
+            <a:schemeClr val="accent1"/>
+          </a:fillRef>
+          <a:effectRef idx="2">
+            <a:schemeClr val="accent1"/>
+          </a:effectRef>
+          <a:fontRef idx="minor">
+            <a:schemeClr val="lt1"/>
+          </a:fontRef>
+        </p:style>
+        <p:txBody>
+          <a:bodyPr rtlCol="0" anchor="ctr"/>
+          <a:lstStyle/>
+          <a:p>
+            <a:pPr algn="ctr"/>
+          </a:p>
+        </p:txBody>
+      </p:sp>
+      <p:sp>
+        <p:nvSpPr>
+          <p:cNvPr id="15" name="TextBox 14"/>
+          <p:cNvSpPr txBox="1"/>
+          <p:nvPr/>
+        </p:nvSpPr>
+        <p:spPr>
+          <a:xfrm>
+            <a:off x="804672" y="5642229"/>
             <a:ext cx="10820095" cy="323469"/>
           </a:xfrm>
           <a:prstGeom prst="rect">
@@ -7265,7 +7871,7 @@
                 </a:solidFill>
                 <a:latin typeface="Segoe UI"/>
               </a:rPr>
-              <a:t>SLIDE 11   </a:t>
+              <a:t>SLIDE 13   </a:t>
             </a:r>
             <a:r>
               <a:rPr sz="2500" b="1">
@@ -7332,7 +7938,7 @@
         <p:spPr>
           <a:xfrm>
             <a:off x="566928" y="1133856"/>
-            <a:ext cx="11057839" cy="376428"/>
+            <a:ext cx="11057839" cy="661416"/>
           </a:xfrm>
           <a:prstGeom prst="rect">
             <a:avLst/>
@@ -7348,27 +7954,174 @@
             <a:r>
               <a:rPr sz="1700" b="1" i="0">
                 <a:solidFill>
+                  <a:srgbClr val="15192B"/>
+                </a:solidFill>
+                <a:latin typeface="Segoe UI"/>
+              </a:rPr>
+              <a:t>The product is built. This round buys distribution — and the infrastructure to survive it.</a:t>
+            </a:r>
+          </a:p>
+        </p:txBody>
+      </p:sp>
+      <p:sp>
+        <p:nvSpPr>
+          <p:cNvPr id="5" name="TextBox 4"/>
+          <p:cNvSpPr txBox="1"/>
+          <p:nvPr/>
+        </p:nvSpPr>
+        <p:spPr>
+          <a:xfrm>
+            <a:off x="566928" y="1996440"/>
+            <a:ext cx="11057839" cy="592074"/>
+          </a:xfrm>
+          <a:prstGeom prst="rect">
+            <a:avLst/>
+          </a:prstGeom>
+          <a:noFill/>
+        </p:spPr>
+        <p:txBody>
+          <a:bodyPr wrap="square" lIns="0" rIns="0" tIns="0" bIns="0">
+            <a:spAutoFit/>
+          </a:bodyPr>
+          <a:lstStyle/>
+          <a:p>
+            <a:r>
+              <a:rPr sz="1350" b="1" i="0">
+                <a:solidFill>
                   <a:srgbClr val="C2410C"/>
                 </a:solidFill>
                 <a:latin typeface="Segoe UI"/>
               </a:rPr>
-              <a:t>⚠️ TODO — what this round buys, and the milestone it reaches.</a:t>
-            </a:r>
-          </a:p>
-        </p:txBody>
-      </p:sp>
-      <p:sp>
-        <p:nvSpPr>
-          <p:cNvPr id="5" name="Oval 4"/>
+              <a:t>1 · Distribution</a:t>
+            </a:r>
+            <a:r>
+              <a:rPr sz="1350" b="0" i="0">
+                <a:solidFill>
+                  <a:srgbClr val="C2410C"/>
+                </a:solidFill>
+                <a:latin typeface="Segoe UI"/>
+              </a:rPr>
+              <a:t> — creator partnerships on revenue share, co-op and association relationships, and the conversion work the funnel needs. ⚠️ TODO: $</a:t>
+            </a:r>
+          </a:p>
+        </p:txBody>
+      </p:sp>
+      <p:sp>
+        <p:nvSpPr>
+          <p:cNvPr id="6" name="TextBox 5"/>
+          <p:cNvSpPr txBox="1"/>
+          <p:nvPr/>
+        </p:nvSpPr>
+        <p:spPr>
+          <a:xfrm>
+            <a:off x="566928" y="2588514"/>
+            <a:ext cx="11057839" cy="592074"/>
+          </a:xfrm>
+          <a:prstGeom prst="rect">
+            <a:avLst/>
+          </a:prstGeom>
+          <a:noFill/>
+        </p:spPr>
+        <p:txBody>
+          <a:bodyPr wrap="square" lIns="0" rIns="0" tIns="0" bIns="0">
+            <a:spAutoFit/>
+          </a:bodyPr>
+          <a:lstStyle/>
+          <a:p>
+            <a:r>
+              <a:rPr sz="1350" b="1" i="0">
+                <a:solidFill>
+                  <a:srgbClr val="C2410C"/>
+                </a:solidFill>
+                <a:latin typeface="Segoe UI"/>
+              </a:rPr>
+              <a:t>2 · Hardening</a:t>
+            </a:r>
+            <a:r>
+              <a:rPr sz="1350" b="0" i="0">
+                <a:solidFill>
+                  <a:srgbClr val="C2410C"/>
+                </a:solidFill>
+                <a:latin typeface="Segoe UI"/>
+              </a:rPr>
+              <a:t> — everything currently runs on free tiers. Managed Neo4j with backups, an always-on backend (no cold starts on an 18-minute pipeline), observability, and hard rate limits on course generation. ⚠️ TODO: $</a:t>
+            </a:r>
+          </a:p>
+        </p:txBody>
+      </p:sp>
+      <p:sp>
+        <p:nvSpPr>
+          <p:cNvPr id="7" name="TextBox 6"/>
+          <p:cNvSpPr txBox="1"/>
+          <p:nvPr/>
+        </p:nvSpPr>
+        <p:spPr>
+          <a:xfrm>
+            <a:off x="566928" y="3180588"/>
+            <a:ext cx="11057839" cy="369189"/>
+          </a:xfrm>
+          <a:prstGeom prst="rect">
+            <a:avLst/>
+          </a:prstGeom>
+          <a:noFill/>
+        </p:spPr>
+        <p:txBody>
+          <a:bodyPr wrap="square" lIns="0" rIns="0" tIns="0" bIns="0">
+            <a:spAutoFit/>
+          </a:bodyPr>
+          <a:lstStyle/>
+          <a:p>
+            <a:r>
+              <a:rPr sz="1350" b="1" i="0">
+                <a:solidFill>
+                  <a:srgbClr val="C2410C"/>
+                </a:solidFill>
+                <a:latin typeface="Segoe UI"/>
+              </a:rPr>
+              <a:t>3 · Runway</a:t>
+            </a:r>
+            <a:r>
+              <a:rPr sz="1350" b="0" i="0">
+                <a:solidFill>
+                  <a:srgbClr val="C2410C"/>
+                </a:solidFill>
+                <a:latin typeface="Segoe UI"/>
+              </a:rPr>
+              <a:t> — to the </a:t>
+            </a:r>
+            <a:r>
+              <a:rPr sz="1350" b="1" i="0">
+                <a:solidFill>
+                  <a:srgbClr val="C2410C"/>
+                </a:solidFill>
+                <a:latin typeface="Segoe UI"/>
+              </a:rPr>
+              <a:t>spring 2027 homeschool buying cycle</a:t>
+            </a:r>
+            <a:r>
+              <a:rPr sz="1350" b="0" i="0">
+                <a:solidFill>
+                  <a:srgbClr val="C2410C"/>
+                </a:solidFill>
+                <a:latin typeface="Segoe UI"/>
+              </a:rPr>
+              <a:t>, when curriculum is actually purchased. ⚠️ TODO: months</a:t>
+            </a:r>
+          </a:p>
+        </p:txBody>
+      </p:sp>
+      <p:sp>
+        <p:nvSpPr>
+          <p:cNvPr id="8" name="Rectangle 7"/>
           <p:cNvSpPr/>
           <p:nvPr/>
         </p:nvSpPr>
         <p:spPr>
           <a:xfrm>
-            <a:off x="585216" y="1790318"/>
-            <a:ext cx="65836" cy="65836"/>
-          </a:xfrm>
-          <a:prstGeom prst="ellipse">
+            <a:off x="566928" y="3577209"/>
+            <a:ext cx="50292" cy="484124"/>
+          </a:xfrm>
+          <a:prstGeom prst="rect">
             <a:avLst/>
           </a:prstGeom>
           <a:solidFill>
@@ -7403,14 +8156,14 @@
       </p:sp>
       <p:sp>
         <p:nvSpPr>
-          <p:cNvPr id="6" name="TextBox 5"/>
+          <p:cNvPr id="9" name="TextBox 8"/>
           <p:cNvSpPr txBox="1"/>
           <p:nvPr/>
         </p:nvSpPr>
         <p:spPr>
           <a:xfrm>
-            <a:off x="804672" y="1711452"/>
-            <a:ext cx="10820095" cy="323469"/>
+            <a:off x="877824" y="3549777"/>
+            <a:ext cx="10746943" cy="575564"/>
           </a:xfrm>
           <a:prstGeom prst="rect">
             <a:avLst/>
@@ -7424,187 +8177,31 @@
           <a:lstStyle/>
           <a:p>
             <a:r>
-              <a:rPr sz="1350" b="0" i="0">
+              <a:rPr sz="1300" b="1" i="1">
                 <a:solidFill>
                   <a:srgbClr val="C2410C"/>
                 </a:solidFill>
                 <a:latin typeface="Segoe UI"/>
               </a:rPr>
-              <a:t>⚠️ TODO: allocation across engineering / content / GTM / runway</a:t>
-            </a:r>
-          </a:p>
-        </p:txBody>
-      </p:sp>
-      <p:sp>
-        <p:nvSpPr>
-          <p:cNvPr id="7" name="Oval 6"/>
-          <p:cNvSpPr/>
-          <p:nvPr/>
-        </p:nvSpPr>
-        <p:spPr>
-          <a:xfrm>
-            <a:off x="585216" y="2113788"/>
-            <a:ext cx="65836" cy="65836"/>
-          </a:xfrm>
-          <a:prstGeom prst="ellipse">
-            <a:avLst/>
-          </a:prstGeom>
-          <a:solidFill>
-            <a:srgbClr val="4A3AFF"/>
-          </a:solidFill>
-          <a:ln>
-            <a:noFill/>
-          </a:ln>
-          <a:effectLst/>
-        </p:spPr>
-        <p:style>
-          <a:lnRef idx="1">
-            <a:schemeClr val="accent1"/>
-          </a:lnRef>
-          <a:fillRef idx="3">
-            <a:schemeClr val="accent1"/>
-          </a:fillRef>
-          <a:effectRef idx="2">
-            <a:schemeClr val="accent1"/>
-          </a:effectRef>
-          <a:fontRef idx="minor">
-            <a:schemeClr val="lt1"/>
-          </a:fontRef>
-        </p:style>
-        <p:txBody>
-          <a:bodyPr rtlCol="0" anchor="ctr"/>
-          <a:lstStyle/>
-          <a:p>
-            <a:pPr algn="ctr"/>
-          </a:p>
-        </p:txBody>
-      </p:sp>
-      <p:sp>
-        <p:nvSpPr>
-          <p:cNvPr id="8" name="TextBox 7"/>
-          <p:cNvSpPr txBox="1"/>
-          <p:nvPr/>
-        </p:nvSpPr>
-        <p:spPr>
-          <a:xfrm>
-            <a:off x="804672" y="2034921"/>
-            <a:ext cx="10820095" cy="323469"/>
-          </a:xfrm>
-          <a:prstGeom prst="rect">
-            <a:avLst/>
-          </a:prstGeom>
-          <a:noFill/>
-        </p:spPr>
-        <p:txBody>
-          <a:bodyPr wrap="square" lIns="0" rIns="0" tIns="0" bIns="0">
-            <a:spAutoFit/>
-          </a:bodyPr>
-          <a:lstStyle/>
-          <a:p>
-            <a:r>
-              <a:rPr sz="1350" b="0" i="0">
+              <a:t>The milestone this round buys:</a:t>
+            </a:r>
+            <a:r>
+              <a:rPr sz="1300" b="0" i="1">
                 <a:solidFill>
                   <a:srgbClr val="C2410C"/>
                 </a:solidFill>
                 <a:latin typeface="Segoe UI"/>
               </a:rPr>
-              <a:t>⚠️ TODO: months of runway</a:t>
-            </a:r>
-          </a:p>
-        </p:txBody>
-      </p:sp>
-      <p:sp>
-        <p:nvSpPr>
-          <p:cNvPr id="9" name="Oval 8"/>
-          <p:cNvSpPr/>
-          <p:nvPr/>
-        </p:nvSpPr>
-        <p:spPr>
-          <a:xfrm>
-            <a:off x="585216" y="2437257"/>
-            <a:ext cx="65836" cy="65836"/>
-          </a:xfrm>
-          <a:prstGeom prst="ellipse">
-            <a:avLst/>
-          </a:prstGeom>
-          <a:solidFill>
-            <a:srgbClr val="4A3AFF"/>
-          </a:solidFill>
-          <a:ln>
-            <a:noFill/>
-          </a:ln>
-          <a:effectLst/>
-        </p:spPr>
-        <p:style>
-          <a:lnRef idx="1">
-            <a:schemeClr val="accent1"/>
-          </a:lnRef>
-          <a:fillRef idx="3">
-            <a:schemeClr val="accent1"/>
-          </a:fillRef>
-          <a:effectRef idx="2">
-            <a:schemeClr val="accent1"/>
-          </a:effectRef>
-          <a:fontRef idx="minor">
-            <a:schemeClr val="lt1"/>
-          </a:fontRef>
-        </p:style>
-        <p:txBody>
-          <a:bodyPr rtlCol="0" anchor="ctr"/>
-          <a:lstStyle/>
-          <a:p>
-            <a:pPr algn="ctr"/>
-          </a:p>
-        </p:txBody>
-      </p:sp>
-      <p:sp>
-        <p:nvSpPr>
-          <p:cNvPr id="10" name="TextBox 9"/>
-          <p:cNvSpPr txBox="1"/>
-          <p:nvPr/>
-        </p:nvSpPr>
-        <p:spPr>
-          <a:xfrm>
-            <a:off x="804672" y="2358390"/>
-            <a:ext cx="10820095" cy="323469"/>
-          </a:xfrm>
-          <a:prstGeom prst="rect">
-            <a:avLst/>
-          </a:prstGeom>
-          <a:noFill/>
-        </p:spPr>
-        <p:txBody>
-          <a:bodyPr wrap="square" lIns="0" rIns="0" tIns="0" bIns="0">
-            <a:spAutoFit/>
-          </a:bodyPr>
-          <a:lstStyle/>
-          <a:p>
-            <a:r>
-              <a:rPr sz="1350" b="0" i="0">
+              <a:t> ⚠️ TODO — </a:t>
+            </a:r>
+            <a:r>
+              <a:rPr sz="1300" b="0" i="1">
                 <a:solidFill>
                   <a:srgbClr val="C2410C"/>
                 </a:solidFill>
                 <a:latin typeface="Segoe UI"/>
               </a:rPr>
-              <a:t>⚠️ TODO: the specific milestone that makes the </a:t>
-            </a:r>
-            <a:r>
-              <a:rPr sz="1350" b="0" i="1">
-                <a:solidFill>
-                  <a:srgbClr val="C2410C"/>
-                </a:solidFill>
-                <a:latin typeface="Segoe UI"/>
-              </a:rPr>
-              <a:t>next</a:t>
-            </a:r>
-            <a:r>
-              <a:rPr sz="1350" b="0" i="0">
-                <a:solidFill>
-                  <a:srgbClr val="C2410C"/>
-                </a:solidFill>
-                <a:latin typeface="Segoe UI"/>
-              </a:rPr>
-              <a:t> round (or profitability) achievable</a:t>
+              <a:t>"By the spring 2027 cycle we have N creator partners, M paying families, and completion data."</a:t>
             </a:r>
           </a:p>
         </p:txBody>
@@ -7664,7 +8261,7 @@
                 </a:solidFill>
                 <a:latin typeface="Segoe UI"/>
               </a:rPr>
-              <a:t>SLIDE 12   </a:t>
+              <a:t>SLIDE 14   </a:t>
             </a:r>
             <a:r>
               <a:rPr sz="2500" b="1">
@@ -8333,7 +8930,7 @@
                 </a:solidFill>
                 <a:latin typeface="Segoe UI"/>
               </a:rPr>
-              <a:t>SLIDE 13   </a:t>
+              <a:t>SLIDE 15   </a:t>
             </a:r>
             <a:r>
               <a:rPr sz="2500" b="1">
@@ -10180,7 +10777,7 @@
                 </a:solidFill>
                 <a:latin typeface="Segoe UI"/>
               </a:rPr>
-              <a:t>⚠️ TODO: remaining 12–18 month milestones, tied to the Slide 11 funding milestone</a:t>
+              <a:t>⚠️ TODO: remaining 12–18 month milestones, tied to the Use of Funds milestone</a:t>
             </a:r>
           </a:p>
         </p:txBody>
@@ -10240,7 +10837,7 @@
                 </a:solidFill>
                 <a:latin typeface="Segoe UI"/>
               </a:rPr>
-              <a:t>SLIDE 1   </a:t>
+              <a:t>SLIDE 2   </a:t>
             </a:r>
             <a:r>
               <a:rPr sz="2500" b="1">
@@ -12478,7 +13075,7 @@
                 </a:solidFill>
                 <a:latin typeface="Segoe UI"/>
               </a:rPr>
-              <a:t>Source material for Slide 4. Charles Irvine, </a:t>
+              <a:t>Source material for the Founder slide. Charles Irvine, </a:t>
             </a:r>
             <a:r>
               <a:rPr sz="1350" b="0" i="1">
@@ -13117,7 +13714,7 @@
                 </a:solidFill>
                 <a:latin typeface="Segoe UI"/>
               </a:rPr>
-              <a:t>The two that carry Slide 4:</a:t>
+              <a:t>The two that carry the Founder slide:</a:t>
             </a:r>
           </a:p>
         </p:txBody>
@@ -15748,7 +16345,7 @@
                 </a:solidFill>
                 <a:latin typeface="Segoe UI"/>
               </a:rPr>
-              <a:t>Cross-sector comparison and capital gap (Slide 1):</a:t>
+              <a:t>Cross-sector comparison and capital gap (the Market slide):</a:t>
             </a:r>
           </a:p>
         </p:txBody>
@@ -16338,7 +16935,7 @@
         <p:spPr>
           <a:xfrm>
             <a:off x="566928" y="5126926"/>
-            <a:ext cx="11057839" cy="774839"/>
+            <a:ext cx="11057839" cy="984351"/>
           </a:xfrm>
           <a:prstGeom prst="rect">
             <a:avLst/>
@@ -16367,7 +16964,7 @@
                 </a:solidFill>
                 <a:latin typeface="Segoe UI"/>
               </a:rPr>
-              <a:t> segment figures come from commercial market-research firms whose estimates vary widely by methodology (private tutoring alone is reported anywhere from ~$67B to ~$134B for 2025). The HolonIQ top-line and the U.S. government figures are the two most defensible numbers on Slide 1; lead with those and treat the rest as directional.</a:t>
+              <a:t> segment figures come from commercial market-research firms whose estimates vary widely by methodology (private tutoring alone is reported anywhere from ~$67B to ~$134B for 2025). The HolonIQ top-line and the U.S. government figures are the two most defensible numbers on the Market slide; lead with those and treat the rest as directional.</a:t>
             </a:r>
           </a:p>
         </p:txBody>
@@ -16505,7 +17102,7 @@
                 </a:solidFill>
                 <a:latin typeface="Segoe UI"/>
               </a:rPr>
-              <a:t>Moved off Slide 1 to keep it presentable. Use if an American angel asks for domestic figures.</a:t>
+              <a:t>Moved off the Market slide to keep it presentable. Use if an American angel asks for domestic figures.</a:t>
             </a:r>
           </a:p>
         </p:txBody>
@@ -16917,7 +17514,7 @@
                 </a:solidFill>
                 <a:latin typeface="Segoe UI"/>
               </a:rPr>
-              <a:t>Working material behind Slide 9. </a:t>
+              <a:t>Working material behind the Business Model slide. </a:t>
             </a:r>
             <a:r>
               <a:rPr sz="1106" b="1" i="0">
@@ -18862,7 +19459,7 @@
                 </a:solidFill>
                 <a:latin typeface="Segoe UI"/>
               </a:rPr>
-              <a:t>SLIDE 1B   </a:t>
+              <a:t>SLIDE 3   </a:t>
             </a:r>
             <a:r>
               <a:rPr sz="2500" b="1">
@@ -20749,6 +21346,1109 @@
 </p:sld>
 </file>
 
+<file path=ppt/slides/slide32.xml><?xml version="1.0" encoding="utf-8"?>
+<p:sld xmlns:a="http://schemas.openxmlformats.org/drawingml/2006/main" xmlns:p="http://schemas.openxmlformats.org/presentationml/2006/main" xmlns:r="http://schemas.openxmlformats.org/officeDocument/2006/relationships">
+  <p:cSld>
+    <p:bg>
+      <p:bgPr>
+        <a:solidFill>
+          <a:srgbClr val="FFFFFF"/>
+        </a:solidFill>
+        <a:effectLst/>
+      </p:bgPr>
+    </p:bg>
+    <p:spTree>
+      <p:nvGrpSpPr>
+        <p:cNvPr id="1" name=""/>
+        <p:cNvGrpSpPr/>
+        <p:nvPr/>
+      </p:nvGrpSpPr>
+      <p:grpSpPr/>
+      <p:sp>
+        <p:nvSpPr>
+          <p:cNvPr id="2" name="TextBox 1"/>
+          <p:cNvSpPr txBox="1"/>
+          <p:nvPr/>
+        </p:nvSpPr>
+        <p:spPr>
+          <a:xfrm>
+            <a:off x="566928" y="420624"/>
+            <a:ext cx="11057839" cy="475488"/>
+          </a:xfrm>
+          <a:prstGeom prst="rect">
+            <a:avLst/>
+          </a:prstGeom>
+          <a:noFill/>
+        </p:spPr>
+        <p:txBody>
+          <a:bodyPr wrap="square" lIns="0" rIns="0" tIns="0" bIns="0">
+            <a:spAutoFit/>
+          </a:bodyPr>
+          <a:lstStyle/>
+          <a:p>
+            <a:r>
+              <a:rPr sz="2500" b="1">
+                <a:solidFill>
+                  <a:srgbClr val="15192B"/>
+                </a:solidFill>
+                <a:latin typeface="Segoe UI"/>
+              </a:rPr>
+              <a:t>A11 — Pre-revenue plan: conversion, then channels</a:t>
+            </a:r>
+          </a:p>
+        </p:txBody>
+      </p:sp>
+      <p:sp>
+        <p:nvSpPr>
+          <p:cNvPr id="3" name="Rectangle 2"/>
+          <p:cNvSpPr/>
+          <p:nvPr/>
+        </p:nvSpPr>
+        <p:spPr>
+          <a:xfrm>
+            <a:off x="566928" y="950976"/>
+            <a:ext cx="11057839" cy="12801"/>
+          </a:xfrm>
+          <a:prstGeom prst="rect">
+            <a:avLst/>
+          </a:prstGeom>
+          <a:solidFill>
+            <a:srgbClr val="D8DBE6"/>
+          </a:solidFill>
+          <a:ln>
+            <a:noFill/>
+          </a:ln>
+          <a:effectLst/>
+        </p:spPr>
+        <p:style>
+          <a:lnRef idx="1">
+            <a:schemeClr val="accent1"/>
+          </a:lnRef>
+          <a:fillRef idx="3">
+            <a:schemeClr val="accent1"/>
+          </a:fillRef>
+          <a:effectRef idx="2">
+            <a:schemeClr val="accent1"/>
+          </a:effectRef>
+          <a:fontRef idx="minor">
+            <a:schemeClr val="lt1"/>
+          </a:fontRef>
+        </p:style>
+        <p:txBody>
+          <a:bodyPr rtlCol="0" anchor="ctr"/>
+          <a:lstStyle/>
+          <a:p>
+            <a:pPr algn="ctr"/>
+          </a:p>
+        </p:txBody>
+      </p:sp>
+      <p:sp>
+        <p:nvSpPr>
+          <p:cNvPr id="4" name="TextBox 3"/>
+          <p:cNvSpPr txBox="1"/>
+          <p:nvPr/>
+        </p:nvSpPr>
+        <p:spPr>
+          <a:xfrm>
+            <a:off x="566928" y="1133856"/>
+            <a:ext cx="5336895" cy="1060132"/>
+          </a:xfrm>
+          <a:prstGeom prst="rect">
+            <a:avLst/>
+          </a:prstGeom>
+          <a:noFill/>
+        </p:spPr>
+        <p:txBody>
+          <a:bodyPr wrap="square" lIns="0" rIns="0" tIns="0" bIns="0">
+            <a:spAutoFit/>
+          </a:bodyPr>
+          <a:lstStyle/>
+          <a:p>
+            <a:r>
+              <a:rPr sz="1106" b="1" i="0">
+                <a:solidFill>
+                  <a:srgbClr val="15192B"/>
+                </a:solidFill>
+                <a:latin typeface="Segoe UI"/>
+              </a:rPr>
+              <a:t>The finding that orders everything.</a:t>
+            </a:r>
+            <a:r>
+              <a:rPr sz="1106" b="0" i="0">
+                <a:solidFill>
+                  <a:srgbClr val="5A6072"/>
+                </a:solidFill>
+                <a:latin typeface="Segoe UI"/>
+              </a:rPr>
+              <a:t> Google Analytics shows </a:t>
+            </a:r>
+            <a:r>
+              <a:rPr sz="1106" b="1" i="0">
+                <a:solidFill>
+                  <a:srgbClr val="15192B"/>
+                </a:solidFill>
+                <a:latin typeface="Segoe UI"/>
+              </a:rPr>
+              <a:t>86 active users</a:t>
+            </a:r>
+            <a:r>
+              <a:rPr sz="1106" b="0" i="0">
+                <a:solidFill>
+                  <a:srgbClr val="5A6072"/>
+                </a:solidFill>
+                <a:latin typeface="Segoe UI"/>
+              </a:rPr>
+              <a:t> and 257 engaged sessions between 1 May and 22 August 2026. The production graph holds </a:t>
+            </a:r>
+            <a:r>
+              <a:rPr sz="1106" b="1" i="0">
+                <a:solidFill>
+                  <a:srgbClr val="15192B"/>
+                </a:solidFill>
+                <a:latin typeface="Segoe UI"/>
+              </a:rPr>
+              <a:t>15 accounts</a:t>
+            </a:r>
+            <a:r>
+              <a:rPr sz="1106" b="0" i="0">
+                <a:solidFill>
+                  <a:srgbClr val="5A6072"/>
+                </a:solidFill>
+                <a:latin typeface="Segoe UI"/>
+              </a:rPr>
+              <a:t> and 25 enrolments. Roughly 84% of engaged sessions come from two locations — the founder, and the single power user.</a:t>
+            </a:r>
+          </a:p>
+        </p:txBody>
+      </p:sp>
+      <p:sp>
+        <p:nvSpPr>
+          <p:cNvPr id="5" name="TextBox 4"/>
+          <p:cNvSpPr txBox="1"/>
+          <p:nvPr/>
+        </p:nvSpPr>
+        <p:spPr>
+          <a:xfrm>
+            <a:off x="566928" y="2193988"/>
+            <a:ext cx="5336895" cy="1060132"/>
+          </a:xfrm>
+          <a:prstGeom prst="rect">
+            <a:avLst/>
+          </a:prstGeom>
+          <a:noFill/>
+        </p:spPr>
+        <p:txBody>
+          <a:bodyPr wrap="square" lIns="0" rIns="0" tIns="0" bIns="0">
+            <a:spAutoFit/>
+          </a:bodyPr>
+          <a:lstStyle/>
+          <a:p>
+            <a:r>
+              <a:rPr sz="1106" b="0" i="0">
+                <a:solidFill>
+                  <a:srgbClr val="5A6072"/>
+                </a:solidFill>
+                <a:latin typeface="Segoe UI"/>
+              </a:rPr>
+              <a:t>The product works on the people who reach it. Almost nobody reaches it, and of those who do, most never create an account. </a:t>
+            </a:r>
+            <a:r>
+              <a:rPr sz="1106" b="1" i="0">
+                <a:solidFill>
+                  <a:srgbClr val="15192B"/>
+                </a:solidFill>
+                <a:latin typeface="Segoe UI"/>
+              </a:rPr>
+              <a:t>That is a conversion problem, not an awareness problem</a:t>
+            </a:r>
+            <a:r>
+              <a:rPr sz="1106" b="0" i="0">
+                <a:solidFill>
+                  <a:srgbClr val="5A6072"/>
+                </a:solidFill>
+                <a:latin typeface="Segoe UI"/>
+              </a:rPr>
+              <a:t> — and publicity spent against a leaking funnel buys a bigger leak. Sequence the spend accordingly: conversion first, channels second.</a:t>
+            </a:r>
+          </a:p>
+        </p:txBody>
+      </p:sp>
+      <p:sp>
+        <p:nvSpPr>
+          <p:cNvPr id="6" name="TextBox 5"/>
+          <p:cNvSpPr txBox="1"/>
+          <p:nvPr/>
+        </p:nvSpPr>
+        <p:spPr>
+          <a:xfrm>
+            <a:off x="566928" y="3254121"/>
+            <a:ext cx="5336895" cy="1973961"/>
+          </a:xfrm>
+          <a:prstGeom prst="rect">
+            <a:avLst/>
+          </a:prstGeom>
+          <a:noFill/>
+        </p:spPr>
+        <p:txBody>
+          <a:bodyPr wrap="square" lIns="0" rIns="0" tIns="0" bIns="0">
+            <a:spAutoFit/>
+          </a:bodyPr>
+          <a:lstStyle/>
+          <a:p>
+            <a:r>
+              <a:rPr sz="1106" b="1" i="0">
+                <a:solidFill>
+                  <a:srgbClr val="15192B"/>
+                </a:solidFill>
+                <a:latin typeface="Segoe UI"/>
+              </a:rPr>
+              <a:t>The conversion asset: a free prerequisite diagnostic.</a:t>
+            </a:r>
+            <a:r>
+              <a:rPr sz="1106" b="0" i="0">
+                <a:solidFill>
+                  <a:srgbClr val="5A6072"/>
+                </a:solidFill>
+                <a:latin typeface="Segoe UI"/>
+              </a:rPr>
+              <a:t> A homeschool parent's recurring anxiety is </a:t>
+            </a:r>
+            <a:r>
+              <a:rPr sz="1106" b="0" i="1">
+                <a:solidFill>
+                  <a:srgbClr val="5A6072"/>
+                </a:solidFill>
+                <a:latin typeface="Segoe UI"/>
+              </a:rPr>
+              <a:t>"does my child have gaps, and are they actually ready for algebra II?"</a:t>
+            </a:r>
+            <a:r>
+              <a:rPr sz="1106" b="0" i="0">
+                <a:solidFill>
+                  <a:srgbClr val="5A6072"/>
+                </a:solidFill>
+                <a:latin typeface="Segoe UI"/>
+              </a:rPr>
+              <a:t> The transitive prerequisite graph answers exactly that, and nothing else on the market does. As a free, no-signup tool it demonstrates the differentiator instead of describing it, produces a result parents screenshot and share, captures email at peak intent, and ranks for the searches they really type. Generic free trials get ignored in this market; a diagnostic that tells a worried parent something true about their own child does not.</a:t>
+            </a:r>
+          </a:p>
+        </p:txBody>
+      </p:sp>
+      <p:sp>
+        <p:nvSpPr>
+          <p:cNvPr id="7" name="TextBox 6"/>
+          <p:cNvSpPr txBox="1"/>
+          <p:nvPr/>
+        </p:nvSpPr>
+        <p:spPr>
+          <a:xfrm>
+            <a:off x="566928" y="5228081"/>
+            <a:ext cx="5336895" cy="329069"/>
+          </a:xfrm>
+          <a:prstGeom prst="rect">
+            <a:avLst/>
+          </a:prstGeom>
+          <a:noFill/>
+        </p:spPr>
+        <p:txBody>
+          <a:bodyPr wrap="square" lIns="0" rIns="0" tIns="0" bIns="0">
+            <a:spAutoFit/>
+          </a:bodyPr>
+          <a:lstStyle/>
+          <a:p>
+            <a:r>
+              <a:rPr sz="1106" b="1" i="0">
+                <a:solidFill>
+                  <a:srgbClr val="15192B"/>
+                </a:solidFill>
+                <a:latin typeface="Segoe UI"/>
+              </a:rPr>
+              <a:t>Channels, in priority order.</a:t>
+            </a:r>
+          </a:p>
+        </p:txBody>
+      </p:sp>
+    </p:spTree>
+  </p:cSld>
+  <p:clrMapOvr>
+    <a:masterClrMapping/>
+  </p:clrMapOvr>
+</p:sld>
+</file>
+
+<file path=ppt/slides/slide33.xml><?xml version="1.0" encoding="utf-8"?>
+<p:sld xmlns:a="http://schemas.openxmlformats.org/drawingml/2006/main" xmlns:p="http://schemas.openxmlformats.org/presentationml/2006/main" xmlns:r="http://schemas.openxmlformats.org/officeDocument/2006/relationships">
+  <p:cSld>
+    <p:bg>
+      <p:bgPr>
+        <a:solidFill>
+          <a:srgbClr val="FFFFFF"/>
+        </a:solidFill>
+        <a:effectLst/>
+      </p:bgPr>
+    </p:bg>
+    <p:spTree>
+      <p:nvGrpSpPr>
+        <p:cNvPr id="1" name=""/>
+        <p:cNvGrpSpPr/>
+        <p:nvPr/>
+      </p:nvGrpSpPr>
+      <p:grpSpPr/>
+      <p:sp>
+        <p:nvSpPr>
+          <p:cNvPr id="2" name="TextBox 1"/>
+          <p:cNvSpPr txBox="1"/>
+          <p:nvPr/>
+        </p:nvSpPr>
+        <p:spPr>
+          <a:xfrm>
+            <a:off x="566928" y="420624"/>
+            <a:ext cx="11057839" cy="475488"/>
+          </a:xfrm>
+          <a:prstGeom prst="rect">
+            <a:avLst/>
+          </a:prstGeom>
+          <a:noFill/>
+        </p:spPr>
+        <p:txBody>
+          <a:bodyPr wrap="square" lIns="0" rIns="0" tIns="0" bIns="0">
+            <a:spAutoFit/>
+          </a:bodyPr>
+          <a:lstStyle/>
+          <a:p>
+            <a:r>
+              <a:rPr sz="2500" b="1">
+                <a:solidFill>
+                  <a:srgbClr val="15192B"/>
+                </a:solidFill>
+                <a:latin typeface="Segoe UI"/>
+              </a:rPr>
+              <a:t>A11 — Pre-revenue plan: conversion, then channels  (cont.)</a:t>
+            </a:r>
+          </a:p>
+        </p:txBody>
+      </p:sp>
+      <p:sp>
+        <p:nvSpPr>
+          <p:cNvPr id="3" name="Rectangle 2"/>
+          <p:cNvSpPr/>
+          <p:nvPr/>
+        </p:nvSpPr>
+        <p:spPr>
+          <a:xfrm>
+            <a:off x="566928" y="950976"/>
+            <a:ext cx="11057839" cy="12801"/>
+          </a:xfrm>
+          <a:prstGeom prst="rect">
+            <a:avLst/>
+          </a:prstGeom>
+          <a:solidFill>
+            <a:srgbClr val="D8DBE6"/>
+          </a:solidFill>
+          <a:ln>
+            <a:noFill/>
+          </a:ln>
+          <a:effectLst/>
+        </p:spPr>
+        <p:style>
+          <a:lnRef idx="1">
+            <a:schemeClr val="accent1"/>
+          </a:lnRef>
+          <a:fillRef idx="3">
+            <a:schemeClr val="accent1"/>
+          </a:fillRef>
+          <a:effectRef idx="2">
+            <a:schemeClr val="accent1"/>
+          </a:effectRef>
+          <a:fontRef idx="minor">
+            <a:schemeClr val="lt1"/>
+          </a:fontRef>
+        </p:style>
+        <p:txBody>
+          <a:bodyPr rtlCol="0" anchor="ctr"/>
+          <a:lstStyle/>
+          <a:p>
+            <a:pPr algn="ctr"/>
+          </a:p>
+        </p:txBody>
+      </p:sp>
+      <p:sp>
+        <p:nvSpPr>
+          <p:cNvPr id="4" name="TextBox 3"/>
+          <p:cNvSpPr txBox="1"/>
+          <p:nvPr/>
+        </p:nvSpPr>
+        <p:spPr>
+          <a:xfrm>
+            <a:off x="566928" y="1133856"/>
+            <a:ext cx="5336895" cy="1928240"/>
+          </a:xfrm>
+          <a:prstGeom prst="rect">
+            <a:avLst/>
+          </a:prstGeom>
+          <a:noFill/>
+        </p:spPr>
+        <p:txBody>
+          <a:bodyPr wrap="square" lIns="0" rIns="0" tIns="0" bIns="0">
+            <a:spAutoFit/>
+          </a:bodyPr>
+          <a:lstStyle/>
+          <a:p>
+            <a:r>
+              <a:rPr sz="1106" b="0" i="0">
+                <a:solidFill>
+                  <a:srgbClr val="5A6072"/>
+                </a:solidFill>
+                <a:latin typeface="Segoe UI"/>
+              </a:rPr>
+              <a:t>1. </a:t>
+            </a:r>
+            <a:r>
+              <a:rPr sz="1106" b="1" i="0">
+                <a:solidFill>
+                  <a:srgbClr val="15192B"/>
+                </a:solidFill>
+                <a:latin typeface="Segoe UI"/>
+              </a:rPr>
+              <a:t>Homeschool creators</a:t>
+            </a:r>
+            <a:r>
+              <a:rPr sz="1106" b="0" i="0">
+                <a:solidFill>
+                  <a:srgbClr val="5A6072"/>
+                </a:solidFill>
+                <a:latin typeface="Segoe UI"/>
+              </a:rPr>
+              <a:t> — curriculum-review YouTube channels, Instagram practitioners, podcasters. Not celebrity influencers: trusted practitioners with niche, self-selected audiences. The offer is a </a:t>
+            </a:r>
+            <a:r>
+              <a:rPr sz="1106" b="0" i="1">
+                <a:solidFill>
+                  <a:srgbClr val="5A6072"/>
+                </a:solidFill>
+                <a:latin typeface="Segoe UI"/>
+              </a:rPr>
+              <a:t>collaboration</a:t>
+            </a:r>
+            <a:r>
+              <a:rPr sz="1106" b="0" i="0">
+                <a:solidFill>
+                  <a:srgbClr val="5A6072"/>
+                </a:solidFill>
+                <a:latin typeface="Segoe UI"/>
+              </a:rPr>
+              <a:t>, not a sponsorship — they publish a course under their own name, on their own school page, as an asset for their audience. Paid on revenue share, so the channel costs nothing until it converts and the creator only earns if their audience genuinely uses it. Budget a small guaranteed fee for the first two or three anchor partners, who take real reputational risk with no proof yet.</a:t>
+            </a:r>
+          </a:p>
+        </p:txBody>
+      </p:sp>
+      <p:sp>
+        <p:nvSpPr>
+          <p:cNvPr id="5" name="TextBox 4"/>
+          <p:cNvSpPr txBox="1"/>
+          <p:nvPr/>
+        </p:nvSpPr>
+        <p:spPr>
+          <a:xfrm>
+            <a:off x="566928" y="3062097"/>
+            <a:ext cx="5336895" cy="648881"/>
+          </a:xfrm>
+          <a:prstGeom prst="rect">
+            <a:avLst/>
+          </a:prstGeom>
+          <a:noFill/>
+        </p:spPr>
+        <p:txBody>
+          <a:bodyPr wrap="square" lIns="0" rIns="0" tIns="0" bIns="0">
+            <a:spAutoFit/>
+          </a:bodyPr>
+          <a:lstStyle/>
+          <a:p>
+            <a:r>
+              <a:rPr sz="1106" b="0" i="0">
+                <a:solidFill>
+                  <a:srgbClr val="5A6072"/>
+                </a:solidFill>
+                <a:latin typeface="Segoe UI"/>
+              </a:rPr>
+              <a:t>2. </a:t>
+            </a:r>
+            <a:r>
+              <a:rPr sz="1106" b="1" i="0">
+                <a:solidFill>
+                  <a:srgbClr val="15192B"/>
+                </a:solidFill>
+                <a:latin typeface="Segoe UI"/>
+              </a:rPr>
+              <a:t>Curriculum review gatekeepers</a:t>
+            </a:r>
+            <a:r>
+              <a:rPr sz="1106" b="0" i="0">
+                <a:solidFill>
+                  <a:srgbClr val="5A6072"/>
+                </a:solidFill>
+                <a:latin typeface="Segoe UI"/>
+              </a:rPr>
+              <a:t> — Cathy Duffy Reviews is the market's canonical authority; Homeschool Buyers Club provides group-buying distribution. Slow to earn, disproportionate payoff.</a:t>
+            </a:r>
+          </a:p>
+        </p:txBody>
+      </p:sp>
+      <p:sp>
+        <p:nvSpPr>
+          <p:cNvPr id="6" name="TextBox 5"/>
+          <p:cNvSpPr txBox="1"/>
+          <p:nvPr/>
+        </p:nvSpPr>
+        <p:spPr>
+          <a:xfrm>
+            <a:off x="566928" y="3710978"/>
+            <a:ext cx="5336895" cy="466115"/>
+          </a:xfrm>
+          <a:prstGeom prst="rect">
+            <a:avLst/>
+          </a:prstGeom>
+          <a:noFill/>
+        </p:spPr>
+        <p:txBody>
+          <a:bodyPr wrap="square" lIns="0" rIns="0" tIns="0" bIns="0">
+            <a:spAutoFit/>
+          </a:bodyPr>
+          <a:lstStyle/>
+          <a:p>
+            <a:r>
+              <a:rPr sz="1106" b="0" i="0">
+                <a:solidFill>
+                  <a:srgbClr val="5A6072"/>
+                </a:solidFill>
+                <a:latin typeface="Segoe UI"/>
+              </a:rPr>
+              <a:t>3. </a:t>
+            </a:r>
+            <a:r>
+              <a:rPr sz="1106" b="1" i="0">
+                <a:solidFill>
+                  <a:srgbClr val="15192B"/>
+                </a:solidFill>
+                <a:latin typeface="Segoe UI"/>
+              </a:rPr>
+              <a:t>Co-ops and umbrella schools</a:t>
+            </a:r>
+            <a:r>
+              <a:rPr sz="1106" b="0" i="0">
+                <a:solidFill>
+                  <a:srgbClr val="5A6072"/>
+                </a:solidFill>
+                <a:latin typeface="Segoe UI"/>
+              </a:rPr>
+              <a:t> — one director teaching eight children is a multi-seat sale </a:t>
+            </a:r>
+            <a:r>
+              <a:rPr sz="1106" b="0" i="1">
+                <a:solidFill>
+                  <a:srgbClr val="5A6072"/>
+                </a:solidFill>
+                <a:latin typeface="Segoe UI"/>
+              </a:rPr>
+              <a:t>and</a:t>
+            </a:r>
+            <a:r>
+              <a:rPr sz="1106" b="0" i="0">
+                <a:solidFill>
+                  <a:srgbClr val="5A6072"/>
+                </a:solidFill>
+                <a:latin typeface="Segoe UI"/>
+              </a:rPr>
+              <a:t> an endorsement to eight families.</a:t>
+            </a:r>
+          </a:p>
+        </p:txBody>
+      </p:sp>
+      <p:sp>
+        <p:nvSpPr>
+          <p:cNvPr id="7" name="TextBox 6"/>
+          <p:cNvSpPr txBox="1"/>
+          <p:nvPr/>
+        </p:nvSpPr>
+        <p:spPr>
+          <a:xfrm>
+            <a:off x="566928" y="4177093"/>
+            <a:ext cx="5336895" cy="466115"/>
+          </a:xfrm>
+          <a:prstGeom prst="rect">
+            <a:avLst/>
+          </a:prstGeom>
+          <a:noFill/>
+        </p:spPr>
+        <p:txBody>
+          <a:bodyPr wrap="square" lIns="0" rIns="0" tIns="0" bIns="0">
+            <a:spAutoFit/>
+          </a:bodyPr>
+          <a:lstStyle/>
+          <a:p>
+            <a:r>
+              <a:rPr sz="1106" b="0" i="0">
+                <a:solidFill>
+                  <a:srgbClr val="5A6072"/>
+                </a:solidFill>
+                <a:latin typeface="Segoe UI"/>
+              </a:rPr>
+              <a:t>4. </a:t>
+            </a:r>
+            <a:r>
+              <a:rPr sz="1106" b="1" i="0">
+                <a:solidFill>
+                  <a:srgbClr val="15192B"/>
+                </a:solidFill>
+                <a:latin typeface="Segoe UI"/>
+              </a:rPr>
+              <a:t>State associations and HSLDA</a:t>
+            </a:r>
+            <a:r>
+              <a:rPr sz="1106" b="0" i="0">
+                <a:solidFill>
+                  <a:srgbClr val="5A6072"/>
+                </a:solidFill>
+                <a:latin typeface="Segoe UI"/>
+              </a:rPr>
+              <a:t> — vendor listings, newsletters, member channels.</a:t>
+            </a:r>
+          </a:p>
+        </p:txBody>
+      </p:sp>
+      <p:sp>
+        <p:nvSpPr>
+          <p:cNvPr id="8" name="TextBox 7"/>
+          <p:cNvSpPr txBox="1"/>
+          <p:nvPr/>
+        </p:nvSpPr>
+        <p:spPr>
+          <a:xfrm>
+            <a:off x="566928" y="4643208"/>
+            <a:ext cx="5336895" cy="1014412"/>
+          </a:xfrm>
+          <a:prstGeom prst="rect">
+            <a:avLst/>
+          </a:prstGeom>
+          <a:noFill/>
+        </p:spPr>
+        <p:txBody>
+          <a:bodyPr wrap="square" lIns="0" rIns="0" tIns="0" bIns="0">
+            <a:spAutoFit/>
+          </a:bodyPr>
+          <a:lstStyle/>
+          <a:p>
+            <a:r>
+              <a:rPr sz="1106" b="0" i="0">
+                <a:solidFill>
+                  <a:srgbClr val="C2410C"/>
+                </a:solidFill>
+                <a:latin typeface="Segoe UI"/>
+              </a:rPr>
+              <a:t>5. </a:t>
+            </a:r>
+            <a:r>
+              <a:rPr sz="1106" b="1" i="0">
+                <a:solidFill>
+                  <a:srgbClr val="C2410C"/>
+                </a:solidFill>
+                <a:latin typeface="Segoe UI"/>
+              </a:rPr>
+              <a:t>ESA and school-choice marketplaces</a:t>
+            </a:r>
+            <a:r>
+              <a:rPr sz="1106" b="0" i="0">
+                <a:solidFill>
+                  <a:srgbClr val="C2410C"/>
+                </a:solidFill>
+                <a:latin typeface="Segoe UI"/>
+              </a:rPr>
+              <a:t> — several states now route public education funds to homeschool families through approved-vendor lists. Institutional process, not marketing spend, and it reaches </a:t>
+            </a:r>
+            <a:r>
+              <a:rPr sz="1106" b="0" i="1">
+                <a:solidFill>
+                  <a:srgbClr val="C2410C"/>
+                </a:solidFill>
+                <a:latin typeface="Segoe UI"/>
+              </a:rPr>
+              <a:t>funded</a:t>
+            </a:r>
+            <a:r>
+              <a:rPr sz="1106" b="0" i="0">
+                <a:solidFill>
+                  <a:srgbClr val="C2410C"/>
+                </a:solidFill>
+                <a:latin typeface="Segoe UI"/>
+              </a:rPr>
+              <a:t> demand. ⚠️ TODO: check the current state-by-state position; it is moving fast.</a:t>
+            </a:r>
+          </a:p>
+        </p:txBody>
+      </p:sp>
+      <p:sp>
+        <p:nvSpPr>
+          <p:cNvPr id="9" name="TextBox 8"/>
+          <p:cNvSpPr txBox="1"/>
+          <p:nvPr/>
+        </p:nvSpPr>
+        <p:spPr>
+          <a:xfrm>
+            <a:off x="566928" y="5657621"/>
+            <a:ext cx="5336895" cy="466115"/>
+          </a:xfrm>
+          <a:prstGeom prst="rect">
+            <a:avLst/>
+          </a:prstGeom>
+          <a:noFill/>
+        </p:spPr>
+        <p:txBody>
+          <a:bodyPr wrap="square" lIns="0" rIns="0" tIns="0" bIns="0">
+            <a:spAutoFit/>
+          </a:bodyPr>
+          <a:lstStyle/>
+          <a:p>
+            <a:r>
+              <a:rPr sz="1106" b="0" i="0">
+                <a:solidFill>
+                  <a:srgbClr val="5A6072"/>
+                </a:solidFill>
+                <a:latin typeface="Segoe UI"/>
+              </a:rPr>
+              <a:t>6. </a:t>
+            </a:r>
+            <a:r>
+              <a:rPr sz="1106" b="1" i="0">
+                <a:solidFill>
+                  <a:srgbClr val="15192B"/>
+                </a:solidFill>
+                <a:latin typeface="Segoe UI"/>
+              </a:rPr>
+              <a:t>Conventions</a:t>
+            </a:r>
+            <a:r>
+              <a:rPr sz="1106" b="0" i="0">
+                <a:solidFill>
+                  <a:srgbClr val="5A6072"/>
+                </a:solidFill>
+                <a:latin typeface="Segoe UI"/>
+              </a:rPr>
+              <a:t> — vendor halls are where curriculum is actually chosen. A recorded generation demo runs well in that setting.</a:t>
+            </a:r>
+          </a:p>
+        </p:txBody>
+      </p:sp>
+    </p:spTree>
+  </p:cSld>
+  <p:clrMapOvr>
+    <a:masterClrMapping/>
+  </p:clrMapOvr>
+</p:sld>
+</file>
+
+<file path=ppt/slides/slide34.xml><?xml version="1.0" encoding="utf-8"?>
+<p:sld xmlns:a="http://schemas.openxmlformats.org/drawingml/2006/main" xmlns:p="http://schemas.openxmlformats.org/presentationml/2006/main" xmlns:r="http://schemas.openxmlformats.org/officeDocument/2006/relationships">
+  <p:cSld>
+    <p:bg>
+      <p:bgPr>
+        <a:solidFill>
+          <a:srgbClr val="FFFFFF"/>
+        </a:solidFill>
+        <a:effectLst/>
+      </p:bgPr>
+    </p:bg>
+    <p:spTree>
+      <p:nvGrpSpPr>
+        <p:cNvPr id="1" name=""/>
+        <p:cNvGrpSpPr/>
+        <p:nvPr/>
+      </p:nvGrpSpPr>
+      <p:grpSpPr/>
+      <p:sp>
+        <p:nvSpPr>
+          <p:cNvPr id="2" name="TextBox 1"/>
+          <p:cNvSpPr txBox="1"/>
+          <p:nvPr/>
+        </p:nvSpPr>
+        <p:spPr>
+          <a:xfrm>
+            <a:off x="566928" y="420624"/>
+            <a:ext cx="11057839" cy="475488"/>
+          </a:xfrm>
+          <a:prstGeom prst="rect">
+            <a:avLst/>
+          </a:prstGeom>
+          <a:noFill/>
+        </p:spPr>
+        <p:txBody>
+          <a:bodyPr wrap="square" lIns="0" rIns="0" tIns="0" bIns="0">
+            <a:spAutoFit/>
+          </a:bodyPr>
+          <a:lstStyle/>
+          <a:p>
+            <a:r>
+              <a:rPr sz="2500" b="1">
+                <a:solidFill>
+                  <a:srgbClr val="15192B"/>
+                </a:solidFill>
+                <a:latin typeface="Segoe UI"/>
+              </a:rPr>
+              <a:t>A11 — Pre-revenue plan: conversion, then channels  (cont.)</a:t>
+            </a:r>
+          </a:p>
+        </p:txBody>
+      </p:sp>
+      <p:sp>
+        <p:nvSpPr>
+          <p:cNvPr id="3" name="Rectangle 2"/>
+          <p:cNvSpPr/>
+          <p:nvPr/>
+        </p:nvSpPr>
+        <p:spPr>
+          <a:xfrm>
+            <a:off x="566928" y="950976"/>
+            <a:ext cx="11057839" cy="12801"/>
+          </a:xfrm>
+          <a:prstGeom prst="rect">
+            <a:avLst/>
+          </a:prstGeom>
+          <a:solidFill>
+            <a:srgbClr val="D8DBE6"/>
+          </a:solidFill>
+          <a:ln>
+            <a:noFill/>
+          </a:ln>
+          <a:effectLst/>
+        </p:spPr>
+        <p:style>
+          <a:lnRef idx="1">
+            <a:schemeClr val="accent1"/>
+          </a:lnRef>
+          <a:fillRef idx="3">
+            <a:schemeClr val="accent1"/>
+          </a:fillRef>
+          <a:effectRef idx="2">
+            <a:schemeClr val="accent1"/>
+          </a:effectRef>
+          <a:fontRef idx="minor">
+            <a:schemeClr val="lt1"/>
+          </a:fontRef>
+        </p:style>
+        <p:txBody>
+          <a:bodyPr rtlCol="0" anchor="ctr"/>
+          <a:lstStyle/>
+          <a:p>
+            <a:pPr algn="ctr"/>
+          </a:p>
+        </p:txBody>
+      </p:sp>
+      <p:sp>
+        <p:nvSpPr>
+          <p:cNvPr id="4" name="TextBox 3"/>
+          <p:cNvSpPr txBox="1"/>
+          <p:nvPr/>
+        </p:nvSpPr>
+        <p:spPr>
+          <a:xfrm>
+            <a:off x="566928" y="1133856"/>
+            <a:ext cx="11057839" cy="323469"/>
+          </a:xfrm>
+          <a:prstGeom prst="rect">
+            <a:avLst/>
+          </a:prstGeom>
+          <a:noFill/>
+        </p:spPr>
+        <p:txBody>
+          <a:bodyPr wrap="square" lIns="0" rIns="0" tIns="0" bIns="0">
+            <a:spAutoFit/>
+          </a:bodyPr>
+          <a:lstStyle/>
+          <a:p>
+            <a:r>
+              <a:rPr sz="1350" b="0" i="0">
+                <a:solidFill>
+                  <a:srgbClr val="5A6072"/>
+                </a:solidFill>
+                <a:latin typeface="Segoe UI"/>
+              </a:rPr>
+              <a:t>7. </a:t>
+            </a:r>
+            <a:r>
+              <a:rPr sz="1350" b="1" i="0">
+                <a:solidFill>
+                  <a:srgbClr val="15192B"/>
+                </a:solidFill>
+                <a:latin typeface="Segoe UI"/>
+              </a:rPr>
+              <a:t>Long-tail SEO</a:t>
+            </a:r>
+            <a:r>
+              <a:rPr sz="1350" b="0" i="0">
+                <a:solidFill>
+                  <a:srgbClr val="5A6072"/>
+                </a:solidFill>
+                <a:latin typeface="Segoe UI"/>
+              </a:rPr>
+              <a:t> — the generated content is itself the asset. Publish complete sample units.</a:t>
+            </a:r>
+          </a:p>
+        </p:txBody>
+      </p:sp>
+      <p:sp>
+        <p:nvSpPr>
+          <p:cNvPr id="5" name="TextBox 4"/>
+          <p:cNvSpPr txBox="1"/>
+          <p:nvPr/>
+        </p:nvSpPr>
+        <p:spPr>
+          <a:xfrm>
+            <a:off x="566928" y="1457325"/>
+            <a:ext cx="11057839" cy="1037844"/>
+          </a:xfrm>
+          <a:prstGeom prst="rect">
+            <a:avLst/>
+          </a:prstGeom>
+          <a:noFill/>
+        </p:spPr>
+        <p:txBody>
+          <a:bodyPr wrap="square" lIns="0" rIns="0" tIns="0" bIns="0">
+            <a:spAutoFit/>
+          </a:bodyPr>
+          <a:lstStyle/>
+          <a:p>
+            <a:r>
+              <a:rPr sz="1350" b="1" i="0">
+                <a:solidFill>
+                  <a:srgbClr val="15192B"/>
+                </a:solidFill>
+                <a:latin typeface="Segoe UI"/>
+              </a:rPr>
+              <a:t>What does not work here.</a:t>
+            </a:r>
+            <a:r>
+              <a:rPr sz="1350" b="0" i="0">
+                <a:solidFill>
+                  <a:srgbClr val="5A6072"/>
+                </a:solidFill>
+                <a:latin typeface="Segoe UI"/>
+              </a:rPr>
+              <a:t> Paid ads as a primary channel — this audience is ad-skeptical and word-of-mouth driven. And treating homeschoolers as one market: classical, Charlotte Mason, unschooling, secular and religious segments differ in values and objections. Upper-level maths and science plays best with the </a:t>
+            </a:r>
+            <a:r>
+              <a:rPr sz="1350" b="1" i="0">
+                <a:solidFill>
+                  <a:srgbClr val="15192B"/>
+                </a:solidFill>
+                <a:latin typeface="Segoe UI"/>
+              </a:rPr>
+              <a:t>secular and rigour-focused eclectic</a:t>
+            </a:r>
+            <a:r>
+              <a:rPr sz="1350" b="0" i="0">
+                <a:solidFill>
+                  <a:srgbClr val="5A6072"/>
+                </a:solidFill>
+                <a:latin typeface="Segoe UI"/>
+              </a:rPr>
+              <a:t> segments, which have the sharpest pain and the least AI scepticism.</a:t>
+            </a:r>
+          </a:p>
+        </p:txBody>
+      </p:sp>
+      <p:sp>
+        <p:nvSpPr>
+          <p:cNvPr id="6" name="TextBox 5"/>
+          <p:cNvSpPr txBox="1"/>
+          <p:nvPr/>
+        </p:nvSpPr>
+        <p:spPr>
+          <a:xfrm>
+            <a:off x="566928" y="2495169"/>
+            <a:ext cx="11057839" cy="814959"/>
+          </a:xfrm>
+          <a:prstGeom prst="rect">
+            <a:avLst/>
+          </a:prstGeom>
+          <a:noFill/>
+        </p:spPr>
+        <p:txBody>
+          <a:bodyPr wrap="square" lIns="0" rIns="0" tIns="0" bIns="0">
+            <a:spAutoFit/>
+          </a:bodyPr>
+          <a:lstStyle/>
+          <a:p>
+            <a:r>
+              <a:rPr sz="1350" b="1" i="0">
+                <a:solidFill>
+                  <a:srgbClr val="15192B"/>
+                </a:solidFill>
+                <a:latin typeface="Segoe UI"/>
+              </a:rPr>
+              <a:t>Creator relationships are a one-shot resource.</a:t>
+            </a:r>
+            <a:r>
+              <a:rPr sz="1350" b="0" i="0">
+                <a:solidFill>
+                  <a:srgbClr val="5A6072"/>
+                </a:solidFill>
+                <a:latin typeface="Segoe UI"/>
+              </a:rPr>
+              <a:t> In a small community, a creator who sends their audience to something that disappoints will not promote again — and the other creators talk. This is the practical reason conversion work precedes outreach.</a:t>
+            </a:r>
+          </a:p>
+        </p:txBody>
+      </p:sp>
+      <p:sp>
+        <p:nvSpPr>
+          <p:cNvPr id="7" name="TextBox 6"/>
+          <p:cNvSpPr txBox="1"/>
+          <p:nvPr/>
+        </p:nvSpPr>
+        <p:spPr>
+          <a:xfrm>
+            <a:off x="566928" y="3310128"/>
+            <a:ext cx="11057839" cy="814959"/>
+          </a:xfrm>
+          <a:prstGeom prst="rect">
+            <a:avLst/>
+          </a:prstGeom>
+          <a:noFill/>
+        </p:spPr>
+        <p:txBody>
+          <a:bodyPr wrap="square" lIns="0" rIns="0" tIns="0" bIns="0">
+            <a:spAutoFit/>
+          </a:bodyPr>
+          <a:lstStyle/>
+          <a:p>
+            <a:r>
+              <a:rPr sz="1350" b="1" i="0">
+                <a:solidFill>
+                  <a:srgbClr val="15192B"/>
+                </a:solidFill>
+                <a:latin typeface="Segoe UI"/>
+              </a:rPr>
+              <a:t>Metrics to report, and to avoid.</a:t>
+            </a:r>
+            <a:r>
+              <a:rPr sz="1350" b="0" i="0">
+                <a:solidFill>
+                  <a:srgbClr val="5A6072"/>
+                </a:solidFill>
+                <a:latin typeface="Segoe UI"/>
+              </a:rPr>
+              <a:t> Raw visits will be discounted, and rightly. Report diagnostic completions, accounts created, courses started and finished, returning users, and co-op conversations in progress. Ten families who finished a unit beats ten thousand visitors, and an angel will say so.</a:t>
+            </a:r>
+          </a:p>
+        </p:txBody>
+      </p:sp>
+    </p:spTree>
+  </p:cSld>
+  <p:clrMapOvr>
+    <a:masterClrMapping/>
+  </p:clrMapOvr>
+</p:sld>
+</file>
+
 <file path=ppt/slides/slide4.xml><?xml version="1.0" encoding="utf-8"?>
 <p:sld xmlns:a="http://schemas.openxmlformats.org/drawingml/2006/main" xmlns:p="http://schemas.openxmlformats.org/presentationml/2006/main" xmlns:r="http://schemas.openxmlformats.org/officeDocument/2006/relationships">
   <p:cSld>
@@ -20796,7 +22496,7 @@
                 </a:solidFill>
                 <a:latin typeface="Segoe UI"/>
               </a:rPr>
-              <a:t>SLIDE 2   </a:t>
+              <a:t>SLIDE 4   </a:t>
             </a:r>
             <a:r>
               <a:rPr sz="2500" b="1">
@@ -21432,7 +23132,7 @@
                 </a:solidFill>
                 <a:latin typeface="Segoe UI"/>
               </a:rPr>
-              <a:t>SLIDE 3   </a:t>
+              <a:t>SLIDE 5   </a:t>
             </a:r>
             <a:r>
               <a:rPr sz="2500" b="1">
@@ -21735,7 +23435,7 @@
                 </a:solidFill>
                 <a:latin typeface="Segoe UI"/>
               </a:rPr>
-              <a:t>SLIDE 4   </a:t>
+              <a:t>SLIDE 6   </a:t>
             </a:r>
             <a:r>
               <a:rPr sz="2500" b="1">
@@ -22244,7 +23944,7 @@
                 </a:solidFill>
                 <a:latin typeface="Segoe UI"/>
               </a:rPr>
-              <a:t>SLIDE 5   </a:t>
+              <a:t>SLIDE 7   </a:t>
             </a:r>
             <a:r>
               <a:rPr sz="2500" b="1">
@@ -22253,7 +23953,7 @@
                 </a:solidFill>
                 <a:latin typeface="Segoe UI"/>
               </a:rPr>
-              <a:t>Product</a:t>
+              <a:t>Watch It Build a Course</a:t>
             </a:r>
           </a:p>
         </p:txBody>
@@ -22311,7 +24011,7 @@
         <p:spPr>
           <a:xfrm>
             <a:off x="566928" y="1133856"/>
-            <a:ext cx="11057839" cy="376428"/>
+            <a:ext cx="11057839" cy="661416"/>
           </a:xfrm>
           <a:prstGeom prst="rect">
             <a:avLst/>
@@ -22327,24 +24027,96 @@
             <a:r>
               <a:rPr sz="1700" b="1" i="0">
                 <a:solidFill>
-                  <a:srgbClr val="C2410C"/>
-                </a:solidFill>
-                <a:latin typeface="Segoe UI"/>
-              </a:rPr>
-              <a:t>⚠️ TODO — it already works. Show it.</a:t>
-            </a:r>
-          </a:p>
-        </p:txBody>
-      </p:sp>
-      <p:sp>
-        <p:nvSpPr>
-          <p:cNvPr id="5" name="Oval 4"/>
+                  <a:srgbClr val="15192B"/>
+                </a:solidFill>
+                <a:latin typeface="Segoe UI"/>
+              </a:rPr>
+              <a:t>Here is Qlaudia building a complete course on raising an angel round — the one subject in the world you can grade on sight.</a:t>
+            </a:r>
+          </a:p>
+        </p:txBody>
+      </p:sp>
+      <p:sp>
+        <p:nvSpPr>
+          <p:cNvPr id="5" name="Rounded Rectangle 4"/>
           <p:cNvSpPr/>
           <p:nvPr/>
         </p:nvSpPr>
         <p:spPr>
           <a:xfrm>
-            <a:off x="585216" y="1790318"/>
+            <a:off x="566928" y="1996440"/>
+            <a:ext cx="11057839" cy="1234440"/>
+          </a:xfrm>
+          <a:prstGeom prst="roundRect">
+            <a:avLst/>
+          </a:prstGeom>
+          <a:solidFill>
+            <a:srgbClr val="F4F5F9"/>
+          </a:solidFill>
+          <a:ln w="15875">
+            <a:solidFill>
+              <a:srgbClr val="4A3AFF"/>
+            </a:solidFill>
+            <a:prstDash val="dash"/>
+          </a:ln>
+          <a:effectLst/>
+        </p:spPr>
+        <p:style>
+          <a:lnRef idx="1">
+            <a:schemeClr val="accent1"/>
+          </a:lnRef>
+          <a:fillRef idx="3">
+            <a:schemeClr val="accent1"/>
+          </a:fillRef>
+          <a:effectRef idx="2">
+            <a:schemeClr val="accent1"/>
+          </a:effectRef>
+          <a:fontRef idx="minor">
+            <a:schemeClr val="lt1"/>
+          </a:fontRef>
+        </p:style>
+        <p:txBody>
+          <a:bodyPr rtlCol="0" anchor="ctr" wrap="square" lIns="228600" rIns="228600"/>
+          <a:lstStyle/>
+          <a:p>
+            <a:pPr algn="ctr"/>
+            <a:r>
+              <a:rPr sz="950" b="1">
+                <a:solidFill>
+                  <a:srgbClr val="4A3AFF"/>
+                </a:solidFill>
+                <a:latin typeface="Segoe UI"/>
+              </a:rPr>
+              <a:t>VIDEO PLACEHOLDER</a:t>
+            </a:r>
+          </a:p>
+          <a:p>
+            <a:pPr algn="ctr">
+              <a:spcBef>
+                <a:spcPts val="400"/>
+              </a:spcBef>
+            </a:pPr>
+            <a:r>
+              <a:rPr sz="1200" b="0" i="0">
+                <a:solidFill>
+                  <a:srgbClr val="5A6072"/>
+                </a:solidFill>
+                <a:latin typeface="Segoe UI"/>
+              </a:rPr>
+              <a:t>recorded end-to-end run, time-lapsed to ~90 seconds</a:t>
+            </a:r>
+          </a:p>
+        </p:txBody>
+      </p:sp>
+      <p:sp>
+        <p:nvSpPr>
+          <p:cNvPr id="6" name="Oval 5"/>
+          <p:cNvSpPr/>
+          <p:nvPr/>
+        </p:nvSpPr>
+        <p:spPr>
+          <a:xfrm>
+            <a:off x="585216" y="3492627"/>
             <a:ext cx="65836" cy="65836"/>
           </a:xfrm>
           <a:prstGeom prst="ellipse">
@@ -22382,13 +24154,13 @@
       </p:sp>
       <p:sp>
         <p:nvSpPr>
-          <p:cNvPr id="6" name="TextBox 5"/>
+          <p:cNvPr id="7" name="TextBox 6"/>
           <p:cNvSpPr txBox="1"/>
           <p:nvPr/>
         </p:nvSpPr>
         <p:spPr>
           <a:xfrm>
-            <a:off x="804672" y="1711452"/>
+            <a:off x="804672" y="3413760"/>
             <a:ext cx="10820095" cy="323469"/>
           </a:xfrm>
           <a:prstGeom prst="rect">
@@ -22403,26 +24175,35 @@
           <a:lstStyle/>
           <a:p>
             <a:r>
+              <a:rPr sz="1350" b="1" i="0">
+                <a:solidFill>
+                  <a:srgbClr val="15192B"/>
+                </a:solidFill>
+                <a:latin typeface="Segoe UI"/>
+              </a:rPr>
+              <a:t>The ask</a:t>
+            </a:r>
+            <a:r>
               <a:rPr sz="1350" b="0" i="0">
                 <a:solidFill>
                   <a:srgbClr val="5A6072"/>
                 </a:solidFill>
                 <a:latin typeface="Segoe UI"/>
               </a:rPr>
-              <a:t>Create a domain live — the pipeline streams its progress on screen</a:t>
-            </a:r>
-          </a:p>
-        </p:txBody>
-      </p:sp>
-      <p:sp>
-        <p:nvSpPr>
-          <p:cNvPr id="7" name="Oval 6"/>
+              <a:t> — a plain-language description of the course you want. That is the entire input</a:t>
+            </a:r>
+          </a:p>
+        </p:txBody>
+      </p:sp>
+      <p:sp>
+        <p:nvSpPr>
+          <p:cNvPr id="8" name="Oval 7"/>
           <p:cNvSpPr/>
           <p:nvPr/>
         </p:nvSpPr>
         <p:spPr>
           <a:xfrm>
-            <a:off x="585216" y="2113788"/>
+            <a:off x="585216" y="3816095"/>
             <a:ext cx="65836" cy="65836"/>
           </a:xfrm>
           <a:prstGeom prst="ellipse">
@@ -22460,14 +24241,14 @@
       </p:sp>
       <p:sp>
         <p:nvSpPr>
-          <p:cNvPr id="8" name="TextBox 7"/>
+          <p:cNvPr id="9" name="TextBox 8"/>
           <p:cNvSpPr txBox="1"/>
           <p:nvPr/>
         </p:nvSpPr>
         <p:spPr>
           <a:xfrm>
-            <a:off x="804672" y="2034921"/>
-            <a:ext cx="10820095" cy="323469"/>
+            <a:off x="804672" y="3737229"/>
+            <a:ext cx="10820095" cy="546354"/>
           </a:xfrm>
           <a:prstGeom prst="rect">
             <a:avLst/>
@@ -22481,26 +24262,35 @@
           <a:lstStyle/>
           <a:p>
             <a:r>
+              <a:rPr sz="1350" b="1" i="0">
+                <a:solidFill>
+                  <a:srgbClr val="15192B"/>
+                </a:solidFill>
+                <a:latin typeface="Segoe UI"/>
+              </a:rPr>
+              <a:t>The advisor</a:t>
+            </a:r>
+            <a:r>
               <a:rPr sz="1350" b="0" i="0">
                 <a:solidFill>
                   <a:srgbClr val="5A6072"/>
                 </a:solidFill>
                 <a:latin typeface="Segoe UI"/>
               </a:rPr>
-              <a:t>Browse the result: concept list, generated instruction, computed figures, assessments</a:t>
-            </a:r>
-          </a:p>
-        </p:txBody>
-      </p:sp>
-      <p:sp>
-        <p:nvSpPr>
-          <p:cNvPr id="9" name="Oval 8"/>
+              <a:t> — the model interrogates that description and turns it into a structured brief: audience, coverage, outcome, tone</a:t>
+            </a:r>
+          </a:p>
+        </p:txBody>
+      </p:sp>
+      <p:sp>
+        <p:nvSpPr>
+          <p:cNvPr id="10" name="Oval 9"/>
           <p:cNvSpPr/>
           <p:nvPr/>
         </p:nvSpPr>
         <p:spPr>
           <a:xfrm>
-            <a:off x="585216" y="2437257"/>
+            <a:off x="585216" y="4362450"/>
             <a:ext cx="65836" cy="65836"/>
           </a:xfrm>
           <a:prstGeom prst="ellipse">
@@ -22538,13 +24328,13 @@
       </p:sp>
       <p:sp>
         <p:nvSpPr>
-          <p:cNvPr id="10" name="TextBox 9"/>
+          <p:cNvPr id="11" name="TextBox 10"/>
           <p:cNvSpPr txBox="1"/>
           <p:nvPr/>
         </p:nvSpPr>
         <p:spPr>
           <a:xfrm>
-            <a:off x="804672" y="2358390"/>
+            <a:off x="804672" y="4283583"/>
             <a:ext cx="10820095" cy="323469"/>
           </a:xfrm>
           <a:prstGeom prst="rect">
@@ -22559,26 +24349,53 @@
           <a:lstStyle/>
           <a:p>
             <a:r>
+              <a:rPr sz="1350" b="1" i="0">
+                <a:solidFill>
+                  <a:srgbClr val="15192B"/>
+                </a:solidFill>
+                <a:latin typeface="Segoe UI"/>
+              </a:rPr>
+              <a:t>The syllabus</a:t>
+            </a:r>
+            <a:r>
               <a:rPr sz="1350" b="0" i="0">
                 <a:solidFill>
                   <a:srgbClr val="5A6072"/>
                 </a:solidFill>
                 <a:latin typeface="Segoe UI"/>
               </a:rPr>
-              <a:t>Knowledge graph visualization</a:t>
-            </a:r>
-          </a:p>
-        </p:txBody>
-      </p:sp>
-      <p:sp>
-        <p:nvSpPr>
-          <p:cNvPr id="11" name="Oval 10"/>
+              <a:t> — proposed concepts, reviewed and edited by the author </a:t>
+            </a:r>
+            <a:r>
+              <a:rPr sz="1350" b="0" i="1">
+                <a:solidFill>
+                  <a:srgbClr val="5A6072"/>
+                </a:solidFill>
+                <a:latin typeface="Segoe UI"/>
+              </a:rPr>
+              <a:t>before</a:t>
+            </a:r>
+            <a:r>
+              <a:rPr sz="1350" b="0" i="0">
+                <a:solidFill>
+                  <a:srgbClr val="5A6072"/>
+                </a:solidFill>
+                <a:latin typeface="Segoe UI"/>
+              </a:rPr>
+              <a:t> a word is written</a:t>
+            </a:r>
+          </a:p>
+        </p:txBody>
+      </p:sp>
+      <p:sp>
+        <p:nvSpPr>
+          <p:cNvPr id="12" name="Oval 11"/>
           <p:cNvSpPr/>
           <p:nvPr/>
         </p:nvSpPr>
         <p:spPr>
           <a:xfrm>
-            <a:off x="585216" y="2760726"/>
+            <a:off x="585216" y="4685919"/>
             <a:ext cx="65836" cy="65836"/>
           </a:xfrm>
           <a:prstGeom prst="ellipse">
@@ -22616,13 +24433,13 @@
       </p:sp>
       <p:sp>
         <p:nvSpPr>
-          <p:cNvPr id="12" name="TextBox 11"/>
+          <p:cNvPr id="13" name="TextBox 12"/>
           <p:cNvSpPr txBox="1"/>
           <p:nvPr/>
         </p:nvSpPr>
         <p:spPr>
           <a:xfrm>
-            <a:off x="804672" y="2681858"/>
+            <a:off x="804672" y="4607052"/>
             <a:ext cx="10820095" cy="323469"/>
           </a:xfrm>
           <a:prstGeom prst="rect">
@@ -22637,13 +24454,143 @@
           <a:lstStyle/>
           <a:p>
             <a:r>
+              <a:rPr sz="1350" b="1" i="0">
+                <a:solidFill>
+                  <a:srgbClr val="15192B"/>
+                </a:solidFill>
+                <a:latin typeface="Segoe UI"/>
+              </a:rPr>
+              <a:t>The pipeline</a:t>
+            </a:r>
+            <a:r>
               <a:rPr sz="1350" b="0" i="0">
                 <a:solidFill>
                   <a:srgbClr val="5A6072"/>
                 </a:solidFill>
                 <a:latin typeface="Segoe UI"/>
               </a:rPr>
-              <a:t>Progress and mastery tracking</a:t>
+              <a:t> — instruction, computed figures, assessments, typed relationships, prerequisite graph</a:t>
+            </a:r>
+          </a:p>
+        </p:txBody>
+      </p:sp>
+      <p:sp>
+        <p:nvSpPr>
+          <p:cNvPr id="14" name="Oval 13"/>
+          <p:cNvSpPr/>
+          <p:nvPr/>
+        </p:nvSpPr>
+        <p:spPr>
+          <a:xfrm>
+            <a:off x="585216" y="5009387"/>
+            <a:ext cx="65836" cy="65836"/>
+          </a:xfrm>
+          <a:prstGeom prst="ellipse">
+            <a:avLst/>
+          </a:prstGeom>
+          <a:solidFill>
+            <a:srgbClr val="4A3AFF"/>
+          </a:solidFill>
+          <a:ln>
+            <a:noFill/>
+          </a:ln>
+          <a:effectLst/>
+        </p:spPr>
+        <p:style>
+          <a:lnRef idx="1">
+            <a:schemeClr val="accent1"/>
+          </a:lnRef>
+          <a:fillRef idx="3">
+            <a:schemeClr val="accent1"/>
+          </a:fillRef>
+          <a:effectRef idx="2">
+            <a:schemeClr val="accent1"/>
+          </a:effectRef>
+          <a:fontRef idx="minor">
+            <a:schemeClr val="lt1"/>
+          </a:fontRef>
+        </p:style>
+        <p:txBody>
+          <a:bodyPr rtlCol="0" anchor="ctr"/>
+          <a:lstStyle/>
+          <a:p>
+            <a:pPr algn="ctr"/>
+          </a:p>
+        </p:txBody>
+      </p:sp>
+      <p:sp>
+        <p:nvSpPr>
+          <p:cNvPr id="15" name="TextBox 14"/>
+          <p:cNvSpPr txBox="1"/>
+          <p:nvPr/>
+        </p:nvSpPr>
+        <p:spPr>
+          <a:xfrm>
+            <a:off x="804672" y="4930521"/>
+            <a:ext cx="10820095" cy="323469"/>
+          </a:xfrm>
+          <a:prstGeom prst="rect">
+            <a:avLst/>
+          </a:prstGeom>
+          <a:noFill/>
+        </p:spPr>
+        <p:txBody>
+          <a:bodyPr wrap="square" lIns="0" rIns="0" tIns="0" bIns="0">
+            <a:spAutoFit/>
+          </a:bodyPr>
+          <a:lstStyle/>
+          <a:p>
+            <a:r>
+              <a:rPr sz="1350" b="1" i="0">
+                <a:solidFill>
+                  <a:srgbClr val="15192B"/>
+                </a:solidFill>
+                <a:latin typeface="Segoe UI"/>
+              </a:rPr>
+              <a:t>The finished course</a:t>
+            </a:r>
+            <a:r>
+              <a:rPr sz="1350" b="0" i="0">
+                <a:solidFill>
+                  <a:srgbClr val="5A6072"/>
+                </a:solidFill>
+                <a:latin typeface="Segoe UI"/>
+              </a:rPr>
+              <a:t> — and the prerequisite graph showing what must be understood before what</a:t>
+            </a:r>
+          </a:p>
+        </p:txBody>
+      </p:sp>
+      <p:sp>
+        <p:nvSpPr>
+          <p:cNvPr id="16" name="TextBox 15"/>
+          <p:cNvSpPr txBox="1"/>
+          <p:nvPr/>
+        </p:nvSpPr>
+        <p:spPr>
+          <a:xfrm>
+            <a:off x="566928" y="5253989"/>
+            <a:ext cx="11057839" cy="369189"/>
+          </a:xfrm>
+          <a:prstGeom prst="rect">
+            <a:avLst/>
+          </a:prstGeom>
+          <a:noFill/>
+        </p:spPr>
+        <p:txBody>
+          <a:bodyPr wrap="square" lIns="0" rIns="0" tIns="0" bIns="0">
+            <a:spAutoFit/>
+          </a:bodyPr>
+          <a:lstStyle/>
+          <a:p>
+            <a:r>
+              <a:rPr sz="1350" b="1" i="0">
+                <a:solidFill>
+                  <a:srgbClr val="15192B"/>
+                </a:solidFill>
+                <a:latin typeface="Segoe UI"/>
+              </a:rPr>
+              <a:t>A paragraph in. A complete course out, in about 18 minutes, unattended.</a:t>
             </a:r>
           </a:p>
         </p:txBody>
@@ -22703,7 +24650,7 @@
                 </a:solidFill>
                 <a:latin typeface="Segoe UI"/>
               </a:rPr>
-              <a:t>SLIDE 6   </a:t>
+              <a:t>SLIDE 8   </a:t>
             </a:r>
             <a:r>
               <a:rPr sz="2500" b="1">
@@ -23363,7 +25310,7 @@
                 </a:solidFill>
                 <a:latin typeface="Segoe UI"/>
               </a:rPr>
-              <a:t>SLIDE 7   </a:t>
+              <a:t>SLIDE 9   </a:t>
             </a:r>
             <a:r>
               <a:rPr sz="2500" b="1">

--- a/pitch_deck/qlaudia_pitch_deck.pptx
+++ b/pitch_deck/qlaudia_pitch_deck.pptx
@@ -1012,7 +1012,13 @@
           <a:p>
             <a:r>
               <a:rPr sz="1100"/>
-              <a:t>⚠️ TODO: the numbers. Bucket sizes, months of runway, and the milestone — these drive the raise size on the Ask slide, so settle them first.</a:t>
+              <a:t>The total on this slide must equal the raise on slide 14. That is the whole reason the three buckets are stated in dollars rather than two in dollars and one in months — an angel should be able to add them up in their head and land on your ask. If the numbers don't reconcile, the obvious question is where the remainder goes, and it implies the round size was chosen before the plan. Decide what the work costs, sum it, and let that be the ask — never the reverse.</a:t>
+            </a:r>
+          </a:p>
+          <a:p>
+            <a:r>
+              <a:rPr sz="1100"/>
+              <a:t>⚠️ TODO: the numbers. Three bucket amounts, the total, and the months of runway that total represents — the total drops straight into slide 14, so settle this slide first.</a:t>
             </a:r>
           </a:p>
         </p:txBody>
@@ -1095,7 +1101,67 @@
           <a:p>
             <a:r>
               <a:rPr sz="1100"/>
-              <a:t>⚠️ TODO: Charles — a standard post-money SAFE is the lowest-friction instrument for a round of this shape, but the cap is a real decision. Worth a conversation before the first meeting, since it's hard to revise downward once quoted.</a:t>
+              <a:t>What each term means — you will be asked, and hesitating here reads badly.</a:t>
+            </a:r>
+          </a:p>
+          <a:p>
+            <a:r>
+              <a:rPr sz="1100"/>
+              <a:t>- SAFE — Simple Agreement for Future Equity. The investor pays now and receives shares later, when a priced round happens. Not a loan: no interest, no maturity date, nothing that can be called. It lets you take money without agreeing a valuation today. Y Combinator publishes the standard document free; using it unmodified keeps legal costs near zero and means no angel needs a lawyer to read novel language.</a:t>
+            </a:r>
+          </a:p>
+          <a:p>
+            <a:r>
+              <a:rPr sz="1100"/>
+              <a:t>- Valuation cap — the highest company valuation their money will convert at. They get the cap price or the actual round price, whichever is better for them. If you later raise at $12M and their cap was $4M, their money buys shares as though the company were worth $4M — roughly three times what a new investor gets for the same cheque. That advantage is their compensation for going first.</a:t>
+            </a:r>
+          </a:p>
+          <a:p>
+            <a:r>
+              <a:rPr sz="1100"/>
+              <a:t>- Post-money — means ownership is calculable immediately: cheque ÷ cap. $50k at a $4M cap is 1.25%, full stop. Be clear-eyed that with post-money SAFEs each additional SAFE dilutes you, not the earlier holders.</a:t>
+            </a:r>
+          </a:p>
+          <a:p>
+            <a:r>
+              <a:rPr sz="1100"/>
+              <a:t>- Minimum cheque — the smallest allocation you will accept. It also does quiet qualification work: it tells a $10k angel they are looking at a syndicate rather than a direct allocation, without an awkward conversation.</a:t>
+            </a:r>
+          </a:p>
+          <a:p>
+            <a:r>
+              <a:rPr sz="1100"/>
+              <a:t>- Committed to date — money already in or verbally committed, founder capital included. Angels move in herds; a round that is partly filled is materially easier to fill.</a:t>
+            </a:r>
+          </a:p>
+          <a:p>
+            <a:r>
+              <a:rPr sz="1100"/>
+              <a:t>- Pro-rata — the right, not the obligation, to invest again in the next round to keep their percentage. Angels value this highly, because their returns depend on concentrating into the few winners. It costs you nothing today but consumes allocation later, which is why the usual compromise is to grant it only above a minimum cheque size.</a:t>
+            </a:r>
+          </a:p>
+          <a:p>
+            <a:r>
+              <a:rPr sz="1100"/>
+              <a:t>Do the ownership arithmetic for them, on the slide. A sophisticated angel will work out that a $50k cheque at a $4M cap is 1.25%; many will not bother, and some will get it wrong. Stating it signals you have thought about their side of the table.</a:t>
+            </a:r>
+          </a:p>
+          <a:p>
+            <a:r>
+              <a:rPr sz="1100"/>
+              <a:t>Keep term-sheet detail off the slide. Discount rates, MFN clauses and conversion mechanics belong in the SAFE document. Putting them here makes the round look like a negotiation rather than an invitation.</a:t>
+            </a:r>
+          </a:p>
+          <a:p>
+            <a:r>
+              <a:rPr sz="1100"/>
+              <a:t>⚠️ TODO: Charles — a standard post-money SAFE is the lowest-friction instrument for a round of this shape, but the cap is a real decision. Worth a conversation before the first meeting, since it is hard to revise downward once quoted.</a:t>
+            </a:r>
+          </a:p>
+          <a:p>
+            <a:r>
+              <a:rPr sz="1100"/>
+              <a:t>⚠️ TODO: decide whether pro-rata is offered, and above what cheque size. Under the post-money SAFE it is not automatic — it requires a separate side letter, so offering it is a deliberate act.</a:t>
             </a:r>
           </a:p>
         </p:txBody>
@@ -7992,7 +8058,7 @@
                 </a:solidFill>
                 <a:latin typeface="Segoe UI"/>
               </a:rPr>
-              <a:t>1 · Distribution</a:t>
+              <a:t>1 · Distribution — $⚠️ TODO</a:t>
             </a:r>
             <a:r>
               <a:rPr sz="1350" b="0" i="0">
@@ -8001,7 +8067,7 @@
                 </a:solidFill>
                 <a:latin typeface="Segoe UI"/>
               </a:rPr>
-              <a:t> — creator partnerships on revenue share, co-op and association relationships, and the conversion work the funnel needs. ⚠️ TODO: $</a:t>
+              <a:t> Creator partnerships on revenue share, co-op and association relationships, and the conversion work the funnel needs.</a:t>
             </a:r>
           </a:p>
         </p:txBody>
@@ -8035,7 +8101,7 @@
                 </a:solidFill>
                 <a:latin typeface="Segoe UI"/>
               </a:rPr>
-              <a:t>2 · Hardening</a:t>
+              <a:t>2 · Hardening — $⚠️ TODO</a:t>
             </a:r>
             <a:r>
               <a:rPr sz="1350" b="0" i="0">
@@ -8044,7 +8110,7 @@
                 </a:solidFill>
                 <a:latin typeface="Segoe UI"/>
               </a:rPr>
-              <a:t> — everything currently runs on free tiers. Managed Neo4j with backups, an always-on backend (no cold starts on an 18-minute pipeline), observability, and hard rate limits on course generation. ⚠️ TODO: $</a:t>
+              <a:t> Everything currently runs on free tiers. Managed Neo4j with backups, an always-on backend (no cold starts on an 18-minute pipeline), observability, and hard rate limits on course generation.</a:t>
             </a:r>
           </a:p>
         </p:txBody>
@@ -8058,7 +8124,7 @@
         <p:spPr>
           <a:xfrm>
             <a:off x="566928" y="3180588"/>
-            <a:ext cx="11057839" cy="369189"/>
+            <a:ext cx="11057839" cy="592074"/>
           </a:xfrm>
           <a:prstGeom prst="rect">
             <a:avLst/>
@@ -8078,7 +8144,7 @@
                 </a:solidFill>
                 <a:latin typeface="Segoe UI"/>
               </a:rPr>
-              <a:t>3 · Runway</a:t>
+              <a:t>3 · Operating runway — $⚠️ TODO</a:t>
             </a:r>
             <a:r>
               <a:rPr sz="1350" b="0" i="0">
@@ -8087,25 +8153,7 @@
                 </a:solidFill>
                 <a:latin typeface="Segoe UI"/>
               </a:rPr>
-              <a:t> — to the </a:t>
-            </a:r>
-            <a:r>
-              <a:rPr sz="1350" b="1" i="0">
-                <a:solidFill>
-                  <a:srgbClr val="C2410C"/>
-                </a:solidFill>
-                <a:latin typeface="Segoe UI"/>
-              </a:rPr>
-              <a:t>spring 2027 homeschool buying cycle</a:t>
-            </a:r>
-            <a:r>
-              <a:rPr sz="1350" b="0" i="0">
-                <a:solidFill>
-                  <a:srgbClr val="C2410C"/>
-                </a:solidFill>
-                <a:latin typeface="Segoe UI"/>
-              </a:rPr>
-              <a:t>, when curriculum is actually purchased. ⚠️ TODO: months</a:t>
+              <a:t> Founder compensation, baseline hosting, and tooling through the build-up period.</a:t>
             </a:r>
           </a:p>
         </p:txBody>
@@ -8118,8 +8166,8 @@
         </p:nvSpPr>
         <p:spPr>
           <a:xfrm>
-            <a:off x="566928" y="3577209"/>
-            <a:ext cx="50292" cy="484124"/>
+            <a:off x="566928" y="3800094"/>
+            <a:ext cx="50292" cy="269494"/>
           </a:xfrm>
           <a:prstGeom prst="rect">
             <a:avLst/>
@@ -8162,8 +8210,8 @@
         </p:nvSpPr>
         <p:spPr>
           <a:xfrm>
-            <a:off x="877824" y="3549777"/>
-            <a:ext cx="10746943" cy="575564"/>
+            <a:off x="877824" y="3772662"/>
+            <a:ext cx="10746943" cy="360934"/>
           </a:xfrm>
           <a:prstGeom prst="rect">
             <a:avLst/>
@@ -8183,7 +8231,85 @@
                 </a:solidFill>
                 <a:latin typeface="Segoe UI"/>
               </a:rPr>
-              <a:t>The milestone this round buys:</a:t>
+              <a:t>Total: $⚠️ TODO — ⚠️ N months, carrying us through the spring 2027 buying cycle.</a:t>
+            </a:r>
+          </a:p>
+        </p:txBody>
+      </p:sp>
+      <p:sp>
+        <p:nvSpPr>
+          <p:cNvPr id="10" name="Rectangle 9"/>
+          <p:cNvSpPr/>
+          <p:nvPr/>
+        </p:nvSpPr>
+        <p:spPr>
+          <a:xfrm>
+            <a:off x="566928" y="4161028"/>
+            <a:ext cx="50292" cy="484124"/>
+          </a:xfrm>
+          <a:prstGeom prst="rect">
+            <a:avLst/>
+          </a:prstGeom>
+          <a:solidFill>
+            <a:srgbClr val="4A3AFF"/>
+          </a:solidFill>
+          <a:ln>
+            <a:noFill/>
+          </a:ln>
+          <a:effectLst/>
+        </p:spPr>
+        <p:style>
+          <a:lnRef idx="1">
+            <a:schemeClr val="accent1"/>
+          </a:lnRef>
+          <a:fillRef idx="3">
+            <a:schemeClr val="accent1"/>
+          </a:fillRef>
+          <a:effectRef idx="2">
+            <a:schemeClr val="accent1"/>
+          </a:effectRef>
+          <a:fontRef idx="minor">
+            <a:schemeClr val="lt1"/>
+          </a:fontRef>
+        </p:style>
+        <p:txBody>
+          <a:bodyPr rtlCol="0" anchor="ctr"/>
+          <a:lstStyle/>
+          <a:p>
+            <a:pPr algn="ctr"/>
+          </a:p>
+        </p:txBody>
+      </p:sp>
+      <p:sp>
+        <p:nvSpPr>
+          <p:cNvPr id="11" name="TextBox 10"/>
+          <p:cNvSpPr txBox="1"/>
+          <p:nvPr/>
+        </p:nvSpPr>
+        <p:spPr>
+          <a:xfrm>
+            <a:off x="877824" y="4133596"/>
+            <a:ext cx="10746943" cy="575564"/>
+          </a:xfrm>
+          <a:prstGeom prst="rect">
+            <a:avLst/>
+          </a:prstGeom>
+          <a:noFill/>
+        </p:spPr>
+        <p:txBody>
+          <a:bodyPr wrap="square" lIns="0" rIns="0" tIns="0" bIns="0">
+            <a:spAutoFit/>
+          </a:bodyPr>
+          <a:lstStyle/>
+          <a:p>
+            <a:r>
+              <a:rPr sz="1300" b="1" i="1">
+                <a:solidFill>
+                  <a:srgbClr val="C2410C"/>
+                </a:solidFill>
+                <a:latin typeface="Segoe UI"/>
+              </a:rPr>
+              <a:t>What that buys:</a:t>
             </a:r>
             <a:r>
               <a:rPr sz="1300" b="0" i="1">
@@ -8355,13 +8481,47 @@
       </p:sp>
       <p:sp>
         <p:nvSpPr>
-          <p:cNvPr id="5" name="Oval 4"/>
+          <p:cNvPr id="5" name="TextBox 4"/>
+          <p:cNvSpPr txBox="1"/>
+          <p:nvPr/>
+        </p:nvSpPr>
+        <p:spPr>
+          <a:xfrm>
+            <a:off x="566928" y="1711452"/>
+            <a:ext cx="11057839" cy="365760"/>
+          </a:xfrm>
+          <a:prstGeom prst="rect">
+            <a:avLst/>
+          </a:prstGeom>
+          <a:noFill/>
+        </p:spPr>
+        <p:txBody>
+          <a:bodyPr wrap="square" lIns="0" rIns="0" tIns="0" bIns="0">
+            <a:spAutoFit/>
+          </a:bodyPr>
+          <a:lstStyle/>
+          <a:p>
+            <a:r>
+              <a:rPr sz="1040" b="1">
+                <a:solidFill>
+                  <a:srgbClr val="4A3AFF"/>
+                </a:solidFill>
+                <a:latin typeface="Segoe UI"/>
+              </a:rPr>
+              <a:t>THE TERMS</a:t>
+            </a:r>
+          </a:p>
+        </p:txBody>
+      </p:sp>
+      <p:sp>
+        <p:nvSpPr>
+          <p:cNvPr id="6" name="Oval 5"/>
           <p:cNvSpPr/>
           <p:nvPr/>
         </p:nvSpPr>
         <p:spPr>
           <a:xfrm>
-            <a:off x="585216" y="1790318"/>
+            <a:off x="585216" y="2156079"/>
             <a:ext cx="65836" cy="65836"/>
           </a:xfrm>
           <a:prstGeom prst="ellipse">
@@ -8399,13 +8559,13 @@
       </p:sp>
       <p:sp>
         <p:nvSpPr>
-          <p:cNvPr id="6" name="TextBox 5"/>
+          <p:cNvPr id="7" name="TextBox 6"/>
           <p:cNvSpPr txBox="1"/>
           <p:nvPr/>
         </p:nvSpPr>
         <p:spPr>
           <a:xfrm>
-            <a:off x="804672" y="1711452"/>
+            <a:off x="804672" y="2077211"/>
             <a:ext cx="10820095" cy="323469"/>
           </a:xfrm>
           <a:prstGeom prst="rect">
@@ -8435,20 +8595,20 @@
                 </a:solidFill>
                 <a:latin typeface="Segoe UI"/>
               </a:rPr>
-              <a:t> ⚠️ TODO amount</a:t>
-            </a:r>
-          </a:p>
-        </p:txBody>
-      </p:sp>
-      <p:sp>
-        <p:nvSpPr>
-          <p:cNvPr id="7" name="Oval 6"/>
+              <a:t> $⚠️ TODO — matches the total on Slide 13</a:t>
+            </a:r>
+          </a:p>
+        </p:txBody>
+      </p:sp>
+      <p:sp>
+        <p:nvSpPr>
+          <p:cNvPr id="8" name="Oval 7"/>
           <p:cNvSpPr/>
           <p:nvPr/>
         </p:nvSpPr>
         <p:spPr>
           <a:xfrm>
-            <a:off x="585216" y="2113788"/>
+            <a:off x="585216" y="2479548"/>
             <a:ext cx="65836" cy="65836"/>
           </a:xfrm>
           <a:prstGeom prst="ellipse">
@@ -8486,13 +8646,13 @@
       </p:sp>
       <p:sp>
         <p:nvSpPr>
-          <p:cNvPr id="8" name="TextBox 7"/>
+          <p:cNvPr id="9" name="TextBox 8"/>
           <p:cNvSpPr txBox="1"/>
           <p:nvPr/>
         </p:nvSpPr>
         <p:spPr>
           <a:xfrm>
-            <a:off x="804672" y="2034921"/>
+            <a:off x="804672" y="2400680"/>
             <a:ext cx="10820095" cy="323469"/>
           </a:xfrm>
           <a:prstGeom prst="rect">
@@ -8529,13 +8689,13 @@
       </p:sp>
       <p:sp>
         <p:nvSpPr>
-          <p:cNvPr id="9" name="Oval 8"/>
+          <p:cNvPr id="10" name="Oval 9"/>
           <p:cNvSpPr/>
           <p:nvPr/>
         </p:nvSpPr>
         <p:spPr>
           <a:xfrm>
-            <a:off x="585216" y="2437257"/>
+            <a:off x="585216" y="2803016"/>
             <a:ext cx="65836" cy="65836"/>
           </a:xfrm>
           <a:prstGeom prst="ellipse">
@@ -8573,13 +8733,13 @@
       </p:sp>
       <p:sp>
         <p:nvSpPr>
-          <p:cNvPr id="10" name="TextBox 9"/>
+          <p:cNvPr id="11" name="TextBox 10"/>
           <p:cNvSpPr txBox="1"/>
           <p:nvPr/>
         </p:nvSpPr>
         <p:spPr>
           <a:xfrm>
-            <a:off x="804672" y="2358390"/>
+            <a:off x="804672" y="2724149"/>
             <a:ext cx="10820095" cy="323469"/>
           </a:xfrm>
           <a:prstGeom prst="rect">
@@ -8609,20 +8769,20 @@
                 </a:solidFill>
                 <a:latin typeface="Segoe UI"/>
               </a:rPr>
-              <a:t> ⚠️ TODO</a:t>
-            </a:r>
-          </a:p>
-        </p:txBody>
-      </p:sp>
-      <p:sp>
-        <p:nvSpPr>
-          <p:cNvPr id="11" name="Oval 10"/>
+              <a:t> $⚠️ TODO</a:t>
+            </a:r>
+          </a:p>
+        </p:txBody>
+      </p:sp>
+      <p:sp>
+        <p:nvSpPr>
+          <p:cNvPr id="12" name="Oval 11"/>
           <p:cNvSpPr/>
           <p:nvPr/>
         </p:nvSpPr>
         <p:spPr>
           <a:xfrm>
-            <a:off x="585216" y="2760726"/>
+            <a:off x="585216" y="3126485"/>
             <a:ext cx="65836" cy="65836"/>
           </a:xfrm>
           <a:prstGeom prst="ellipse">
@@ -8660,13 +8820,13 @@
       </p:sp>
       <p:sp>
         <p:nvSpPr>
-          <p:cNvPr id="12" name="TextBox 11"/>
+          <p:cNvPr id="13" name="TextBox 12"/>
           <p:cNvSpPr txBox="1"/>
           <p:nvPr/>
         </p:nvSpPr>
         <p:spPr>
           <a:xfrm>
-            <a:off x="804672" y="2681858"/>
+            <a:off x="804672" y="3047618"/>
             <a:ext cx="10820095" cy="323469"/>
           </a:xfrm>
           <a:prstGeom prst="rect">
@@ -8696,20 +8856,20 @@
                 </a:solidFill>
                 <a:latin typeface="Segoe UI"/>
               </a:rPr>
-              <a:t> ⚠️ TODO</a:t>
-            </a:r>
-          </a:p>
-        </p:txBody>
-      </p:sp>
-      <p:sp>
-        <p:nvSpPr>
-          <p:cNvPr id="13" name="Oval 12"/>
+              <a:t> $⚠️ TODO</a:t>
+            </a:r>
+          </a:p>
+        </p:txBody>
+      </p:sp>
+      <p:sp>
+        <p:nvSpPr>
+          <p:cNvPr id="14" name="Oval 13"/>
           <p:cNvSpPr/>
           <p:nvPr/>
         </p:nvSpPr>
         <p:spPr>
           <a:xfrm>
-            <a:off x="585216" y="3084194"/>
+            <a:off x="585216" y="3449954"/>
             <a:ext cx="65836" cy="65836"/>
           </a:xfrm>
           <a:prstGeom prst="ellipse">
@@ -8747,13 +8907,13 @@
       </p:sp>
       <p:sp>
         <p:nvSpPr>
-          <p:cNvPr id="14" name="TextBox 13"/>
+          <p:cNvPr id="15" name="TextBox 14"/>
           <p:cNvSpPr txBox="1"/>
           <p:nvPr/>
         </p:nvSpPr>
         <p:spPr>
           <a:xfrm>
-            <a:off x="804672" y="3005327"/>
+            <a:off x="804672" y="3371087"/>
             <a:ext cx="10820095" cy="323469"/>
           </a:xfrm>
           <a:prstGeom prst="rect">
@@ -8783,20 +8943,20 @@
                 </a:solidFill>
                 <a:latin typeface="Segoe UI"/>
               </a:rPr>
-              <a:t> ⚠️ TODO — including any founder capital</a:t>
-            </a:r>
-          </a:p>
-        </p:txBody>
-      </p:sp>
-      <p:sp>
-        <p:nvSpPr>
-          <p:cNvPr id="15" name="Oval 14"/>
+              <a:t> $⚠️ TODO — including founder capital</a:t>
+            </a:r>
+          </a:p>
+        </p:txBody>
+      </p:sp>
+      <p:sp>
+        <p:nvSpPr>
+          <p:cNvPr id="16" name="Oval 15"/>
           <p:cNvSpPr/>
           <p:nvPr/>
         </p:nvSpPr>
         <p:spPr>
           <a:xfrm>
-            <a:off x="585216" y="3407663"/>
+            <a:off x="585216" y="3773423"/>
             <a:ext cx="65836" cy="65836"/>
           </a:xfrm>
           <a:prstGeom prst="ellipse">
@@ -8834,13 +8994,13 @@
       </p:sp>
       <p:sp>
         <p:nvSpPr>
-          <p:cNvPr id="16" name="TextBox 15"/>
+          <p:cNvPr id="17" name="TextBox 16"/>
           <p:cNvSpPr txBox="1"/>
           <p:nvPr/>
         </p:nvSpPr>
         <p:spPr>
           <a:xfrm>
-            <a:off x="804672" y="3328796"/>
+            <a:off x="804672" y="3694556"/>
             <a:ext cx="10820095" cy="323469"/>
           </a:xfrm>
           <a:prstGeom prst="rect">
@@ -8871,6 +9031,301 @@
                 <a:latin typeface="Segoe UI"/>
               </a:rPr>
               <a:t> ⚠️ TODO date</a:t>
+            </a:r>
+          </a:p>
+        </p:txBody>
+      </p:sp>
+      <p:sp>
+        <p:nvSpPr>
+          <p:cNvPr id="18" name="TextBox 17"/>
+          <p:cNvSpPr txBox="1"/>
+          <p:nvPr/>
+        </p:nvSpPr>
+        <p:spPr>
+          <a:xfrm>
+            <a:off x="566928" y="4018025"/>
+            <a:ext cx="11057839" cy="365760"/>
+          </a:xfrm>
+          <a:prstGeom prst="rect">
+            <a:avLst/>
+          </a:prstGeom>
+          <a:noFill/>
+        </p:spPr>
+        <p:txBody>
+          <a:bodyPr wrap="square" lIns="0" rIns="0" tIns="0" bIns="0">
+            <a:spAutoFit/>
+          </a:bodyPr>
+          <a:lstStyle/>
+          <a:p>
+            <a:r>
+              <a:rPr sz="1040" b="1">
+                <a:solidFill>
+                  <a:srgbClr val="4A3AFF"/>
+                </a:solidFill>
+                <a:latin typeface="Segoe UI"/>
+              </a:rPr>
+              <a:t>WHAT YOUR CHEQUE BUYS</a:t>
+            </a:r>
+          </a:p>
+        </p:txBody>
+      </p:sp>
+      <p:sp>
+        <p:nvSpPr>
+          <p:cNvPr id="19" name="Oval 18"/>
+          <p:cNvSpPr/>
+          <p:nvPr/>
+        </p:nvSpPr>
+        <p:spPr>
+          <a:xfrm>
+            <a:off x="585216" y="4462652"/>
+            <a:ext cx="65836" cy="65836"/>
+          </a:xfrm>
+          <a:prstGeom prst="ellipse">
+            <a:avLst/>
+          </a:prstGeom>
+          <a:solidFill>
+            <a:srgbClr val="4A3AFF"/>
+          </a:solidFill>
+          <a:ln>
+            <a:noFill/>
+          </a:ln>
+          <a:effectLst/>
+        </p:spPr>
+        <p:style>
+          <a:lnRef idx="1">
+            <a:schemeClr val="accent1"/>
+          </a:lnRef>
+          <a:fillRef idx="3">
+            <a:schemeClr val="accent1"/>
+          </a:fillRef>
+          <a:effectRef idx="2">
+            <a:schemeClr val="accent1"/>
+          </a:effectRef>
+          <a:fontRef idx="minor">
+            <a:schemeClr val="lt1"/>
+          </a:fontRef>
+        </p:style>
+        <p:txBody>
+          <a:bodyPr rtlCol="0" anchor="ctr"/>
+          <a:lstStyle/>
+          <a:p>
+            <a:pPr algn="ctr"/>
+          </a:p>
+        </p:txBody>
+      </p:sp>
+      <p:sp>
+        <p:nvSpPr>
+          <p:cNvPr id="20" name="TextBox 19"/>
+          <p:cNvSpPr txBox="1"/>
+          <p:nvPr/>
+        </p:nvSpPr>
+        <p:spPr>
+          <a:xfrm>
+            <a:off x="804672" y="4383785"/>
+            <a:ext cx="10820095" cy="323469"/>
+          </a:xfrm>
+          <a:prstGeom prst="rect">
+            <a:avLst/>
+          </a:prstGeom>
+          <a:noFill/>
+        </p:spPr>
+        <p:txBody>
+          <a:bodyPr wrap="square" lIns="0" rIns="0" tIns="0" bIns="0">
+            <a:spAutoFit/>
+          </a:bodyPr>
+          <a:lstStyle/>
+          <a:p>
+            <a:r>
+              <a:rPr sz="1350" b="1" i="0">
+                <a:solidFill>
+                  <a:srgbClr val="C2410C"/>
+                </a:solidFill>
+                <a:latin typeface="Segoe UI"/>
+              </a:rPr>
+              <a:t>Ownership</a:t>
+            </a:r>
+            <a:r>
+              <a:rPr sz="1350" b="0" i="0">
+                <a:solidFill>
+                  <a:srgbClr val="C2410C"/>
+                </a:solidFill>
+                <a:latin typeface="Segoe UI"/>
+              </a:rPr>
+              <a:t> — a $⚠️ TODO cheque at a $⚠️ TODO cap is roughly ⚠️ TODO% of the company</a:t>
+            </a:r>
+          </a:p>
+        </p:txBody>
+      </p:sp>
+      <p:sp>
+        <p:nvSpPr>
+          <p:cNvPr id="21" name="Oval 20"/>
+          <p:cNvSpPr/>
+          <p:nvPr/>
+        </p:nvSpPr>
+        <p:spPr>
+          <a:xfrm>
+            <a:off x="585216" y="4786121"/>
+            <a:ext cx="65836" cy="65836"/>
+          </a:xfrm>
+          <a:prstGeom prst="ellipse">
+            <a:avLst/>
+          </a:prstGeom>
+          <a:solidFill>
+            <a:srgbClr val="4A3AFF"/>
+          </a:solidFill>
+          <a:ln>
+            <a:noFill/>
+          </a:ln>
+          <a:effectLst/>
+        </p:spPr>
+        <p:style>
+          <a:lnRef idx="1">
+            <a:schemeClr val="accent1"/>
+          </a:lnRef>
+          <a:fillRef idx="3">
+            <a:schemeClr val="accent1"/>
+          </a:fillRef>
+          <a:effectRef idx="2">
+            <a:schemeClr val="accent1"/>
+          </a:effectRef>
+          <a:fontRef idx="minor">
+            <a:schemeClr val="lt1"/>
+          </a:fontRef>
+        </p:style>
+        <p:txBody>
+          <a:bodyPr rtlCol="0" anchor="ctr"/>
+          <a:lstStyle/>
+          <a:p>
+            <a:pPr algn="ctr"/>
+          </a:p>
+        </p:txBody>
+      </p:sp>
+      <p:sp>
+        <p:nvSpPr>
+          <p:cNvPr id="22" name="TextBox 21"/>
+          <p:cNvSpPr txBox="1"/>
+          <p:nvPr/>
+        </p:nvSpPr>
+        <p:spPr>
+          <a:xfrm>
+            <a:off x="804672" y="4707254"/>
+            <a:ext cx="10820095" cy="546354"/>
+          </a:xfrm>
+          <a:prstGeom prst="rect">
+            <a:avLst/>
+          </a:prstGeom>
+          <a:noFill/>
+        </p:spPr>
+        <p:txBody>
+          <a:bodyPr wrap="square" lIns="0" rIns="0" tIns="0" bIns="0">
+            <a:spAutoFit/>
+          </a:bodyPr>
+          <a:lstStyle/>
+          <a:p>
+            <a:r>
+              <a:rPr sz="1350" b="1" i="0">
+                <a:solidFill>
+                  <a:srgbClr val="C2410C"/>
+                </a:solidFill>
+                <a:latin typeface="Segoe UI"/>
+              </a:rPr>
+              <a:t>Pro-rata rights</a:t>
+            </a:r>
+            <a:r>
+              <a:rPr sz="1350" b="0" i="0">
+                <a:solidFill>
+                  <a:srgbClr val="C2410C"/>
+                </a:solidFill>
+                <a:latin typeface="Segoe UI"/>
+              </a:rPr>
+              <a:t> — the right to maintain your percentage in the next round ⚠️ TODO: confirm, and whether it applies above a minimum cheque</a:t>
+            </a:r>
+          </a:p>
+        </p:txBody>
+      </p:sp>
+      <p:sp>
+        <p:nvSpPr>
+          <p:cNvPr id="23" name="Oval 22"/>
+          <p:cNvSpPr/>
+          <p:nvPr/>
+        </p:nvSpPr>
+        <p:spPr>
+          <a:xfrm>
+            <a:off x="585216" y="5332475"/>
+            <a:ext cx="65836" cy="65836"/>
+          </a:xfrm>
+          <a:prstGeom prst="ellipse">
+            <a:avLst/>
+          </a:prstGeom>
+          <a:solidFill>
+            <a:srgbClr val="4A3AFF"/>
+          </a:solidFill>
+          <a:ln>
+            <a:noFill/>
+          </a:ln>
+          <a:effectLst/>
+        </p:spPr>
+        <p:style>
+          <a:lnRef idx="1">
+            <a:schemeClr val="accent1"/>
+          </a:lnRef>
+          <a:fillRef idx="3">
+            <a:schemeClr val="accent1"/>
+          </a:fillRef>
+          <a:effectRef idx="2">
+            <a:schemeClr val="accent1"/>
+          </a:effectRef>
+          <a:fontRef idx="minor">
+            <a:schemeClr val="lt1"/>
+          </a:fontRef>
+        </p:style>
+        <p:txBody>
+          <a:bodyPr rtlCol="0" anchor="ctr"/>
+          <a:lstStyle/>
+          <a:p>
+            <a:pPr algn="ctr"/>
+          </a:p>
+        </p:txBody>
+      </p:sp>
+      <p:sp>
+        <p:nvSpPr>
+          <p:cNvPr id="24" name="TextBox 23"/>
+          <p:cNvSpPr txBox="1"/>
+          <p:nvPr/>
+        </p:nvSpPr>
+        <p:spPr>
+          <a:xfrm>
+            <a:off x="804672" y="5253608"/>
+            <a:ext cx="10820095" cy="323469"/>
+          </a:xfrm>
+          <a:prstGeom prst="rect">
+            <a:avLst/>
+          </a:prstGeom>
+          <a:noFill/>
+        </p:spPr>
+        <p:txBody>
+          <a:bodyPr wrap="square" lIns="0" rIns="0" tIns="0" bIns="0">
+            <a:spAutoFit/>
+          </a:bodyPr>
+          <a:lstStyle/>
+          <a:p>
+            <a:r>
+              <a:rPr sz="1350" b="1" i="0">
+                <a:solidFill>
+                  <a:srgbClr val="15192B"/>
+                </a:solidFill>
+                <a:latin typeface="Segoe UI"/>
+              </a:rPr>
+              <a:t>Quarterly investor updates</a:t>
+            </a:r>
+            <a:r>
+              <a:rPr sz="1350" b="0" i="0">
+                <a:solidFill>
+                  <a:srgbClr val="5A6072"/>
+                </a:solidFill>
+                <a:latin typeface="Segoe UI"/>
+              </a:rPr>
+              <a:t> — progress, metrics, and what's not working</a:t>
             </a:r>
           </a:p>
         </p:txBody>

--- a/pitch_deck/qlaudia_pitch_deck.pptx
+++ b/pitch_deck/qlaudia_pitch_deck.pptx
@@ -8858,7 +8858,7 @@
         <p:spPr>
           <a:xfrm>
             <a:off x="566928" y="1133856"/>
-            <a:ext cx="11057839" cy="376428"/>
+            <a:ext cx="11057839" cy="369189"/>
           </a:xfrm>
           <a:prstGeom prst="rect">
             <a:avLst/>
@@ -8872,40 +8872,6 @@
           <a:lstStyle/>
           <a:p>
             <a:r>
-              <a:rPr sz="1700" b="1" i="0">
-                <a:solidFill>
-                  <a:srgbClr val="C2410C"/>
-                </a:solidFill>
-                <a:latin typeface="Segoe UI"/>
-              </a:rPr>
-              <a:t>⚠️ TODO — the realistic exit paths.</a:t>
-            </a:r>
-          </a:p>
-        </p:txBody>
-      </p:sp>
-      <p:sp>
-        <p:nvSpPr>
-          <p:cNvPr id="5" name="TextBox 4"/>
-          <p:cNvSpPr txBox="1"/>
-          <p:nvPr/>
-        </p:nvSpPr>
-        <p:spPr>
-          <a:xfrm>
-            <a:off x="566928" y="1711452"/>
-            <a:ext cx="11057839" cy="369189"/>
-          </a:xfrm>
-          <a:prstGeom prst="rect">
-            <a:avLst/>
-          </a:prstGeom>
-          <a:noFill/>
-        </p:spPr>
-        <p:txBody>
-          <a:bodyPr wrap="square" lIns="0" rIns="0" tIns="0" bIns="0">
-            <a:spAutoFit/>
-          </a:bodyPr>
-          <a:lstStyle/>
-          <a:p>
-            <a:r>
               <a:rPr sz="1350" b="1" i="0">
                 <a:solidFill>
                   <a:srgbClr val="15192B"/>
@@ -8919,13 +8885,13 @@
       </p:sp>
       <p:sp>
         <p:nvSpPr>
-          <p:cNvPr id="6" name="Oval 5"/>
+          <p:cNvPr id="5" name="Oval 4"/>
           <p:cNvSpPr/>
           <p:nvPr/>
         </p:nvSpPr>
         <p:spPr>
           <a:xfrm>
-            <a:off x="585216" y="2159508"/>
+            <a:off x="585216" y="1581912"/>
             <a:ext cx="65836" cy="65836"/>
           </a:xfrm>
           <a:prstGeom prst="ellipse">
@@ -8963,13 +8929,13 @@
       </p:sp>
       <p:sp>
         <p:nvSpPr>
-          <p:cNvPr id="7" name="TextBox 6"/>
+          <p:cNvPr id="6" name="TextBox 5"/>
           <p:cNvSpPr txBox="1"/>
           <p:nvPr/>
         </p:nvSpPr>
         <p:spPr>
           <a:xfrm>
-            <a:off x="804672" y="2080641"/>
+            <a:off x="804672" y="1503045"/>
             <a:ext cx="10820095" cy="992124"/>
           </a:xfrm>
           <a:prstGeom prst="rect">
@@ -9024,13 +8990,13 @@
       </p:sp>
       <p:sp>
         <p:nvSpPr>
-          <p:cNvPr id="8" name="Oval 7"/>
+          <p:cNvPr id="7" name="Oval 6"/>
           <p:cNvSpPr/>
           <p:nvPr/>
         </p:nvSpPr>
         <p:spPr>
           <a:xfrm>
-            <a:off x="585216" y="3151632"/>
+            <a:off x="585216" y="2574036"/>
             <a:ext cx="65836" cy="65836"/>
           </a:xfrm>
           <a:prstGeom prst="ellipse">
@@ -9068,13 +9034,13 @@
       </p:sp>
       <p:sp>
         <p:nvSpPr>
-          <p:cNvPr id="9" name="TextBox 8"/>
+          <p:cNvPr id="8" name="TextBox 7"/>
           <p:cNvSpPr txBox="1"/>
           <p:nvPr/>
         </p:nvSpPr>
         <p:spPr>
           <a:xfrm>
-            <a:off x="804672" y="3072765"/>
+            <a:off x="804672" y="2495169"/>
             <a:ext cx="10820095" cy="546354"/>
           </a:xfrm>
           <a:prstGeom prst="rect">
@@ -9111,13 +9077,13 @@
       </p:sp>
       <p:sp>
         <p:nvSpPr>
-          <p:cNvPr id="10" name="Oval 9"/>
+          <p:cNvPr id="9" name="Oval 8"/>
           <p:cNvSpPr/>
           <p:nvPr/>
         </p:nvSpPr>
         <p:spPr>
           <a:xfrm>
-            <a:off x="585216" y="3697986"/>
+            <a:off x="585216" y="3120390"/>
             <a:ext cx="65836" cy="65836"/>
           </a:xfrm>
           <a:prstGeom prst="ellipse">
@@ -9155,13 +9121,13 @@
       </p:sp>
       <p:sp>
         <p:nvSpPr>
-          <p:cNvPr id="11" name="TextBox 10"/>
+          <p:cNvPr id="10" name="TextBox 9"/>
           <p:cNvSpPr txBox="1"/>
           <p:nvPr/>
         </p:nvSpPr>
         <p:spPr>
           <a:xfrm>
-            <a:off x="804672" y="3619119"/>
+            <a:off x="804672" y="3041523"/>
             <a:ext cx="10820095" cy="323469"/>
           </a:xfrm>
           <a:prstGeom prst="rect">
@@ -9198,13 +9164,13 @@
       </p:sp>
       <p:sp>
         <p:nvSpPr>
-          <p:cNvPr id="12" name="Oval 11"/>
+          <p:cNvPr id="11" name="Oval 10"/>
           <p:cNvSpPr/>
           <p:nvPr/>
         </p:nvSpPr>
         <p:spPr>
           <a:xfrm>
-            <a:off x="585216" y="4021454"/>
+            <a:off x="585216" y="3443859"/>
             <a:ext cx="65836" cy="65836"/>
           </a:xfrm>
           <a:prstGeom prst="ellipse">
@@ -9242,13 +9208,13 @@
       </p:sp>
       <p:sp>
         <p:nvSpPr>
-          <p:cNvPr id="13" name="TextBox 12"/>
+          <p:cNvPr id="12" name="TextBox 11"/>
           <p:cNvSpPr txBox="1"/>
           <p:nvPr/>
         </p:nvSpPr>
         <p:spPr>
           <a:xfrm>
-            <a:off x="804672" y="3942588"/>
+            <a:off x="804672" y="3364992"/>
             <a:ext cx="10820095" cy="323469"/>
           </a:xfrm>
           <a:prstGeom prst="rect">
@@ -9285,13 +9251,13 @@
       </p:sp>
       <p:sp>
         <p:nvSpPr>
-          <p:cNvPr id="14" name="Oval 13"/>
+          <p:cNvPr id="13" name="Oval 12"/>
           <p:cNvSpPr/>
           <p:nvPr/>
         </p:nvSpPr>
         <p:spPr>
           <a:xfrm>
-            <a:off x="585216" y="4344923"/>
+            <a:off x="585216" y="3767328"/>
             <a:ext cx="65836" cy="65836"/>
           </a:xfrm>
           <a:prstGeom prst="ellipse">
@@ -9329,13 +9295,13 @@
       </p:sp>
       <p:sp>
         <p:nvSpPr>
-          <p:cNvPr id="15" name="TextBox 14"/>
+          <p:cNvPr id="14" name="TextBox 13"/>
           <p:cNvSpPr txBox="1"/>
           <p:nvPr/>
         </p:nvSpPr>
         <p:spPr>
           <a:xfrm>
-            <a:off x="804672" y="4266057"/>
+            <a:off x="804672" y="3688461"/>
             <a:ext cx="10820095" cy="323469"/>
           </a:xfrm>
           <a:prstGeom prst="rect">
@@ -9372,13 +9338,13 @@
       </p:sp>
       <p:sp>
         <p:nvSpPr>
-          <p:cNvPr id="16" name="Oval 15"/>
+          <p:cNvPr id="15" name="Oval 14"/>
           <p:cNvSpPr/>
           <p:nvPr/>
         </p:nvSpPr>
         <p:spPr>
           <a:xfrm>
-            <a:off x="585216" y="4668392"/>
+            <a:off x="585216" y="4090797"/>
             <a:ext cx="65836" cy="65836"/>
           </a:xfrm>
           <a:prstGeom prst="ellipse">
@@ -9416,13 +9382,13 @@
       </p:sp>
       <p:sp>
         <p:nvSpPr>
-          <p:cNvPr id="17" name="TextBox 16"/>
+          <p:cNvPr id="16" name="TextBox 15"/>
           <p:cNvSpPr txBox="1"/>
           <p:nvPr/>
         </p:nvSpPr>
         <p:spPr>
           <a:xfrm>
-            <a:off x="804672" y="4589525"/>
+            <a:off x="804672" y="4011930"/>
             <a:ext cx="10820095" cy="323469"/>
           </a:xfrm>
           <a:prstGeom prst="rect">
@@ -9453,84 +9419,6 @@
                 <a:latin typeface="Segoe UI"/>
               </a:rPr>
               <a:t> — Microsoft, Google (Classroom / Workspace for Education)</a:t>
-            </a:r>
-          </a:p>
-        </p:txBody>
-      </p:sp>
-      <p:sp>
-        <p:nvSpPr>
-          <p:cNvPr id="18" name="Oval 17"/>
-          <p:cNvSpPr/>
-          <p:nvPr/>
-        </p:nvSpPr>
-        <p:spPr>
-          <a:xfrm>
-            <a:off x="585216" y="4991861"/>
-            <a:ext cx="65836" cy="65836"/>
-          </a:xfrm>
-          <a:prstGeom prst="ellipse">
-            <a:avLst/>
-          </a:prstGeom>
-          <a:solidFill>
-            <a:srgbClr val="4A3AFF"/>
-          </a:solidFill>
-          <a:ln>
-            <a:noFill/>
-          </a:ln>
-          <a:effectLst/>
-        </p:spPr>
-        <p:style>
-          <a:lnRef idx="1">
-            <a:schemeClr val="accent1"/>
-          </a:lnRef>
-          <a:fillRef idx="3">
-            <a:schemeClr val="accent1"/>
-          </a:fillRef>
-          <a:effectRef idx="2">
-            <a:schemeClr val="accent1"/>
-          </a:effectRef>
-          <a:fontRef idx="minor">
-            <a:schemeClr val="lt1"/>
-          </a:fontRef>
-        </p:style>
-        <p:txBody>
-          <a:bodyPr rtlCol="0" anchor="ctr"/>
-          <a:lstStyle/>
-          <a:p>
-            <a:pPr algn="ctr"/>
-          </a:p>
-        </p:txBody>
-      </p:sp>
-      <p:sp>
-        <p:nvSpPr>
-          <p:cNvPr id="19" name="TextBox 18"/>
-          <p:cNvSpPr txBox="1"/>
-          <p:nvPr/>
-        </p:nvSpPr>
-        <p:spPr>
-          <a:xfrm>
-            <a:off x="804672" y="4912994"/>
-            <a:ext cx="10820095" cy="323469"/>
-          </a:xfrm>
-          <a:prstGeom prst="rect">
-            <a:avLst/>
-          </a:prstGeom>
-          <a:noFill/>
-        </p:spPr>
-        <p:txBody>
-          <a:bodyPr wrap="square" lIns="0" rIns="0" tIns="0" bIns="0">
-            <a:spAutoFit/>
-          </a:bodyPr>
-          <a:lstStyle/>
-          <a:p>
-            <a:r>
-              <a:rPr sz="1350" b="0" i="0">
-                <a:solidFill>
-                  <a:srgbClr val="C2410C"/>
-                </a:solidFill>
-                <a:latin typeface="Segoe UI"/>
-              </a:rPr>
-              <a:t>⚠️ TODO: comparable transactions and multiples in this space</a:t>
             </a:r>
           </a:p>
         </p:txBody>
@@ -10129,84 +10017,6 @@
                 <a:latin typeface="Segoe UI"/>
               </a:rPr>
               <a:t> (Pearson, McGraw Hill, Cengage) — own the content, but it's manually produced and static</a:t>
-            </a:r>
-          </a:p>
-        </p:txBody>
-      </p:sp>
-      <p:sp>
-        <p:nvSpPr>
-          <p:cNvPr id="13" name="Rectangle 12"/>
-          <p:cNvSpPr/>
-          <p:nvPr/>
-        </p:nvSpPr>
-        <p:spPr>
-          <a:xfrm>
-            <a:off x="566928" y="3270122"/>
-            <a:ext cx="50292" cy="698754"/>
-          </a:xfrm>
-          <a:prstGeom prst="rect">
-            <a:avLst/>
-          </a:prstGeom>
-          <a:solidFill>
-            <a:srgbClr val="4A3AFF"/>
-          </a:solidFill>
-          <a:ln>
-            <a:noFill/>
-          </a:ln>
-          <a:effectLst/>
-        </p:spPr>
-        <p:style>
-          <a:lnRef idx="1">
-            <a:schemeClr val="accent1"/>
-          </a:lnRef>
-          <a:fillRef idx="3">
-            <a:schemeClr val="accent1"/>
-          </a:fillRef>
-          <a:effectRef idx="2">
-            <a:schemeClr val="accent1"/>
-          </a:effectRef>
-          <a:fontRef idx="minor">
-            <a:schemeClr val="lt1"/>
-          </a:fontRef>
-        </p:style>
-        <p:txBody>
-          <a:bodyPr rtlCol="0" anchor="ctr"/>
-          <a:lstStyle/>
-          <a:p>
-            <a:pPr algn="ctr"/>
-          </a:p>
-        </p:txBody>
-      </p:sp>
-      <p:sp>
-        <p:nvSpPr>
-          <p:cNvPr id="14" name="TextBox 13"/>
-          <p:cNvSpPr txBox="1"/>
-          <p:nvPr/>
-        </p:nvSpPr>
-        <p:spPr>
-          <a:xfrm>
-            <a:off x="877824" y="3242690"/>
-            <a:ext cx="10746943" cy="790194"/>
-          </a:xfrm>
-          <a:prstGeom prst="rect">
-            <a:avLst/>
-          </a:prstGeom>
-          <a:noFill/>
-        </p:spPr>
-        <p:txBody>
-          <a:bodyPr wrap="square" lIns="0" rIns="0" tIns="0" bIns="0">
-            <a:spAutoFit/>
-          </a:bodyPr>
-          <a:lstStyle/>
-          <a:p>
-            <a:r>
-              <a:rPr sz="1300" b="0" i="1">
-                <a:solidFill>
-                  <a:srgbClr val="C2410C"/>
-                </a:solidFill>
-                <a:latin typeface="Segoe UI"/>
-              </a:rPr>
-              <a:t>⚠️ TODO: Charles to confirm which competitors actually come up in his conversations. Moved out of the main deck for angels — the named-competitor grid is a VC-diligence artifact, and the differentiation argument is already carried by Slides 2, 3, and 6. Bring it back into the main deck if a specific investor asks.</a:t>
             </a:r>
           </a:p>
         </p:txBody>

--- a/pitch_deck/qlaudia_pitch_deck.pptx
+++ b/pitch_deck/qlaudia_pitch_deck.pptx
@@ -929,6 +929,24 @@
             <a:r>
               <a:rPr sz="1100"/>
               <a:t>Why revenue starts when it starts. Sponsors have to be recruited, their courses generated and reviewed, and their audiences given time to arrive before there is anything to convert. That is a sequence, not a delay — and it is a better answer than a traffic projection. Where a school is aimed at homeschool families, the February-to-August curriculum buying season applies and the 2026 cycle has already closed; say that only for the schools it is true of, not as the frame for the whole round.</a:t>
+            </a:r>
+          </a:p>
+          <a:p>
+            <a:r>
+              <a:rPr sz="1100"/>
+              <a:t>Why legal is its own line and not buried in runway. An angel reading a use-of-funds slide with no legal line wonders whether you have thought about the entity at all — and the entity question is the first thing they need answered, because they cannot put a SAFE into an LLC. Naming it shows you know that.</a:t>
+            </a:r>
+          </a:p>
+          <a:p>
+            <a:r>
+              <a:rPr sz="1100"/>
+              <a:t>Keep it to ~$3k by using the cheap path. Stripe Atlas or Clerky will form a Delaware C-corp with founder stock and the 83(b) for a few hundred dollars; the YC SAFE documents are free and should be used unmodified. Reserve the remaining budget for one lawyer conversation on IP assignment and the securities exemption. A bespoke conversion from the existing LLC would cost several times this — see the trade-off note below.</a:t>
+            </a:r>
+          </a:p>
+          <a:p>
+            <a:r>
+              <a:rPr sz="1100"/>
+              <a:t>The LLC-continuity trade-off, if asked. Converting Charles Irvine Enterprises LLC preserves the 2017 formation date, which supports the pre-ChatGPT provenance on the Founder slide. Forming fresh is far cheaper but loses entity continuity. The 2017 date is provable other ways — LLC records, domain registrations, public GitHub history — so on a round this size, forming fresh is the defensible choice.</a:t>
             </a:r>
           </a:p>
           <a:p>
@@ -6011,7 +6029,7 @@
         <p:spPr>
           <a:xfrm>
             <a:off x="6287871" y="4803648"/>
-            <a:ext cx="5336895" cy="592074"/>
+            <a:ext cx="5336895" cy="369189"/>
           </a:xfrm>
           <a:prstGeom prst="rect">
             <a:avLst/>
@@ -6027,20 +6045,11 @@
             <a:r>
               <a:rPr sz="1350" b="1" i="0">
                 <a:solidFill>
-                  <a:srgbClr val="C2410C"/>
+                  <a:srgbClr val="15192B"/>
                 </a:solidFill>
                 <a:latin typeface="Segoe UI"/>
               </a:rPr>
               <a:t>First move: a few schools, not many.</a:t>
-            </a:r>
-            <a:r>
-              <a:rPr sz="1350" b="0" i="0">
-                <a:solidFill>
-                  <a:srgbClr val="C2410C"/>
-                </a:solidFill>
-                <a:latin typeface="Segoe UI"/>
-              </a:rPr>
-              <a:t> ⚠️ TODO: which, and how many.</a:t>
             </a:r>
           </a:p>
         </p:txBody>
@@ -6053,7 +6062,7 @@
         </p:nvSpPr>
         <p:spPr>
           <a:xfrm>
-            <a:off x="6287871" y="5395722"/>
+            <a:off x="6287871" y="5172837"/>
             <a:ext cx="5336895" cy="592074"/>
           </a:xfrm>
           <a:prstGeom prst="rect">
@@ -6253,7 +6262,7 @@
         <p:spPr>
           <a:xfrm>
             <a:off x="566928" y="1711452"/>
-            <a:ext cx="11057839" cy="342442"/>
+            <a:ext cx="11057839" cy="355815"/>
           </a:xfrm>
           <a:prstGeom prst="rect">
             <a:avLst/>
@@ -6267,7 +6276,7 @@
           <a:lstStyle/>
           <a:p>
             <a:r>
-              <a:rPr sz="1188" b="1" i="0">
+              <a:rPr sz="1269" b="1" i="0">
                 <a:solidFill>
                   <a:srgbClr val="15192B"/>
                 </a:solidFill>
@@ -6276,7 +6285,7 @@
               <a:t>Built</a:t>
             </a:r>
             <a:r>
-              <a:rPr sz="1188" b="0" i="0">
+              <a:rPr sz="1269" b="0" i="0">
                 <a:solidFill>
                   <a:srgbClr val="5A6072"/>
                 </a:solidFill>
@@ -6285,7 +6294,7 @@
               <a:t> </a:t>
             </a:r>
             <a:r>
-              <a:rPr sz="1188" b="0" i="1">
+              <a:rPr sz="1269" b="0" i="1">
                 <a:solidFill>
                   <a:srgbClr val="5A6072"/>
                 </a:solidFill>
@@ -6305,8 +6314,8 @@
           <p:nvPr/>
         </p:nvGraphicFramePr>
         <p:xfrm>
-          <a:off x="566928" y="2053894"/>
-          <a:ext cx="11057839" cy="1794414"/>
+          <a:off x="566928" y="2067267"/>
+          <a:ext cx="11057839" cy="1916760"/>
         </p:xfrm>
         <a:graphic>
           <a:graphicData uri="http://schemas.openxmlformats.org/drawingml/2006/table">
@@ -6318,14 +6327,14 @@
                 <a:gridCol w="5086605"/>
                 <a:gridCol w="5971234"/>
               </a:tblGrid>
-              <a:tr h="273588">
+              <a:tr h="292242">
                 <a:tc>
                   <a:txBody>
                     <a:bodyPr wrap="square"/>
                     <a:lstStyle/>
                     <a:p>
                       <a:r>
-                        <a:rPr sz="968" b="1">
+                        <a:rPr sz="1034" b="1">
                           <a:solidFill>
                             <a:srgbClr val="15192B"/>
                           </a:solidFill>
@@ -6347,7 +6356,7 @@
                     <a:lstStyle/>
                     <a:p>
                       <a:r>
-                        <a:rPr sz="968" b="1">
+                        <a:rPr sz="1034" b="1">
                           <a:solidFill>
                             <a:srgbClr val="15192B"/>
                           </a:solidFill>
@@ -6364,14 +6373,14 @@
                   </a:tcPr>
                 </a:tc>
               </a:tr>
-              <a:tr h="253471">
+              <a:tr h="270753">
                 <a:tc>
                   <a:txBody>
                     <a:bodyPr wrap="square"/>
                     <a:lstStyle/>
                     <a:p>
                       <a:r>
-                        <a:rPr sz="968" b="0" i="0">
+                        <a:rPr sz="1034" b="0" i="0">
                           <a:solidFill>
                             <a:srgbClr val="5A6072"/>
                           </a:solidFill>
@@ -6393,7 +6402,7 @@
                     <a:lstStyle/>
                     <a:p>
                       <a:r>
-                        <a:rPr sz="968" b="1" i="0">
+                        <a:rPr sz="1034" b="1" i="0">
                           <a:solidFill>
                             <a:srgbClr val="15192B"/>
                           </a:solidFill>
@@ -6402,7 +6411,7 @@
                         <a:t>63</a:t>
                       </a:r>
                       <a:r>
-                        <a:rPr sz="968" b="0" i="0">
+                        <a:rPr sz="1034" b="0" i="0">
                           <a:solidFill>
                             <a:srgbClr val="5A6072"/>
                           </a:solidFill>
@@ -6419,14 +6428,14 @@
                   </a:tcPr>
                 </a:tc>
               </a:tr>
-              <a:tr h="253471">
+              <a:tr h="270753">
                 <a:tc>
                   <a:txBody>
                     <a:bodyPr wrap="square"/>
                     <a:lstStyle/>
                     <a:p>
                       <a:r>
-                        <a:rPr sz="968" b="0" i="0">
+                        <a:rPr sz="1034" b="0" i="0">
                           <a:solidFill>
                             <a:srgbClr val="5A6072"/>
                           </a:solidFill>
@@ -6448,7 +6457,7 @@
                     <a:lstStyle/>
                     <a:p>
                       <a:r>
-                        <a:rPr sz="968" b="1" i="0">
+                        <a:rPr sz="1034" b="1" i="0">
                           <a:solidFill>
                             <a:srgbClr val="15192B"/>
                           </a:solidFill>
@@ -6465,14 +6474,14 @@
                   </a:tcPr>
                 </a:tc>
               </a:tr>
-              <a:tr h="253471">
+              <a:tr h="270753">
                 <a:tc>
                   <a:txBody>
                     <a:bodyPr wrap="square"/>
                     <a:lstStyle/>
                     <a:p>
                       <a:r>
-                        <a:rPr sz="968" b="0" i="0">
+                        <a:rPr sz="1034" b="0" i="0">
                           <a:solidFill>
                             <a:srgbClr val="5A6072"/>
                           </a:solidFill>
@@ -6494,7 +6503,7 @@
                     <a:lstStyle/>
                     <a:p>
                       <a:r>
-                        <a:rPr sz="968" b="1" i="0">
+                        <a:rPr sz="1034" b="1" i="0">
                           <a:solidFill>
                             <a:srgbClr val="15192B"/>
                           </a:solidFill>
@@ -6511,14 +6520,14 @@
                   </a:tcPr>
                 </a:tc>
               </a:tr>
-              <a:tr h="253471">
+              <a:tr h="270753">
                 <a:tc>
                   <a:txBody>
                     <a:bodyPr wrap="square"/>
                     <a:lstStyle/>
                     <a:p>
                       <a:r>
-                        <a:rPr sz="968" b="0" i="0">
+                        <a:rPr sz="1034" b="0" i="0">
                           <a:solidFill>
                             <a:srgbClr val="5A6072"/>
                           </a:solidFill>
@@ -6540,7 +6549,7 @@
                     <a:lstStyle/>
                     <a:p>
                       <a:r>
-                        <a:rPr sz="968" b="1" i="0">
+                        <a:rPr sz="1034" b="1" i="0">
                           <a:solidFill>
                             <a:srgbClr val="15192B"/>
                           </a:solidFill>
@@ -6557,14 +6566,14 @@
                   </a:tcPr>
                 </a:tc>
               </a:tr>
-              <a:tr h="253471">
+              <a:tr h="270753">
                 <a:tc>
                   <a:txBody>
                     <a:bodyPr wrap="square"/>
                     <a:lstStyle/>
                     <a:p>
                       <a:r>
-                        <a:rPr sz="968" b="0" i="0">
+                        <a:rPr sz="1034" b="0" i="0">
                           <a:solidFill>
                             <a:srgbClr val="5A6072"/>
                           </a:solidFill>
@@ -6586,7 +6595,7 @@
                     <a:lstStyle/>
                     <a:p>
                       <a:r>
-                        <a:rPr sz="968" b="1" i="0">
+                        <a:rPr sz="1034" b="1" i="0">
                           <a:solidFill>
                             <a:srgbClr val="15192B"/>
                           </a:solidFill>
@@ -6603,14 +6612,14 @@
                   </a:tcPr>
                 </a:tc>
               </a:tr>
-              <a:tr h="253471">
+              <a:tr h="270753">
                 <a:tc>
                   <a:txBody>
                     <a:bodyPr wrap="square"/>
                     <a:lstStyle/>
                     <a:p>
                       <a:r>
-                        <a:rPr sz="968" b="0" i="0">
+                        <a:rPr sz="1034" b="0" i="0">
                           <a:solidFill>
                             <a:srgbClr val="5A6072"/>
                           </a:solidFill>
@@ -6632,7 +6641,7 @@
                     <a:lstStyle/>
                     <a:p>
                       <a:r>
-                        <a:rPr sz="968" b="1" i="0">
+                        <a:rPr sz="1034" b="1" i="0">
                           <a:solidFill>
                             <a:srgbClr val="15192B"/>
                           </a:solidFill>
@@ -6661,8 +6670,8 @@
         </p:nvSpPr>
         <p:spPr>
           <a:xfrm>
-            <a:off x="566928" y="4031193"/>
-            <a:ext cx="11057839" cy="342442"/>
+            <a:off x="566928" y="4166913"/>
+            <a:ext cx="11057839" cy="355815"/>
           </a:xfrm>
           <a:prstGeom prst="rect">
             <a:avLst/>
@@ -6676,7 +6685,7 @@
           <a:lstStyle/>
           <a:p>
             <a:r>
-              <a:rPr sz="1188" b="1" i="0">
+              <a:rPr sz="1269" b="1" i="0">
                 <a:solidFill>
                   <a:srgbClr val="15192B"/>
                 </a:solidFill>
@@ -6685,7 +6694,7 @@
               <a:t>Used</a:t>
             </a:r>
             <a:r>
-              <a:rPr sz="1188" b="0" i="0">
+              <a:rPr sz="1269" b="0" i="0">
                 <a:solidFill>
                   <a:srgbClr val="5A6072"/>
                 </a:solidFill>
@@ -6694,7 +6703,7 @@
               <a:t> </a:t>
             </a:r>
             <a:r>
-              <a:rPr sz="1188" b="0" i="1">
+              <a:rPr sz="1269" b="0" i="1">
                 <a:solidFill>
                   <a:srgbClr val="5A6072"/>
                 </a:solidFill>
@@ -6713,7 +6722,7 @@
         </p:nvSpPr>
         <p:spPr>
           <a:xfrm>
-            <a:off x="585216" y="4443039"/>
+            <a:off x="585216" y="4596864"/>
             <a:ext cx="65836" cy="65836"/>
           </a:xfrm>
           <a:prstGeom prst="ellipse">
@@ -6757,8 +6766,8 @@
         </p:nvSpPr>
         <p:spPr>
           <a:xfrm>
-            <a:off x="804672" y="4373636"/>
-            <a:ext cx="10820095" cy="296722"/>
+            <a:off x="804672" y="4522729"/>
+            <a:ext cx="10820095" cy="310095"/>
           </a:xfrm>
           <a:prstGeom prst="rect">
             <a:avLst/>
@@ -6772,7 +6781,7 @@
           <a:lstStyle/>
           <a:p>
             <a:r>
-              <a:rPr sz="1188" b="1" i="0">
+              <a:rPr sz="1269" b="1" i="0">
                 <a:solidFill>
                   <a:srgbClr val="15192B"/>
                 </a:solidFill>
@@ -6781,7 +6790,7 @@
               <a:t>7 schools already live</a:t>
             </a:r>
             <a:r>
-              <a:rPr sz="1188" b="0" i="0">
+              <a:rPr sz="1269" b="0" i="0">
                 <a:solidFill>
                   <a:srgbClr val="5A6072"/>
                 </a:solidFill>
@@ -6800,7 +6809,7 @@
         </p:nvSpPr>
         <p:spPr>
           <a:xfrm>
-            <a:off x="585216" y="4739761"/>
+            <a:off x="585216" y="4906959"/>
             <a:ext cx="65836" cy="65836"/>
           </a:xfrm>
           <a:prstGeom prst="ellipse">
@@ -6844,8 +6853,8 @@
         </p:nvSpPr>
         <p:spPr>
           <a:xfrm>
-            <a:off x="804672" y="4670358"/>
-            <a:ext cx="10820095" cy="296722"/>
+            <a:off x="804672" y="4832824"/>
+            <a:ext cx="10820095" cy="310095"/>
           </a:xfrm>
           <a:prstGeom prst="rect">
             <a:avLst/>
@@ -6859,7 +6868,7 @@
           <a:lstStyle/>
           <a:p>
             <a:r>
-              <a:rPr sz="1188" b="1" i="0">
+              <a:rPr sz="1269" b="1" i="0">
                 <a:solidFill>
                   <a:srgbClr val="15192B"/>
                 </a:solidFill>
@@ -6868,7 +6877,7 @@
               <a:t>One user completed five courses end to end</a:t>
             </a:r>
             <a:r>
-              <a:rPr sz="1188" b="0" i="0">
+              <a:rPr sz="1269" b="0" i="0">
                 <a:solidFill>
                   <a:srgbClr val="5A6072"/>
                 </a:solidFill>
@@ -6887,7 +6896,7 @@
         </p:nvSpPr>
         <p:spPr>
           <a:xfrm>
-            <a:off x="585216" y="5036484"/>
+            <a:off x="585216" y="5217055"/>
             <a:ext cx="65836" cy="65836"/>
           </a:xfrm>
           <a:prstGeom prst="ellipse">
@@ -6931,8 +6940,8 @@
         </p:nvSpPr>
         <p:spPr>
           <a:xfrm>
-            <a:off x="804672" y="4967081"/>
-            <a:ext cx="10820095" cy="296722"/>
+            <a:off x="804672" y="5142920"/>
+            <a:ext cx="10820095" cy="310095"/>
           </a:xfrm>
           <a:prstGeom prst="rect">
             <a:avLst/>
@@ -6946,7 +6955,7 @@
           <a:lstStyle/>
           <a:p>
             <a:r>
-              <a:rPr sz="1188" b="1" i="0">
+              <a:rPr sz="1269" b="1" i="0">
                 <a:solidFill>
                   <a:srgbClr val="15192B"/>
                 </a:solidFill>
@@ -6965,7 +6974,7 @@
         </p:nvSpPr>
         <p:spPr>
           <a:xfrm>
-            <a:off x="585216" y="5333207"/>
+            <a:off x="585216" y="5527151"/>
             <a:ext cx="65836" cy="65836"/>
           </a:xfrm>
           <a:prstGeom prst="ellipse">
@@ -7009,8 +7018,8 @@
         </p:nvSpPr>
         <p:spPr>
           <a:xfrm>
-            <a:off x="804672" y="5263804"/>
-            <a:ext cx="10820095" cy="492861"/>
+            <a:off x="804672" y="5453016"/>
+            <a:ext cx="10820095" cy="519607"/>
           </a:xfrm>
           <a:prstGeom prst="rect">
             <a:avLst/>
@@ -7024,7 +7033,7 @@
           <a:lstStyle/>
           <a:p>
             <a:r>
-              <a:rPr sz="1188" b="1" i="0">
+              <a:rPr sz="1269" b="1" i="0">
                 <a:solidFill>
                   <a:srgbClr val="15192B"/>
                 </a:solidFill>
@@ -7033,7 +7042,7 @@
               <a:t>The one distribution test we ran, worked</a:t>
             </a:r>
             <a:r>
-              <a:rPr sz="1188" b="0" i="0">
+              <a:rPr sz="1269" b="0" i="0">
                 <a:solidFill>
                   <a:srgbClr val="5A6072"/>
                 </a:solidFill>
@@ -7052,7 +7061,7 @@
         </p:nvSpPr>
         <p:spPr>
           <a:xfrm>
-            <a:off x="585216" y="5826069"/>
+            <a:off x="585216" y="6046759"/>
             <a:ext cx="65836" cy="65836"/>
           </a:xfrm>
           <a:prstGeom prst="ellipse">
@@ -7096,8 +7105,8 @@
         </p:nvSpPr>
         <p:spPr>
           <a:xfrm>
-            <a:off x="804672" y="5756666"/>
-            <a:ext cx="10820095" cy="296722"/>
+            <a:off x="804672" y="5972624"/>
+            <a:ext cx="10820095" cy="310095"/>
           </a:xfrm>
           <a:prstGeom prst="rect">
             <a:avLst/>
@@ -7111,91 +7120,13 @@
           <a:lstStyle/>
           <a:p>
             <a:r>
-              <a:rPr sz="1188" b="0" i="0">
+              <a:rPr sz="1269" b="0" i="0">
                 <a:solidFill>
                   <a:srgbClr val="5A6072"/>
                 </a:solidFill>
                 <a:latin typeface="Segoe UI"/>
               </a:rPr>
               <a:t>86 site visitors over the last four months; 15 accounts, 25 enrolments</a:t>
-            </a:r>
-          </a:p>
-        </p:txBody>
-      </p:sp>
-      <p:sp>
-        <p:nvSpPr>
-          <p:cNvPr id="18" name="Oval 17"/>
-          <p:cNvSpPr/>
-          <p:nvPr/>
-        </p:nvSpPr>
-        <p:spPr>
-          <a:xfrm>
-            <a:off x="585216" y="6122791"/>
-            <a:ext cx="65836" cy="65836"/>
-          </a:xfrm>
-          <a:prstGeom prst="ellipse">
-            <a:avLst/>
-          </a:prstGeom>
-          <a:solidFill>
-            <a:srgbClr val="4A3AFF"/>
-          </a:solidFill>
-          <a:ln>
-            <a:noFill/>
-          </a:ln>
-          <a:effectLst/>
-        </p:spPr>
-        <p:style>
-          <a:lnRef idx="1">
-            <a:schemeClr val="accent1"/>
-          </a:lnRef>
-          <a:fillRef idx="3">
-            <a:schemeClr val="accent1"/>
-          </a:fillRef>
-          <a:effectRef idx="2">
-            <a:schemeClr val="accent1"/>
-          </a:effectRef>
-          <a:fontRef idx="minor">
-            <a:schemeClr val="lt1"/>
-          </a:fontRef>
-        </p:style>
-        <p:txBody>
-          <a:bodyPr rtlCol="0" anchor="ctr"/>
-          <a:lstStyle/>
-          <a:p>
-            <a:pPr algn="ctr"/>
-          </a:p>
-        </p:txBody>
-      </p:sp>
-      <p:sp>
-        <p:nvSpPr>
-          <p:cNvPr id="19" name="TextBox 18"/>
-          <p:cNvSpPr txBox="1"/>
-          <p:nvPr/>
-        </p:nvSpPr>
-        <p:spPr>
-          <a:xfrm>
-            <a:off x="804672" y="6053388"/>
-            <a:ext cx="10820095" cy="296722"/>
-          </a:xfrm>
-          <a:prstGeom prst="rect">
-            <a:avLst/>
-          </a:prstGeom>
-          <a:noFill/>
-        </p:spPr>
-        <p:txBody>
-          <a:bodyPr wrap="square" lIns="0" rIns="0" tIns="0" bIns="0">
-            <a:spAutoFit/>
-          </a:bodyPr>
-          <a:lstStyle/>
-          <a:p>
-            <a:r>
-              <a:rPr sz="1188" b="0" i="0">
-                <a:solidFill>
-                  <a:srgbClr val="C2410C"/>
-                </a:solidFill>
-                <a:latin typeface="Segoe UI"/>
-              </a:rPr>
-              <a:t>⚠️ TODO: institutional conversations, pilots, or LOIs</a:t>
             </a:r>
           </a:p>
         </p:txBody>
@@ -7372,16 +7303,16 @@
             <a:r>
               <a:rPr sz="1350" b="1" i="0">
                 <a:solidFill>
-                  <a:srgbClr val="C2410C"/>
-                </a:solidFill>
-                <a:latin typeface="Segoe UI"/>
-              </a:rPr>
-              <a:t>1 · Schools and sponsors — $⚠️ TODO</a:t>
+                  <a:srgbClr val="15192B"/>
+                </a:solidFill>
+                <a:latin typeface="Segoe UI"/>
+              </a:rPr>
+              <a:t>1 · Schools and sponsors — $15,000</a:t>
             </a:r>
             <a:r>
               <a:rPr sz="1350" b="0" i="0">
                 <a:solidFill>
-                  <a:srgbClr val="C2410C"/>
+                  <a:srgbClr val="5A6072"/>
                 </a:solidFill>
                 <a:latin typeface="Segoe UI"/>
               </a:rPr>
@@ -7415,16 +7346,16 @@
             <a:r>
               <a:rPr sz="1350" b="1" i="0">
                 <a:solidFill>
-                  <a:srgbClr val="C2410C"/>
-                </a:solidFill>
-                <a:latin typeface="Segoe UI"/>
-              </a:rPr>
-              <a:t>2 · Course purchasing — $⚠️ TODO</a:t>
+                  <a:srgbClr val="15192B"/>
+                </a:solidFill>
+                <a:latin typeface="Segoe UI"/>
+              </a:rPr>
+              <a:t>2 · Course purchasing — $5,000</a:t>
             </a:r>
             <a:r>
               <a:rPr sz="1350" b="0" i="0">
                 <a:solidFill>
-                  <a:srgbClr val="C2410C"/>
+                  <a:srgbClr val="5A6072"/>
                 </a:solidFill>
                 <a:latin typeface="Segoe UI"/>
               </a:rPr>
@@ -7433,7 +7364,7 @@
             <a:r>
               <a:rPr sz="1350" b="1" i="0">
                 <a:solidFill>
-                  <a:srgbClr val="C2410C"/>
+                  <a:srgbClr val="15192B"/>
                 </a:solidFill>
                 <a:latin typeface="Segoe UI"/>
               </a:rPr>
@@ -7442,7 +7373,7 @@
             <a:r>
               <a:rPr sz="1350" b="0" i="0">
                 <a:solidFill>
-                  <a:srgbClr val="C2410C"/>
+                  <a:srgbClr val="5A6072"/>
                 </a:solidFill>
                 <a:latin typeface="Segoe UI"/>
               </a:rPr>
@@ -7476,16 +7407,16 @@
             <a:r>
               <a:rPr sz="1350" b="1" i="0">
                 <a:solidFill>
-                  <a:srgbClr val="C2410C"/>
-                </a:solidFill>
-                <a:latin typeface="Segoe UI"/>
-              </a:rPr>
-              <a:t>3 · Hardening — $⚠️ TODO</a:t>
+                  <a:srgbClr val="15192B"/>
+                </a:solidFill>
+                <a:latin typeface="Segoe UI"/>
+              </a:rPr>
+              <a:t>3 · Hardening — $10,000</a:t>
             </a:r>
             <a:r>
               <a:rPr sz="1350" b="0" i="0">
                 <a:solidFill>
-                  <a:srgbClr val="C2410C"/>
+                  <a:srgbClr val="5A6072"/>
                 </a:solidFill>
                 <a:latin typeface="Segoe UI"/>
               </a:rPr>
@@ -7519,33 +7450,76 @@
             <a:r>
               <a:rPr sz="1350" b="1" i="0">
                 <a:solidFill>
-                  <a:srgbClr val="C2410C"/>
-                </a:solidFill>
-                <a:latin typeface="Segoe UI"/>
-              </a:rPr>
-              <a:t>4 · Operating runway — $⚠️ TODO</a:t>
+                  <a:srgbClr val="15192B"/>
+                </a:solidFill>
+                <a:latin typeface="Segoe UI"/>
+              </a:rPr>
+              <a:t>4 · Legal, formation and accounting — $3,000</a:t>
             </a:r>
             <a:r>
               <a:rPr sz="1350" b="0" i="0">
                 <a:solidFill>
-                  <a:srgbClr val="C2410C"/>
-                </a:solidFill>
-                <a:latin typeface="Segoe UI"/>
-              </a:rPr>
-              <a:t> Founder compensation, baseline hosting, and tooling through the build-up period.</a:t>
-            </a:r>
-          </a:p>
-        </p:txBody>
-      </p:sp>
-      <p:sp>
-        <p:nvSpPr>
-          <p:cNvPr id="9" name="Rectangle 8"/>
+                  <a:srgbClr val="5A6072"/>
+                </a:solidFill>
+                <a:latin typeface="Segoe UI"/>
+              </a:rPr>
+              <a:t> Delaware C-corp, IP assignment, founder stock and 83(b), SAFE documents, and bookkeeping set-up.</a:t>
+            </a:r>
+          </a:p>
+        </p:txBody>
+      </p:sp>
+      <p:sp>
+        <p:nvSpPr>
+          <p:cNvPr id="9" name="TextBox 8"/>
+          <p:cNvSpPr txBox="1"/>
+          <p:nvPr/>
+        </p:nvSpPr>
+        <p:spPr>
+          <a:xfrm>
+            <a:off x="566928" y="4364736"/>
+            <a:ext cx="11057839" cy="369189"/>
+          </a:xfrm>
+          <a:prstGeom prst="rect">
+            <a:avLst/>
+          </a:prstGeom>
+          <a:noFill/>
+        </p:spPr>
+        <p:txBody>
+          <a:bodyPr wrap="square" lIns="0" rIns="0" tIns="0" bIns="0">
+            <a:spAutoFit/>
+          </a:bodyPr>
+          <a:lstStyle/>
+          <a:p>
+            <a:r>
+              <a:rPr sz="1350" b="1" i="0">
+                <a:solidFill>
+                  <a:srgbClr val="15192B"/>
+                </a:solidFill>
+                <a:latin typeface="Segoe UI"/>
+              </a:rPr>
+              <a:t>5 · Operating runway — $5,000</a:t>
+            </a:r>
+            <a:r>
+              <a:rPr sz="1350" b="0" i="0">
+                <a:solidFill>
+                  <a:srgbClr val="5A6072"/>
+                </a:solidFill>
+                <a:latin typeface="Segoe UI"/>
+              </a:rPr>
+              <a:t> Baseline hosting and tooling through the build-up period.</a:t>
+            </a:r>
+          </a:p>
+        </p:txBody>
+      </p:sp>
+      <p:sp>
+        <p:nvSpPr>
+          <p:cNvPr id="10" name="Rectangle 9"/>
           <p:cNvSpPr/>
           <p:nvPr/>
         </p:nvSpPr>
         <p:spPr>
           <a:xfrm>
-            <a:off x="566928" y="4392168"/>
+            <a:off x="566928" y="4761357"/>
             <a:ext cx="50292" cy="484124"/>
           </a:xfrm>
           <a:prstGeom prst="rect">
@@ -7583,13 +7557,13 @@
       </p:sp>
       <p:sp>
         <p:nvSpPr>
-          <p:cNvPr id="10" name="TextBox 9"/>
+          <p:cNvPr id="11" name="TextBox 10"/>
           <p:cNvSpPr txBox="1"/>
           <p:nvPr/>
         </p:nvSpPr>
         <p:spPr>
           <a:xfrm>
-            <a:off x="877824" y="4364736"/>
+            <a:off x="877824" y="4733925"/>
             <a:ext cx="10746943" cy="575564"/>
           </a:xfrm>
           <a:prstGeom prst="rect">
@@ -7610,21 +7584,21 @@
                 </a:solidFill>
                 <a:latin typeface="Segoe UI"/>
               </a:rPr>
-              <a:t>Total: $⚠️ TODO — ⚠️ N months: long enough to recruit sponsors, launch their schools, and see whether their audiences pay.</a:t>
-            </a:r>
-          </a:p>
-        </p:txBody>
-      </p:sp>
-      <p:sp>
-        <p:nvSpPr>
-          <p:cNvPr id="11" name="Rectangle 10"/>
+              <a:t>Total: $38,000 — ⚠️ TODO months: long enough to recruit sponsors, launch their schools, and see whether their audiences pay.</a:t>
+            </a:r>
+          </a:p>
+        </p:txBody>
+      </p:sp>
+      <p:sp>
+        <p:nvSpPr>
+          <p:cNvPr id="12" name="Rectangle 11"/>
           <p:cNvSpPr/>
           <p:nvPr/>
         </p:nvSpPr>
         <p:spPr>
           <a:xfrm>
-            <a:off x="566928" y="4967732"/>
-            <a:ext cx="50292" cy="698754"/>
+            <a:off x="566928" y="5336921"/>
+            <a:ext cx="50292" cy="484124"/>
           </a:xfrm>
           <a:prstGeom prst="rect">
             <a:avLst/>
@@ -7661,14 +7635,14 @@
       </p:sp>
       <p:sp>
         <p:nvSpPr>
-          <p:cNvPr id="12" name="TextBox 11"/>
+          <p:cNvPr id="13" name="TextBox 12"/>
           <p:cNvSpPr txBox="1"/>
           <p:nvPr/>
         </p:nvSpPr>
         <p:spPr>
           <a:xfrm>
-            <a:off x="877824" y="4940300"/>
-            <a:ext cx="10746943" cy="790194"/>
+            <a:off x="877824" y="5309489"/>
+            <a:ext cx="10746943" cy="575564"/>
           </a:xfrm>
           <a:prstGeom prst="rect">
             <a:avLst/>
@@ -7684,7 +7658,7 @@
             <a:r>
               <a:rPr sz="1300" b="1" i="1">
                 <a:solidFill>
-                  <a:srgbClr val="C2410C"/>
+                  <a:srgbClr val="5A6072"/>
                 </a:solidFill>
                 <a:latin typeface="Segoe UI"/>
               </a:rPr>
@@ -7693,25 +7667,25 @@
             <a:r>
               <a:rPr sz="1300" b="0" i="1">
                 <a:solidFill>
-                  <a:srgbClr val="C2410C"/>
-                </a:solidFill>
-                <a:latin typeface="Segoe UI"/>
-              </a:rPr>
-              <a:t> ⚠️ TODO — </a:t>
+                  <a:srgbClr val="5A6072"/>
+                </a:solidFill>
+                <a:latin typeface="Segoe UI"/>
+              </a:rPr>
+              <a:t> </a:t>
             </a:r>
             <a:r>
               <a:rPr sz="1300" b="0" i="1">
                 <a:solidFill>
-                  <a:srgbClr val="C2410C"/>
-                </a:solidFill>
-                <a:latin typeface="Segoe UI"/>
-              </a:rPr>
-              <a:t>"N sponsored schools live, their audiences arriving, and paying customers through checkout."</a:t>
+                  <a:srgbClr val="5A6072"/>
+                </a:solidFill>
+                <a:latin typeface="Segoe UI"/>
+              </a:rPr>
+              <a:t>"3 sponsored schools live, their audiences arriving, and paying customers through checkout."</a:t>
             </a:r>
             <a:r>
               <a:rPr sz="1300" b="0" i="1">
                 <a:solidFill>
-                  <a:srgbClr val="C2410C"/>
+                  <a:srgbClr val="5A6072"/>
                 </a:solidFill>
                 <a:latin typeface="Segoe UI"/>
               </a:rPr>
@@ -7720,7 +7694,7 @@
             <a:r>
               <a:rPr sz="1300" b="1" i="1">
                 <a:solidFill>
-                  <a:srgbClr val="C2410C"/>
+                  <a:srgbClr val="5A6072"/>
                 </a:solidFill>
                 <a:latin typeface="Segoe UI"/>
               </a:rPr>
@@ -7729,7 +7703,7 @@
             <a:r>
               <a:rPr sz="1300" b="0" i="1">
                 <a:solidFill>
-                  <a:srgbClr val="C2410C"/>
+                  <a:srgbClr val="5A6072"/>
                 </a:solidFill>
                 <a:latin typeface="Segoe UI"/>
               </a:rPr>
@@ -20551,7 +20525,7 @@
                 </a:solidFill>
                 <a:latin typeface="Segoe UI"/>
               </a:rPr>
-              <a:t>We don't displace the chatbot. We give it something to teach from.</a:t>
+              <a:t>We don't displace the chatbot. We supplement it and interact with it.</a:t>
             </a:r>
           </a:p>
         </p:txBody>
